--- a/docs/presentations/cfug-2026-09-15/wheels-rails-style-cfml-mmcfug-2026-09-15.pptx
+++ b/docs/presentations/cfug-2026-09-15/wheels-rails-style-cfml-mmcfug-2026-09-15.pptx
@@ -161,7 +161,7 @@
     </p:spTree>
     <p:extLst>
       <p:ext uri="{BB962C8B-B14F-4D97-AF65-F5344CB8AC3E}">
-        <p14:creationId xmlns:p14="http://schemas.microsoft.com/office/powerpoint/2010/main" val="2124866092"/>
+        <p14:creationId xmlns:p14="http://schemas.microsoft.com/office/powerpoint/2010/main" val="4091246194"/>
       </p:ext>
     </p:extLst>
   </p:cSld>
@@ -481,7 +481,7 @@
           <a:p>
             <a:r>
               <a:rPr lang="en-US" dirty="0"/>
-              <a:t>This is the answer to 'I don't want to install CommandBox to try it.' Homebrew, Chocolatey or Scoop, Java 21, done. Windows folks: choco install wheels. Everything you're about to see in the demo is one of these commands.</a:t>
+              <a:t>This is the answer to 'I don't want to install CommandBox to try it.' Homebrew on macOS or Linux, Scoop on Windows, Java 21, done. wheels-be tracks the develop branch if you want to see what's coming — that's the build tonight's demo may be running on. Linux matters beyond laptops: the same formula is what you put in a Dockerfile or a GitHub Actions runner, so the CLI that scaffolds your app is also the one that runs your test suite in CI and deploys it. Everything you're about to see in the demo is one of these commands.</a:t>
             </a:r>
           </a:p>
         </p:txBody>
@@ -655,7 +655,7 @@
           <a:p>
             <a:r>
               <a:rPr lang="en-US" dirty="0"/>
-              <a:t>If the first JVM boot is slow, keep talking — do NOT re-run wheels start. Fallback: cd ~/demo/blogdemo-final in the second tab.</a:t>
+              <a:t>First JVM boot: ~30–40 s before / answers. Keep talking — do NOT re-run wheels start. If a start ever fails partway it leaves a stale registration and the retry says 'registered to a different project: &lt;unknown&gt;' — recover with `wheels start --force`. Fallback: cd ~/demo/blogdemo-final in the second tab.</a:t>
             </a:r>
           </a:p>
         </p:txBody>
@@ -742,7 +742,7 @@
           <a:p>
             <a:r>
               <a:rPr lang="en-US" dirty="0"/>
-              <a:t>Running long? Skip wheels routes, keep the browser CRUD. Checkpoint tag: cp1-scaffold.</a:t>
+              <a:t>VERIFIED. The scaffold writes validatesPresenceOf(title,body,publishedAt) AND validatesLengthOf(title, 50). On snapshot 2461 the new routes show up without a reload, but keep the `wheels reload` in the script — model config still needs it and it costs two seconds. One .resources() line = 16 route rows (7 actions, each with/without .[format]), named posts / newPost / editPost / post — say 'the whole REST surface from one line', not 'seven routes'. The table also lists 38 internal /wheels/* routes, hence the grep. Seeder fixed in 2461 (real dates). Title the hand-made post 'Hello, Wheels' (Beat 4's LIKE query depends on it). Running long? Skip --dry-run and routes, keep the browser CRUD. Checkpoint: cp1-scaffold.</a:t>
             </a:r>
           </a:p>
         </p:txBody>
@@ -829,7 +829,7 @@
           <a:p>
             <a:r>
               <a:rPr lang="en-US" dirty="0"/>
-              <a:t>Open Post.cfc and Posts.cfc in the editor at 18pt+. Type the three config lines live. Checkpoint: cp1 still valid.</a:t>
+              <a:t>VERIFIED. Presence and length rules are already generated — don't pretend to type them. Type validatesExclusionOf(property="title", list="Untitled") — all-named arguments (the mixed form validatesExclusionOf("title", list=...) throws Missing argument name) and hasMany("comments"), then `wheels reload`. Do NOT type a uniqueness or minimum-length rule: uniqueness on title makes Beat 4's seed roll back (seeded titles repeat), and a body minimum breaks the generated specs' 'MyText' sample data (model config is cached; without the reload, include="comments" in Beat 4 fails with 'association comments could not be found'). Empty-form submit renders inline red errors. Known cosmetic: the publishedAt date selects repeat the error six times. Checkpoint: cp1 still valid.</a:t>
             </a:r>
           </a:p>
         </p:txBody>
@@ -916,7 +916,7 @@
           <a:p>
             <a:r>
               <a:rPr lang="en-US" dirty="0"/>
-              <a:t>The console is the FIRST thing to cut if behind — go straight to auth. Checkpoint: cp2-comments.</a:t>
+              <a:t>VERIFIED. Expected output: comments() → a one-row table; post().title → 'Test Title 3'; the builder → 'Hello, Wheels'. Each console line is its own stateless request — never `post = …` then `post.title`. Avoid findOne(include="comments") on stage: it prints a flattened row plus a second JSON dump and looks broken. Console needs the dev server running and development mode. First cut if behind. Checkpoint: cp2-comments.</a:t>
             </a:r>
           </a:p>
         </p:txBody>
@@ -1003,7 +1003,7 @@
           <a:p>
             <a:r>
               <a:rPr lang="en-US" dirty="0"/>
-              <a:t>Add one rule live in PostPolicy.cfc: function update() { return user.key() == resource.userId; }. If behind: generate auth, show the User model, skip the policy — but say the default-deny sentence anyway. Checkpoint: cp3-auth.</a:t>
+              <a:t>VERIFIED on develop (bcrypt generator commit 35894067e — make sure the demo machine has it). Reload after the migration or /register 404s. Flashes: 'Welcome!', 'You have been logged out.', 'Invalid email or password.', 'Welcome back.' Stored hash is a standard $2a$10$… string. Policy rule to type live (the generated file uses variables.user as a struct and variables.record): `public boolean function show() { return IsStruct(user) &amp;&amp; !StructIsEmpty(user); }`. To SHOW the 403, add `authorize(post);` after findByKey in Posts.show, reload, hit /posts/1 logged out → 403 Wheels.NotAuthorized with the Copy button; log in → 200. THEN REMOVE authorize() before Beat 6 or two Posts CRUD specs fail with 403 (they aren't logged in). If behind: generate auth, show the User model, skip the policy — but say the default-deny sentence anyway. Checkpoint: cp3-auth.</a:t>
             </a:r>
           </a:p>
         </p:txBody>
@@ -1090,7 +1090,7 @@
           <a:p>
             <a:r>
               <a:rPr lang="en-US" dirty="0"/>
-              <a:t>The break-it loop is the first cut if over time. The passing run is not. Checkpoint: cp4-tests.</a:t>
+              <a:t>VERIFIED with a caveat. Expected: 27 passed → 28 → break → '27 passed, 1 failed: requires a body' → 28. Test BODY, not title: with presence commented out, the {50} length rule still rejects an empty title so a title spec never goes red. KNOWN FIRST-RUN BUG (still in 2461): the first `wheels test` on a fresh test DB fails the Comment show/edit/update/delete specs — the generated spec hard-codes post_id=1 and the controller's findByKey(include="post") inner-joins, so with no Post 1 yet the record comes back false; the second run is green because the Posts specs have created posts. Until the generator creates the parent in beforeEach, run `wheels test` once off-screen right after the auth migration in Beat 5 so the on-stage run is the second one. `wheels reload` after each model edit. Checkpoint: cp4-tests.</a:t>
             </a:r>
           </a:p>
         </p:txBody>
@@ -1177,7 +1177,7 @@
           <a:p>
             <a:r>
               <a:rPr lang="en-US" dirty="0"/>
-              <a:t>Terminal only. About a minute per command. This beat is elastic — stretch or compress it to land on time for beat 8.</a:t>
+              <a:t>VERIFIED: info, migrate diff ('No differences found'), coverage (runs the suite, prints CRAP table, reverts instrumentation), api-resource → migrate → reload → POST returns 201 with the record, GET list 200. `wheels stats` is fixed in 2461 and can go back in if there's time. `wheels doctor` still flags the scaffold's own new(params.x)/update(params.x) five times — leave it out. Don't run `wheels test` after api-resource: specs run in a separate `_wheelsTest` application that `wheels reload` never refreshes, so the generated API specs can't find the apiProducts route. Also mention if time: bindBy=slug, wheels upgrade check (needs network), wheels engines rustcfml start, debug-bar complexity panel. This beat is elastic.</a:t>
             </a:r>
           </a:p>
         </p:txBody>
@@ -1351,7 +1351,7 @@
           <a:p>
             <a:r>
               <a:rPr lang="en-US" dirty="0"/>
-              <a:t>This beat buys credibility. Keep it to five minutes; it's the natural pitch for the intermediate session.</a:t>
+              <a:t>VERIFIED on 2461: `wheels mcp wheels` answers initialize/tools/list (19 tools). Full agent loop run over MCP: generate {type:scaffold, name:Tag, attributes:'name:string{30} slug:string'} → migrate {action:latest} → reload → seed {generate:true} → /tags served 200. Bare `wheels mcp` still prints 'missing module name' — always type `wheels mcp wheels`. A failing `test` over MCP still returns only 'Tests failed' without the report. Keep to five minutes; it's the natural pitch for the intermediate session.</a:t>
             </a:r>
           </a:p>
         </p:txBody>
@@ -1612,7 +1612,7 @@
           <a:p>
             <a:r>
               <a:rPr lang="en-US" dirty="0"/>
-              <a:t>Also have ready: 'Is this actually maintained?' — 4.0 this year, 4.1 current, regular cadence, public changelog, one primary maintainer and I'll be straight about that. 'Why not Rails/Laravel?' — if you're hiring fresh, maybe. If you have twenty years of CFML and people who know it, this is how that codebase gets a modern shape without a rewrite you'll never finish. 'Performance?' — 4.0.6 cut model instantiation roughly in half; benchmark suite is in the repo.</a:t>
+              <a:t>Also have ready: 'Is this actually maintained?' — 4.0 this year, 4.1 current, regular cadence, public changelog, one primary maintainer and I'll be straight about that. 'Why not Rails/Laravel?' — if you're hiring fresh, maybe. If you have twenty years of CFML and people who know it, this is how that codebase gets a modern shape without a rewrite you'll never finish. 'Performance?' — 4.0.6 and 4.1 together made model materialization roughly 3x faster (compile-time includes instead of copying ~270 methods per instance, then a direct constructor path); benchmark suite is in the repo. 'What about RocketUnit?' — deprecated in 4.1 with a one-time warning, removal planned for 5.0; WheelsTest is the path forward.</a:t>
             </a:r>
           </a:p>
         </p:txBody>
@@ -2047,7 +2047,7 @@
           <a:p>
             <a:r>
               <a:rPr lang="en-US" dirty="0"/>
-              <a:t>Be honest about the middle of this timeline — Rick said it himself: three-year ramp-up, lost interest. Acknowledge it, then pivot: the last nine months moved the framework more than the previous five years. That's what the rest of the talk demonstrates.</a:t>
+              <a:t>Timeline from the project's own history (Tom King, David Belanger, original members incl. Chris Peters): Rob Cameron founded it in 2005–06 as a Rails-inspired beta; 1.0 in 2008 under Per Djurner; 1.1 in 2010; 1.2 skipped as a milestone because it changed hands repeatedly; 1.3/1.4 in 2014; 2.0 in 2017; 3.0 January 2026; 4.x this year. Rick's point about the ramp-up is the gap between 2005 and 2008 — say so. The 2017–2026 gap is the 'solid but quiet' years. Then pivot: the last nine months moved the framework more than the previous five years, and that's what the demo shows.</a:t>
             </a:r>
           </a:p>
         </p:txBody>
@@ -2134,7 +2134,7 @@
           <a:p>
             <a:r>
               <a:rPr lang="en-US" dirty="0"/>
-              <a:t>The engine list matters to this crowd: Adobe shops are not excluded, and BoxLang is where a lot of new CFML will land. Mention that the same app and the same password hashes move between engines unchanged.</a:t>
+              <a:t>The engine list matters to this crowd: Adobe shops are not excluded, and BoxLang is where a lot of new CFML will land. RustCFML is the newest: a JVM-free CFML interpreter written in Rust, young but a supported engine — full core suite (~5,350 specs) runs against it on every PR, with a couple of known upstream gaps (Query-of-Queries) baselined. Mention that the same app and the same password hashes move between engines unchanged.</a:t>
             </a:r>
           </a:p>
         </p:txBody>
@@ -2308,7 +2308,7 @@
           <a:p>
             <a:r>
               <a:rPr lang="en-US" dirty="0"/>
-              <a:t>Walk left to right once. Emphasize that the controller and model are yours and small; everything else is convention. Mention that nothing here is a black box — every file lives in your app directory and you can read it.</a:t>
+              <a:t>Walk left to right once. The two dark boxes are the only ones you must write: a route in config/routes.cfm and a view. Wheels will instantiate a default controller when there's no Posts.cfc, and a view with no model is just a template. Controllers and models are where your logic and data live once you have some — which is why the scaffold generates them, but a static About page never needs them. Nothing here is a black box; every file lives in your app directory.</a:t>
             </a:r>
           </a:p>
         </p:txBody>
@@ -2869,7 +2869,7 @@
                 <a:ea typeface="Calibri" pitchFamily="34" charset="-122"/>
                 <a:cs typeface="Calibri" pitchFamily="34" charset="-120"/>
               </a:rPr>
-              <a:t>Building a blog live with Wheels 4 — no IDE, no config files, no CommandBox.</a:t>
+              <a:t>Building a blog live with Wheels 4.1 — no IDE, no config files, no CommandBox.</a:t>
             </a:r>
             <a:endParaRPr lang="en-US" sz="2000" dirty="0"/>
           </a:p>
@@ -2997,29 +2997,7 @@
                 <a:ea typeface="Calibri" pitchFamily="34" charset="-122"/>
                 <a:cs typeface="Calibri" pitchFamily="34" charset="-120"/>
               </a:rPr>
-              <a:t>wheels.dev  · </a:t>
-            </a:r>
-            <a:r>
-              <a:rPr lang="en-US" sz="900" dirty="0" err="1">
-                <a:solidFill>
-                  <a:srgbClr val="9AA7B4"/>
-                </a:solidFill>
-                <a:latin typeface="Calibri" pitchFamily="34" charset="0"/>
-                <a:ea typeface="Calibri" pitchFamily="34" charset="-122"/>
-                <a:cs typeface="Calibri" pitchFamily="34" charset="-120"/>
-              </a:rPr>
-              <a:t>github.com</a:t>
-            </a:r>
-            <a:r>
-              <a:rPr lang="en-US" sz="900" dirty="0">
-                <a:solidFill>
-                  <a:srgbClr val="9AA7B4"/>
-                </a:solidFill>
-                <a:latin typeface="Calibri" pitchFamily="34" charset="0"/>
-                <a:ea typeface="Calibri" pitchFamily="34" charset="-122"/>
-                <a:cs typeface="Calibri" pitchFamily="34" charset="-120"/>
-              </a:rPr>
-              <a:t>/wheels-dev/wheels</a:t>
+              <a:t>wheels.dev  ·  github.com/wheels-dev/wheels</a:t>
             </a:r>
             <a:endParaRPr lang="en-US" sz="900" dirty="0"/>
           </a:p>
@@ -3499,7 +3477,7 @@
                 <a:ea typeface="Courier New" pitchFamily="34" charset="-122"/>
                 <a:cs typeface="Courier New" pitchFamily="34" charset="-120"/>
               </a:rPr>
-              <a:t>"publishedAt &lt;= :now"</a:t>
+              <a:t>"body IS NOT NULL"</a:t>
             </a:r>
             <a:r>
               <a:rPr lang="en-US" sz="1050" dirty="0">
@@ -3530,7 +3508,7 @@
                 <a:ea typeface="Courier New" pitchFamily="34" charset="-122"/>
                 <a:cs typeface="Courier New" pitchFamily="34" charset="-120"/>
               </a:rPr>
-              <a:t>          order=</a:t>
+              <a:t>    order=</a:t>
             </a:r>
             <a:r>
               <a:rPr lang="en-US" sz="1050" dirty="0">
@@ -3672,14 +3650,13 @@
             <a:endParaRPr lang="en-US" sz="1050" dirty="0"/>
           </a:p>
           <a:p>
-            <a:pPr marL="0" indent="0">
+            <a:pPr>
               <a:lnSpc>
                 <a:spcPct val="115000"/>
               </a:lnSpc>
-              <a:buNone/>
-            </a:pPr>
-            <a:r>
-              <a:rPr lang="en-US" sz="1050" dirty="0">
+            </a:pPr>
+            <a:r>
+              <a:rPr lang="en-US" sz="1050">
                 <a:solidFill>
                   <a:srgbClr val="E6EDF3"/>
                 </a:solidFill>
@@ -3690,7 +3667,7 @@
               <a:t>  .where(</a:t>
             </a:r>
             <a:r>
-              <a:rPr lang="en-US" sz="1050" dirty="0">
+              <a:rPr lang="en-US" sz="1050">
                 <a:solidFill>
                   <a:srgbClr val="3DDC84"/>
                 </a:solidFill>
@@ -3698,10 +3675,10 @@
                 <a:ea typeface="Courier New" pitchFamily="34" charset="-122"/>
                 <a:cs typeface="Courier New" pitchFamily="34" charset="-120"/>
               </a:rPr>
-              <a:t>"title LIKE :q"</a:t>
-            </a:r>
-            <a:r>
-              <a:rPr lang="en-US" sz="1050" dirty="0">
+              <a:t>"title"</a:t>
+            </a:r>
+            <a:r>
+              <a:rPr lang="en-US" sz="1050">
                 <a:solidFill>
                   <a:srgbClr val="E6EDF3"/>
                 </a:solidFill>
@@ -3709,10 +3686,10 @@
                 <a:ea typeface="Courier New" pitchFamily="34" charset="-122"/>
                 <a:cs typeface="Courier New" pitchFamily="34" charset="-120"/>
               </a:rPr>
-              <a:t>, {q: </a:t>
-            </a:r>
-            <a:r>
-              <a:rPr lang="en-US" sz="1050" dirty="0">
+              <a:t>, </a:t>
+            </a:r>
+            <a:r>
+              <a:rPr lang="en-US" sz="1050">
                 <a:solidFill>
                   <a:srgbClr val="3DDC84"/>
                 </a:solidFill>
@@ -3720,10 +3697,32 @@
                 <a:ea typeface="Courier New" pitchFamily="34" charset="-122"/>
                 <a:cs typeface="Courier New" pitchFamily="34" charset="-120"/>
               </a:rPr>
+              <a:t>"LIKE"</a:t>
+            </a:r>
+            <a:r>
+              <a:rPr lang="en-US" sz="1050">
+                <a:solidFill>
+                  <a:srgbClr val="E6EDF3"/>
+                </a:solidFill>
+                <a:latin typeface="Courier New" pitchFamily="34" charset="0"/>
+                <a:ea typeface="Courier New" pitchFamily="34" charset="-122"/>
+                <a:cs typeface="Courier New" pitchFamily="34" charset="-120"/>
+              </a:rPr>
+              <a:t>, </a:t>
+            </a:r>
+            <a:r>
+              <a:rPr lang="en-US" sz="1050">
+                <a:solidFill>
+                  <a:srgbClr val="3DDC84"/>
+                </a:solidFill>
+                <a:latin typeface="Courier New" pitchFamily="34" charset="0"/>
+                <a:ea typeface="Courier New" pitchFamily="34" charset="-122"/>
+                <a:cs typeface="Courier New" pitchFamily="34" charset="-120"/>
+              </a:rPr>
               <a:t>"%wheels%"</a:t>
             </a:r>
             <a:r>
-              <a:rPr lang="en-US" sz="1050" dirty="0">
+              <a:rPr lang="en-US" sz="1050">
                 <a:solidFill>
                   <a:srgbClr val="E6EDF3"/>
                 </a:solidFill>
@@ -3731,30 +3730,38 @@
                 <a:ea typeface="Courier New" pitchFamily="34" charset="-122"/>
                 <a:cs typeface="Courier New" pitchFamily="34" charset="-120"/>
               </a:rPr>
-              <a:t>})</a:t>
-            </a:r>
-            <a:endParaRPr lang="en-US" sz="1050" dirty="0"/>
-          </a:p>
-          <a:p>
-            <a:pPr marL="0" indent="0">
+              <a:t>)</a:t>
+            </a:r>
+          </a:p>
+          <a:p>
+            <a:pPr>
               <a:lnSpc>
                 <a:spcPct val="115000"/>
               </a:lnSpc>
-              <a:buNone/>
-            </a:pPr>
-            <a:r>
-              <a:rPr lang="en-US" sz="1050" dirty="0">
+            </a:pPr>
+            <a:r>
+              <a:rPr lang="en-US" sz="1050">
                 <a:solidFill>
                   <a:srgbClr val="E6EDF3"/>
                 </a:solidFill>
                 <a:latin typeface="Courier New" pitchFamily="34" charset="0"/>
-                <a:ea typeface="Courier New" pitchFamily="34" charset="-122"/>
-                <a:cs typeface="Courier New" pitchFamily="34" charset="-120"/>
-              </a:rPr>
-              <a:t>  .orderBy(</a:t>
-            </a:r>
-            <a:r>
-              <a:rPr lang="en-US" sz="1050" dirty="0">
+                <a:cs typeface="Courier New" pitchFamily="34" charset="-120"/>
+              </a:rPr>
+              <a:t>  .orWhere</a:t>
+            </a:r>
+            <a:r>
+              <a:rPr lang="en-US" sz="1050">
+                <a:solidFill>
+                  <a:srgbClr val="E6EDF3"/>
+                </a:solidFill>
+                <a:latin typeface="Courier New" pitchFamily="34" charset="0"/>
+                <a:ea typeface="Courier New" pitchFamily="34" charset="-122"/>
+                <a:cs typeface="Courier New" pitchFamily="34" charset="-120"/>
+              </a:rPr>
+              <a:t>(</a:t>
+            </a:r>
+            <a:r>
+              <a:rPr lang="en-US" sz="1050">
                 <a:solidFill>
                   <a:srgbClr val="3DDC84"/>
                 </a:solidFill>
@@ -3762,10 +3769,10 @@
                 <a:ea typeface="Courier New" pitchFamily="34" charset="-122"/>
                 <a:cs typeface="Courier New" pitchFamily="34" charset="-120"/>
               </a:rPr>
-              <a:t>"publishedAt DESC"</a:t>
-            </a:r>
-            <a:r>
-              <a:rPr lang="en-US" sz="1050" dirty="0">
+              <a:t>"title"</a:t>
+            </a:r>
+            <a:r>
+              <a:rPr lang="en-US" sz="1050">
                 <a:solidFill>
                   <a:srgbClr val="E6EDF3"/>
                 </a:solidFill>
@@ -3773,17 +3780,212 @@
                 <a:ea typeface="Courier New" pitchFamily="34" charset="-122"/>
                 <a:cs typeface="Courier New" pitchFamily="34" charset="-120"/>
               </a:rPr>
-              <a:t>).limit(10).get();</a:t>
-            </a:r>
-            <a:endParaRPr lang="en-US" sz="1050" dirty="0"/>
-          </a:p>
-          <a:p>
-            <a:pPr marL="0" indent="0">
+              <a:t>, </a:t>
+            </a:r>
+            <a:r>
+              <a:rPr lang="en-US" sz="1050">
+                <a:solidFill>
+                  <a:srgbClr val="3DDC84"/>
+                </a:solidFill>
+                <a:latin typeface="Courier New" pitchFamily="34" charset="0"/>
+                <a:ea typeface="Courier New" pitchFamily="34" charset="-122"/>
+                <a:cs typeface="Courier New" pitchFamily="34" charset="-120"/>
+              </a:rPr>
+              <a:t>"LIKE"</a:t>
+            </a:r>
+            <a:r>
+              <a:rPr lang="en-US" sz="1050">
+                <a:solidFill>
+                  <a:srgbClr val="E6EDF3"/>
+                </a:solidFill>
+                <a:latin typeface="Courier New" pitchFamily="34" charset="0"/>
+                <a:ea typeface="Courier New" pitchFamily="34" charset="-122"/>
+                <a:cs typeface="Courier New" pitchFamily="34" charset="-120"/>
+              </a:rPr>
+              <a:t>, </a:t>
+            </a:r>
+            <a:r>
+              <a:rPr lang="en-US" sz="1050">
+                <a:solidFill>
+                  <a:srgbClr val="3DDC84"/>
+                </a:solidFill>
+                <a:latin typeface="Courier New" pitchFamily="34" charset="0"/>
+                <a:ea typeface="Courier New" pitchFamily="34" charset="-122"/>
+                <a:cs typeface="Courier New" pitchFamily="34" charset="-120"/>
+              </a:rPr>
+              <a:t>"%rails%"</a:t>
+            </a:r>
+            <a:r>
+              <a:rPr lang="en-US" sz="1050">
+                <a:solidFill>
+                  <a:srgbClr val="E6EDF3"/>
+                </a:solidFill>
+                <a:latin typeface="Courier New" pitchFamily="34" charset="0"/>
+                <a:ea typeface="Courier New" pitchFamily="34" charset="-122"/>
+                <a:cs typeface="Courier New" pitchFamily="34" charset="-120"/>
+              </a:rPr>
+              <a:t>)        // OR</a:t>
+            </a:r>
+            <a:br>
+              <a:rPr lang="en-US" sz="1050">
+                <a:solidFill>
+                  <a:srgbClr val="E6EDF3"/>
+                </a:solidFill>
+                <a:latin typeface="Courier New" pitchFamily="34" charset="0"/>
+                <a:ea typeface="Courier New" pitchFamily="34" charset="-122"/>
+                <a:cs typeface="Courier New" pitchFamily="34" charset="-120"/>
+              </a:rPr>
+            </a:br>
+            <a:r>
+              <a:rPr lang="en-US" sz="1050">
+                <a:solidFill>
+                  <a:srgbClr val="E6EDF3"/>
+                </a:solidFill>
+                <a:latin typeface="Courier New" pitchFamily="34" charset="0"/>
+                <a:ea typeface="Courier New" pitchFamily="34" charset="-122"/>
+                <a:cs typeface="Courier New" pitchFamily="34" charset="-120"/>
+              </a:rPr>
+              <a:t>  .where(</a:t>
+            </a:r>
+            <a:r>
+              <a:rPr lang="en-US" sz="1050">
+                <a:solidFill>
+                  <a:srgbClr val="3DDC84"/>
+                </a:solidFill>
+                <a:latin typeface="Courier New" pitchFamily="34" charset="0"/>
+                <a:ea typeface="Courier New" pitchFamily="34" charset="-122"/>
+                <a:cs typeface="Courier New" pitchFamily="34" charset="-120"/>
+              </a:rPr>
+              <a:t>”publishedAt"</a:t>
+            </a:r>
+            <a:r>
+              <a:rPr lang="en-US" sz="1050">
+                <a:solidFill>
+                  <a:srgbClr val="E6EDF3"/>
+                </a:solidFill>
+                <a:latin typeface="Courier New" pitchFamily="34" charset="0"/>
+                <a:ea typeface="Courier New" pitchFamily="34" charset="-122"/>
+                <a:cs typeface="Courier New" pitchFamily="34" charset="-120"/>
+              </a:rPr>
+              <a:t>, </a:t>
+            </a:r>
+            <a:r>
+              <a:rPr lang="en-US" sz="1050">
+                <a:solidFill>
+                  <a:srgbClr val="3DDC84"/>
+                </a:solidFill>
+                <a:latin typeface="Courier New" pitchFamily="34" charset="0"/>
+                <a:ea typeface="Courier New" pitchFamily="34" charset="-122"/>
+                <a:cs typeface="Courier New" pitchFamily="34" charset="-120"/>
+              </a:rPr>
+              <a:t>”&gt;="</a:t>
+            </a:r>
+            <a:r>
+              <a:rPr lang="en-US" sz="1050">
+                <a:solidFill>
+                  <a:srgbClr val="E6EDF3"/>
+                </a:solidFill>
+                <a:latin typeface="Courier New" pitchFamily="34" charset="0"/>
+                <a:ea typeface="Courier New" pitchFamily="34" charset="-122"/>
+                <a:cs typeface="Courier New" pitchFamily="34" charset="-120"/>
+              </a:rPr>
+              <a:t>, </a:t>
+            </a:r>
+            <a:r>
+              <a:rPr lang="en-US" sz="1050">
+                <a:solidFill>
+                  <a:srgbClr val="3DDC84"/>
+                </a:solidFill>
+                <a:latin typeface="Courier New" pitchFamily="34" charset="0"/>
+                <a:ea typeface="Courier New" pitchFamily="34" charset="-122"/>
+                <a:cs typeface="Courier New" pitchFamily="34" charset="-120"/>
+              </a:rPr>
+              <a:t>lastWeekStart</a:t>
+            </a:r>
+            <a:r>
+              <a:rPr lang="en-US" sz="1050">
+                <a:solidFill>
+                  <a:srgbClr val="E6EDF3"/>
+                </a:solidFill>
+                <a:latin typeface="Courier New" pitchFamily="34" charset="0"/>
+                <a:ea typeface="Courier New" pitchFamily="34" charset="-122"/>
+                <a:cs typeface="Courier New" pitchFamily="34" charset="-120"/>
+              </a:rPr>
+              <a:t>)  // AND</a:t>
+            </a:r>
+          </a:p>
+          <a:p>
+            <a:pPr>
               <a:lnSpc>
                 <a:spcPct val="115000"/>
               </a:lnSpc>
-              <a:buNone/>
-            </a:pPr>
+            </a:pPr>
+            <a:r>
+              <a:rPr lang="en-US" sz="1050">
+                <a:solidFill>
+                  <a:srgbClr val="E6EDF3"/>
+                </a:solidFill>
+                <a:latin typeface="Courier New" pitchFamily="34" charset="0"/>
+                <a:ea typeface="Courier New" pitchFamily="34" charset="-122"/>
+                <a:cs typeface="Courier New" pitchFamily="34" charset="-120"/>
+              </a:rPr>
+              <a:t>  .</a:t>
+            </a:r>
+            <a:r>
+              <a:rPr lang="en-US" sz="1050" dirty="0">
+                <a:solidFill>
+                  <a:srgbClr val="E6EDF3"/>
+                </a:solidFill>
+                <a:latin typeface="Courier New" pitchFamily="34" charset="0"/>
+                <a:ea typeface="Courier New" pitchFamily="34" charset="-122"/>
+                <a:cs typeface="Courier New" pitchFamily="34" charset="-120"/>
+              </a:rPr>
+              <a:t>orderBy(</a:t>
+            </a:r>
+            <a:r>
+              <a:rPr lang="en-US" sz="1050" dirty="0">
+                <a:solidFill>
+                  <a:srgbClr val="3DDC84"/>
+                </a:solidFill>
+                <a:latin typeface="Courier New" pitchFamily="34" charset="0"/>
+                <a:ea typeface="Courier New" pitchFamily="34" charset="-122"/>
+                <a:cs typeface="Courier New" pitchFamily="34" charset="-120"/>
+              </a:rPr>
+              <a:t>"publishedAt"</a:t>
+            </a:r>
+            <a:r>
+              <a:rPr lang="en-US" sz="1050" dirty="0">
+                <a:solidFill>
+                  <a:srgbClr val="E6EDF3"/>
+                </a:solidFill>
+                <a:latin typeface="Courier New" pitchFamily="34" charset="0"/>
+                <a:ea typeface="Courier New" pitchFamily="34" charset="-122"/>
+                <a:cs typeface="Courier New" pitchFamily="34" charset="-120"/>
+              </a:rPr>
+              <a:t>, </a:t>
+            </a:r>
+            <a:r>
+              <a:rPr lang="en-US" sz="1050" dirty="0">
+                <a:solidFill>
+                  <a:srgbClr val="3DDC84"/>
+                </a:solidFill>
+                <a:latin typeface="Courier New" pitchFamily="34" charset="0"/>
+                <a:ea typeface="Courier New" pitchFamily="34" charset="-122"/>
+                <a:cs typeface="Courier New" pitchFamily="34" charset="-120"/>
+              </a:rPr>
+              <a:t>"DESC"</a:t>
+            </a:r>
+            <a:r>
+              <a:rPr lang="en-US" sz="1050" dirty="0">
+                <a:solidFill>
+                  <a:srgbClr val="E6EDF3"/>
+                </a:solidFill>
+                <a:latin typeface="Courier New" pitchFamily="34" charset="0"/>
+                <a:ea typeface="Courier New" pitchFamily="34" charset="-122"/>
+                <a:cs typeface="Courier New" pitchFamily="34" charset="-120"/>
+              </a:rPr>
+              <a:t>).limit(10).get();</a:t>
+            </a:r>
             <a:endParaRPr lang="en-US" sz="1050" dirty="0"/>
           </a:p>
           <a:p>
@@ -3793,17 +3995,6 @@
               </a:lnSpc>
               <a:buNone/>
             </a:pPr>
-            <a:r>
-              <a:rPr lang="en-US" sz="1050" dirty="0">
-                <a:solidFill>
-                  <a:srgbClr val="9AA7B4"/>
-                </a:solidFill>
-                <a:latin typeface="Courier New" pitchFamily="34" charset="0"/>
-                <a:ea typeface="Courier New" pitchFamily="34" charset="-122"/>
-                <a:cs typeface="Courier New" pitchFamily="34" charset="-120"/>
-              </a:rPr>
-              <a:t>// write path</a:t>
-            </a:r>
             <a:endParaRPr lang="en-US" sz="1050" dirty="0"/>
           </a:p>
           <a:p>
@@ -3816,35 +4007,13 @@
             <a:r>
               <a:rPr lang="en-US" sz="1050" dirty="0">
                 <a:solidFill>
-                  <a:srgbClr val="E6EDF3"/>
-                </a:solidFill>
-                <a:latin typeface="Courier New" pitchFamily="34" charset="0"/>
-                <a:ea typeface="Courier New" pitchFamily="34" charset="-122"/>
-                <a:cs typeface="Courier New" pitchFamily="34" charset="-120"/>
-              </a:rPr>
-              <a:t>post = model(</a:t>
-            </a:r>
-            <a:r>
-              <a:rPr lang="en-US" sz="1050" dirty="0">
-                <a:solidFill>
-                  <a:srgbClr val="3DDC84"/>
-                </a:solidFill>
-                <a:latin typeface="Courier New" pitchFamily="34" charset="0"/>
-                <a:ea typeface="Courier New" pitchFamily="34" charset="-122"/>
-                <a:cs typeface="Courier New" pitchFamily="34" charset="-120"/>
-              </a:rPr>
-              <a:t>"Post"</a:t>
-            </a:r>
-            <a:r>
-              <a:rPr lang="en-US" sz="1050" dirty="0">
-                <a:solidFill>
-                  <a:srgbClr val="E6EDF3"/>
-                </a:solidFill>
-                <a:latin typeface="Courier New" pitchFamily="34" charset="0"/>
-                <a:ea typeface="Courier New" pitchFamily="34" charset="-122"/>
-                <a:cs typeface="Courier New" pitchFamily="34" charset="-120"/>
-              </a:rPr>
-              <a:t>).new(params.post);</a:t>
+                  <a:srgbClr val="9AA7B4"/>
+                </a:solidFill>
+                <a:latin typeface="Courier New" pitchFamily="34" charset="0"/>
+                <a:ea typeface="Courier New" pitchFamily="34" charset="-122"/>
+                <a:cs typeface="Courier New" pitchFamily="34" charset="-120"/>
+              </a:rPr>
+              <a:t>// write path</a:t>
             </a:r>
             <a:endParaRPr lang="en-US" sz="1050" dirty="0"/>
           </a:p>
@@ -3858,46 +4027,35 @@
             <a:r>
               <a:rPr lang="en-US" sz="1050" dirty="0">
                 <a:solidFill>
-                  <a:srgbClr val="EF3B2D"/>
-                </a:solidFill>
-                <a:latin typeface="Courier New" pitchFamily="34" charset="0"/>
-                <a:ea typeface="Courier New" pitchFamily="34" charset="-122"/>
-                <a:cs typeface="Courier New" pitchFamily="34" charset="-120"/>
-              </a:rPr>
-              <a:t>if</a:t>
+                  <a:srgbClr val="E6EDF3"/>
+                </a:solidFill>
+                <a:latin typeface="Courier New" pitchFamily="34" charset="0"/>
+                <a:ea typeface="Courier New" pitchFamily="34" charset="-122"/>
+                <a:cs typeface="Courier New" pitchFamily="34" charset="-120"/>
+              </a:rPr>
+              <a:t>post = model(</a:t>
             </a:r>
             <a:r>
               <a:rPr lang="en-US" sz="1050" dirty="0">
                 <a:solidFill>
+                  <a:srgbClr val="3DDC84"/>
+                </a:solidFill>
+                <a:latin typeface="Courier New" pitchFamily="34" charset="0"/>
+                <a:ea typeface="Courier New" pitchFamily="34" charset="-122"/>
+                <a:cs typeface="Courier New" pitchFamily="34" charset="-120"/>
+              </a:rPr>
+              <a:t>"Post"</a:t>
+            </a:r>
+            <a:r>
+              <a:rPr lang="en-US" sz="1050" dirty="0">
+                <a:solidFill>
                   <a:srgbClr val="E6EDF3"/>
                 </a:solidFill>
                 <a:latin typeface="Courier New" pitchFamily="34" charset="0"/>
                 <a:ea typeface="Courier New" pitchFamily="34" charset="-122"/>
                 <a:cs typeface="Courier New" pitchFamily="34" charset="-120"/>
               </a:rPr>
-              <a:t> (post.save()) redirectTo(route=</a:t>
-            </a:r>
-            <a:r>
-              <a:rPr lang="en-US" sz="1050" dirty="0">
-                <a:solidFill>
-                  <a:srgbClr val="3DDC84"/>
-                </a:solidFill>
-                <a:latin typeface="Courier New" pitchFamily="34" charset="0"/>
-                <a:ea typeface="Courier New" pitchFamily="34" charset="-122"/>
-                <a:cs typeface="Courier New" pitchFamily="34" charset="-120"/>
-              </a:rPr>
-              <a:t>"post"</a:t>
-            </a:r>
-            <a:r>
-              <a:rPr lang="en-US" sz="1050" dirty="0">
-                <a:solidFill>
-                  <a:srgbClr val="E6EDF3"/>
-                </a:solidFill>
-                <a:latin typeface="Courier New" pitchFamily="34" charset="0"/>
-                <a:ea typeface="Courier New" pitchFamily="34" charset="-122"/>
-                <a:cs typeface="Courier New" pitchFamily="34" charset="-120"/>
-              </a:rPr>
-              <a:t>, key=post.id);</a:t>
+              <a:t>).new(params.post);</a:t>
             </a:r>
             <a:endParaRPr lang="en-US" sz="1050" dirty="0"/>
           </a:p>
@@ -3917,6 +4075,59 @@
                 <a:ea typeface="Courier New" pitchFamily="34" charset="-122"/>
                 <a:cs typeface="Courier New" pitchFamily="34" charset="-120"/>
               </a:rPr>
+              <a:t>if</a:t>
+            </a:r>
+            <a:r>
+              <a:rPr lang="en-US" sz="1050" dirty="0">
+                <a:solidFill>
+                  <a:srgbClr val="E6EDF3"/>
+                </a:solidFill>
+                <a:latin typeface="Courier New" pitchFamily="34" charset="0"/>
+                <a:ea typeface="Courier New" pitchFamily="34" charset="-122"/>
+                <a:cs typeface="Courier New" pitchFamily="34" charset="-120"/>
+              </a:rPr>
+              <a:t> (post.save()) redirectTo(route=</a:t>
+            </a:r>
+            <a:r>
+              <a:rPr lang="en-US" sz="1050" dirty="0">
+                <a:solidFill>
+                  <a:srgbClr val="3DDC84"/>
+                </a:solidFill>
+                <a:latin typeface="Courier New" pitchFamily="34" charset="0"/>
+                <a:ea typeface="Courier New" pitchFamily="34" charset="-122"/>
+                <a:cs typeface="Courier New" pitchFamily="34" charset="-120"/>
+              </a:rPr>
+              <a:t>"post"</a:t>
+            </a:r>
+            <a:r>
+              <a:rPr lang="en-US" sz="1050" dirty="0">
+                <a:solidFill>
+                  <a:srgbClr val="E6EDF3"/>
+                </a:solidFill>
+                <a:latin typeface="Courier New" pitchFamily="34" charset="0"/>
+                <a:ea typeface="Courier New" pitchFamily="34" charset="-122"/>
+                <a:cs typeface="Courier New" pitchFamily="34" charset="-120"/>
+              </a:rPr>
+              <a:t>, key=post.id);</a:t>
+            </a:r>
+            <a:endParaRPr lang="en-US" sz="1050" dirty="0"/>
+          </a:p>
+          <a:p>
+            <a:pPr marL="0" indent="0">
+              <a:lnSpc>
+                <a:spcPct val="115000"/>
+              </a:lnSpc>
+              <a:buNone/>
+            </a:pPr>
+            <a:r>
+              <a:rPr lang="en-US" sz="1050" dirty="0">
+                <a:solidFill>
+                  <a:srgbClr val="EF3B2D"/>
+                </a:solidFill>
+                <a:latin typeface="Courier New" pitchFamily="34" charset="0"/>
+                <a:ea typeface="Courier New" pitchFamily="34" charset="-122"/>
+                <a:cs typeface="Courier New" pitchFamily="34" charset="-120"/>
+              </a:rPr>
               <a:t>else</a:t>
             </a:r>
             <a:r>
@@ -4105,9 +4316,17 @@
           <a:bodyPr wrap="square" lIns="0" tIns="0" rIns="0" bIns="0" rtlCol="0" anchor="t"/>
           <a:lstStyle/>
           <a:p>
-            <a:pPr marL="0" indent="0">
-              <a:buNone/>
-            </a:pPr>
+            <a:r>
+              <a:rPr lang="en-US" sz="1100">
+                <a:solidFill>
+                  <a:srgbClr val="6B7785"/>
+                </a:solidFill>
+                <a:latin typeface="Calibri" pitchFamily="34" charset="0"/>
+                <a:ea typeface="Calibri" pitchFamily="34" charset="-122"/>
+                <a:cs typeface="Calibri" pitchFamily="34" charset="-120"/>
+              </a:rPr>
+              <a:t>belongsTo · hasMany · </a:t>
+            </a:r>
             <a:r>
               <a:rPr lang="en-US" sz="1100" dirty="0">
                 <a:solidFill>
@@ -4117,7 +4336,7 @@
                 <a:ea typeface="Calibri" pitchFamily="34" charset="-122"/>
                 <a:cs typeface="Calibri" pitchFamily="34" charset="-120"/>
               </a:rPr>
-              <a:t>hasMany · belongsTo · hasOne, eager-loaded with include=</a:t>
+              <a:t>hasOne, eager-loaded with include=</a:t>
             </a:r>
             <a:endParaRPr lang="en-US" sz="1100" dirty="0"/>
           </a:p>
@@ -4501,11 +4720,11 @@
         <p:spPr>
           <a:xfrm>
             <a:off x="457200" y="1188720"/>
-            <a:ext cx="4206240" cy="1764792"/>
+            <a:ext cx="4206240" cy="2651760"/>
           </a:xfrm>
           <a:prstGeom prst="roundRect">
             <a:avLst>
-              <a:gd name="adj" fmla="val 4706"/>
+              <a:gd name="adj" fmla="val 2759"/>
             </a:avLst>
           </a:prstGeom>
           <a:solidFill>
@@ -4631,7 +4850,7 @@
         <p:spPr>
           <a:xfrm>
             <a:off x="640080" y="1508760"/>
-            <a:ext cx="3840480" cy="1408176"/>
+            <a:ext cx="3840480" cy="2240280"/>
           </a:xfrm>
           <a:prstGeom prst="rect">
             <a:avLst/>
@@ -4650,28 +4869,17 @@
               <a:buNone/>
             </a:pPr>
             <a:r>
-              <a:rPr lang="en-US" sz="1150" dirty="0">
-                <a:solidFill>
-                  <a:srgbClr val="EF3B2D"/>
-                </a:solidFill>
-                <a:latin typeface="Courier New" pitchFamily="34" charset="0"/>
-                <a:ea typeface="Courier New" pitchFamily="34" charset="-122"/>
-                <a:cs typeface="Courier New" pitchFamily="34" charset="-120"/>
-              </a:rPr>
-              <a:t>$ </a:t>
-            </a:r>
-            <a:r>
-              <a:rPr lang="en-US" sz="1150" dirty="0">
-                <a:solidFill>
-                  <a:srgbClr val="E6EDF3"/>
-                </a:solidFill>
-                <a:latin typeface="Courier New" pitchFamily="34" charset="0"/>
-                <a:ea typeface="Courier New" pitchFamily="34" charset="-122"/>
-                <a:cs typeface="Courier New" pitchFamily="34" charset="-120"/>
-              </a:rPr>
-              <a:t>brew tap wheels-dev/wheels</a:t>
-            </a:r>
-            <a:endParaRPr lang="en-US" sz="1150" dirty="0"/>
+              <a:rPr lang="en-US" sz="1050" dirty="0">
+                <a:solidFill>
+                  <a:srgbClr val="9AA7B4"/>
+                </a:solidFill>
+                <a:latin typeface="Courier New" pitchFamily="34" charset="0"/>
+                <a:ea typeface="Courier New" pitchFamily="34" charset="-122"/>
+                <a:cs typeface="Courier New" pitchFamily="34" charset="-120"/>
+              </a:rPr>
+              <a:t># macOS &amp; Linux — Homebrew</a:t>
+            </a:r>
+            <a:endParaRPr lang="en-US" sz="1050" dirty="0"/>
           </a:p>
           <a:p>
             <a:pPr marL="0" indent="0">
@@ -4681,7 +4889,7 @@
               <a:buNone/>
             </a:pPr>
             <a:r>
-              <a:rPr lang="en-US" sz="1150" dirty="0">
+              <a:rPr lang="en-US" sz="1050" dirty="0">
                 <a:solidFill>
                   <a:srgbClr val="EF3B2D"/>
                 </a:solidFill>
@@ -4692,7 +4900,7 @@
               <a:t>$ </a:t>
             </a:r>
             <a:r>
-              <a:rPr lang="en-US" sz="1150" dirty="0">
+              <a:rPr lang="en-US" sz="1050" dirty="0">
                 <a:solidFill>
                   <a:srgbClr val="E6EDF3"/>
                 </a:solidFill>
@@ -4700,18 +4908,41 @@
                 <a:ea typeface="Courier New" pitchFamily="34" charset="-122"/>
                 <a:cs typeface="Courier New" pitchFamily="34" charset="-120"/>
               </a:rPr>
-              <a:t>brew install wheels        </a:t>
-            </a:r>
-            <a:endParaRPr lang="en-US" sz="1150" dirty="0"/>
-          </a:p>
-          <a:p>
-            <a:pPr>
+              <a:t>brew tap wheels-dev/wheels</a:t>
+            </a:r>
+            <a:endParaRPr lang="en-US" sz="1050" dirty="0"/>
+          </a:p>
+          <a:p>
+            <a:pPr marL="0" indent="0">
               <a:lnSpc>
                 <a:spcPct val="115000"/>
               </a:lnSpc>
-            </a:pPr>
-            <a:r>
-              <a:rPr lang="en-US" sz="1150" dirty="0">
+              <a:buNone/>
+            </a:pPr>
+            <a:r>
+              <a:rPr lang="en-US" sz="1050" dirty="0">
+                <a:solidFill>
+                  <a:srgbClr val="EF3B2D"/>
+                </a:solidFill>
+                <a:latin typeface="Courier New" pitchFamily="34" charset="0"/>
+                <a:ea typeface="Courier New" pitchFamily="34" charset="-122"/>
+                <a:cs typeface="Courier New" pitchFamily="34" charset="-120"/>
+              </a:rPr>
+              <a:t>$ </a:t>
+            </a:r>
+            <a:r>
+              <a:rPr lang="en-US" sz="1050" dirty="0">
+                <a:solidFill>
+                  <a:srgbClr val="E6EDF3"/>
+                </a:solidFill>
+                <a:latin typeface="Courier New" pitchFamily="34" charset="0"/>
+                <a:ea typeface="Courier New" pitchFamily="34" charset="-122"/>
+                <a:cs typeface="Courier New" pitchFamily="34" charset="-120"/>
+              </a:rPr>
+              <a:t>brew install wheels      </a:t>
+            </a:r>
+            <a:r>
+              <a:rPr lang="en-US" sz="1050" dirty="0">
                 <a:solidFill>
                   <a:srgbClr val="9AA7B4"/>
                 </a:solidFill>
@@ -4719,18 +4950,41 @@
                 <a:ea typeface="Courier New" pitchFamily="34" charset="-122"/>
                 <a:cs typeface="Courier New" pitchFamily="34" charset="-120"/>
               </a:rPr>
-              <a:t># brew install wheels-be</a:t>
-            </a:r>
-            <a:endParaRPr lang="en-US" sz="1150" dirty="0"/>
-          </a:p>
-          <a:p>
-            <a:pPr>
+              <a:t># stable</a:t>
+            </a:r>
+            <a:endParaRPr lang="en-US" sz="1050" dirty="0"/>
+          </a:p>
+          <a:p>
+            <a:pPr marL="0" indent="0">
               <a:lnSpc>
                 <a:spcPct val="115000"/>
               </a:lnSpc>
-            </a:pPr>
-            <a:r>
-              <a:rPr lang="en-US" sz="1150" dirty="0">
+              <a:buNone/>
+            </a:pPr>
+            <a:r>
+              <a:rPr lang="en-US" sz="1050" dirty="0">
+                <a:solidFill>
+                  <a:srgbClr val="EF3B2D"/>
+                </a:solidFill>
+                <a:latin typeface="Courier New" pitchFamily="34" charset="0"/>
+                <a:ea typeface="Courier New" pitchFamily="34" charset="-122"/>
+                <a:cs typeface="Courier New" pitchFamily="34" charset="-120"/>
+              </a:rPr>
+              <a:t>$ </a:t>
+            </a:r>
+            <a:r>
+              <a:rPr lang="en-US" sz="1050" dirty="0">
+                <a:solidFill>
+                  <a:srgbClr val="E6EDF3"/>
+                </a:solidFill>
+                <a:latin typeface="Courier New" pitchFamily="34" charset="0"/>
+                <a:ea typeface="Courier New" pitchFamily="34" charset="-122"/>
+                <a:cs typeface="Courier New" pitchFamily="34" charset="-120"/>
+              </a:rPr>
+              <a:t>brew install wheels-be   </a:t>
+            </a:r>
+            <a:r>
+              <a:rPr lang="en-US" sz="1050" dirty="0">
                 <a:solidFill>
                   <a:srgbClr val="9AA7B4"/>
                 </a:solidFill>
@@ -4738,9 +4992,9 @@
                 <a:ea typeface="Courier New" pitchFamily="34" charset="-122"/>
                 <a:cs typeface="Courier New" pitchFamily="34" charset="-120"/>
               </a:rPr>
-              <a:t># or scoop on Windows</a:t>
-            </a:r>
-            <a:endParaRPr lang="en-US" sz="1150" dirty="0"/>
+              <a:t># bleeding edge</a:t>
+            </a:r>
+            <a:endParaRPr lang="en-US" sz="1050" dirty="0"/>
           </a:p>
           <a:p>
             <a:pPr marL="0" indent="0">
@@ -4749,29 +5003,7 @@
               </a:lnSpc>
               <a:buNone/>
             </a:pPr>
-            <a:r>
-              <a:rPr lang="en-US" sz="1150" dirty="0">
-                <a:solidFill>
-                  <a:srgbClr val="EF3B2D"/>
-                </a:solidFill>
-                <a:latin typeface="Courier New" pitchFamily="34" charset="0"/>
-                <a:ea typeface="Courier New" pitchFamily="34" charset="-122"/>
-                <a:cs typeface="Courier New" pitchFamily="34" charset="-120"/>
-              </a:rPr>
-              <a:t>$ </a:t>
-            </a:r>
-            <a:r>
-              <a:rPr lang="en-US" sz="1150" dirty="0">
-                <a:solidFill>
-                  <a:srgbClr val="E6EDF3"/>
-                </a:solidFill>
-                <a:latin typeface="Courier New" pitchFamily="34" charset="0"/>
-                <a:ea typeface="Courier New" pitchFamily="34" charset="-122"/>
-                <a:cs typeface="Courier New" pitchFamily="34" charset="-120"/>
-              </a:rPr>
-              <a:t>wheels new myapp &amp;&amp; cd myapp</a:t>
-            </a:r>
-            <a:endParaRPr lang="en-US" sz="1150" dirty="0"/>
+            <a:endParaRPr lang="en-US" sz="1050" dirty="0"/>
           </a:p>
           <a:p>
             <a:pPr marL="0" indent="0">
@@ -4781,28 +5013,17 @@
               <a:buNone/>
             </a:pPr>
             <a:r>
-              <a:rPr lang="en-US" sz="1150" dirty="0">
-                <a:solidFill>
-                  <a:srgbClr val="EF3B2D"/>
-                </a:solidFill>
-                <a:latin typeface="Courier New" pitchFamily="34" charset="0"/>
-                <a:ea typeface="Courier New" pitchFamily="34" charset="-122"/>
-                <a:cs typeface="Courier New" pitchFamily="34" charset="-120"/>
-              </a:rPr>
-              <a:t>$ </a:t>
-            </a:r>
-            <a:r>
-              <a:rPr lang="en-US" sz="1150" dirty="0">
-                <a:solidFill>
-                  <a:srgbClr val="E6EDF3"/>
-                </a:solidFill>
-                <a:latin typeface="Courier New" pitchFamily="34" charset="0"/>
-                <a:ea typeface="Courier New" pitchFamily="34" charset="-122"/>
-                <a:cs typeface="Courier New" pitchFamily="34" charset="-120"/>
-              </a:rPr>
-              <a:t>wheels start               </a:t>
-            </a:r>
-            <a:endParaRPr lang="en-US" sz="1150" dirty="0"/>
+              <a:rPr lang="en-US" sz="1050" dirty="0">
+                <a:solidFill>
+                  <a:srgbClr val="9AA7B4"/>
+                </a:solidFill>
+                <a:latin typeface="Courier New" pitchFamily="34" charset="0"/>
+                <a:ea typeface="Courier New" pitchFamily="34" charset="-122"/>
+                <a:cs typeface="Courier New" pitchFamily="34" charset="-120"/>
+              </a:rPr>
+              <a:t># Windows — Scoop</a:t>
+            </a:r>
+            <a:endParaRPr lang="en-US" sz="1050" dirty="0"/>
           </a:p>
           <a:p>
             <a:pPr marL="0" indent="0">
@@ -4812,7 +5033,80 @@
               <a:buNone/>
             </a:pPr>
             <a:r>
-              <a:rPr lang="en-US" sz="1150" dirty="0">
+              <a:rPr lang="en-US" sz="1050" dirty="0">
+                <a:solidFill>
+                  <a:srgbClr val="EF3B2D"/>
+                </a:solidFill>
+                <a:latin typeface="Courier New" pitchFamily="34" charset="0"/>
+                <a:ea typeface="Courier New" pitchFamily="34" charset="-122"/>
+                <a:cs typeface="Courier New" pitchFamily="34" charset="-120"/>
+              </a:rPr>
+              <a:t>$ </a:t>
+            </a:r>
+            <a:r>
+              <a:rPr lang="en-US" sz="1050" dirty="0">
+                <a:solidFill>
+                  <a:srgbClr val="E6EDF3"/>
+                </a:solidFill>
+                <a:latin typeface="Courier New" pitchFamily="34" charset="0"/>
+                <a:ea typeface="Courier New" pitchFamily="34" charset="-122"/>
+                <a:cs typeface="Courier New" pitchFamily="34" charset="-120"/>
+              </a:rPr>
+              <a:t>scoop bucket add wheels \</a:t>
+            </a:r>
+            <a:endParaRPr lang="en-US" sz="1050" dirty="0"/>
+          </a:p>
+          <a:p>
+            <a:pPr marL="0" indent="0">
+              <a:lnSpc>
+                <a:spcPct val="115000"/>
+              </a:lnSpc>
+              <a:buNone/>
+            </a:pPr>
+            <a:r>
+              <a:rPr lang="en-US" sz="1050" dirty="0">
+                <a:solidFill>
+                  <a:srgbClr val="E6EDF3"/>
+                </a:solidFill>
+                <a:latin typeface="Courier New" pitchFamily="34" charset="0"/>
+                <a:ea typeface="Courier New" pitchFamily="34" charset="-122"/>
+                <a:cs typeface="Courier New" pitchFamily="34" charset="-120"/>
+              </a:rPr>
+              <a:t>    https://github.com/wheels-dev/scoop-wheels</a:t>
+            </a:r>
+            <a:endParaRPr lang="en-US" sz="1050" dirty="0"/>
+          </a:p>
+          <a:p>
+            <a:pPr marL="0" indent="0">
+              <a:lnSpc>
+                <a:spcPct val="115000"/>
+              </a:lnSpc>
+              <a:buNone/>
+            </a:pPr>
+            <a:r>
+              <a:rPr lang="en-US" sz="1050" dirty="0">
+                <a:solidFill>
+                  <a:srgbClr val="EF3B2D"/>
+                </a:solidFill>
+                <a:latin typeface="Courier New" pitchFamily="34" charset="0"/>
+                <a:ea typeface="Courier New" pitchFamily="34" charset="-122"/>
+                <a:cs typeface="Courier New" pitchFamily="34" charset="-120"/>
+              </a:rPr>
+              <a:t>$ </a:t>
+            </a:r>
+            <a:r>
+              <a:rPr lang="en-US" sz="1050" dirty="0">
+                <a:solidFill>
+                  <a:srgbClr val="E6EDF3"/>
+                </a:solidFill>
+                <a:latin typeface="Courier New" pitchFamily="34" charset="0"/>
+                <a:ea typeface="Courier New" pitchFamily="34" charset="-122"/>
+                <a:cs typeface="Courier New" pitchFamily="34" charset="-120"/>
+              </a:rPr>
+              <a:t>scoop install wheels     </a:t>
+            </a:r>
+            <a:r>
+              <a:rPr lang="en-US" sz="1050" dirty="0">
                 <a:solidFill>
                   <a:srgbClr val="9AA7B4"/>
                 </a:solidFill>
@@ -4820,9 +5114,49 @@
                 <a:ea typeface="Courier New" pitchFamily="34" charset="-122"/>
                 <a:cs typeface="Courier New" pitchFamily="34" charset="-120"/>
               </a:rPr>
-              <a:t># Lucee ships inside the CLI</a:t>
-            </a:r>
-            <a:endParaRPr lang="en-US" sz="1150" dirty="0"/>
+              <a:t># or wheels-be</a:t>
+            </a:r>
+            <a:endParaRPr lang="en-US" sz="1050" dirty="0"/>
+          </a:p>
+          <a:p>
+            <a:pPr marL="0" indent="0">
+              <a:lnSpc>
+                <a:spcPct val="115000"/>
+              </a:lnSpc>
+              <a:buNone/>
+            </a:pPr>
+            <a:endParaRPr lang="en-US" sz="1050" dirty="0"/>
+          </a:p>
+          <a:p>
+            <a:pPr marL="0" indent="0">
+              <a:lnSpc>
+                <a:spcPct val="115000"/>
+              </a:lnSpc>
+              <a:buNone/>
+            </a:pPr>
+            <a:r>
+              <a:rPr lang="en-US" sz="1050" dirty="0">
+                <a:solidFill>
+                  <a:srgbClr val="EF3B2D"/>
+                </a:solidFill>
+                <a:latin typeface="Courier New" pitchFamily="34" charset="0"/>
+                <a:ea typeface="Courier New" pitchFamily="34" charset="-122"/>
+                <a:cs typeface="Courier New" pitchFamily="34" charset="-120"/>
+              </a:rPr>
+              <a:t>$ </a:t>
+            </a:r>
+            <a:r>
+              <a:rPr lang="en-US" sz="1050" dirty="0">
+                <a:solidFill>
+                  <a:srgbClr val="E6EDF3"/>
+                </a:solidFill>
+                <a:latin typeface="Courier New" pitchFamily="34" charset="0"/>
+                <a:ea typeface="Courier New" pitchFamily="34" charset="-122"/>
+                <a:cs typeface="Courier New" pitchFamily="34" charset="-120"/>
+              </a:rPr>
+              <a:t>wheels new myapp &amp;&amp; cd myapp &amp;&amp; wheels start</a:t>
+            </a:r>
+            <a:endParaRPr lang="en-US" sz="1050" dirty="0"/>
           </a:p>
         </p:txBody>
       </p:sp>
@@ -4834,8 +5168,8 @@
         </p:nvSpPr>
         <p:spPr>
           <a:xfrm>
-            <a:off x="457200" y="3044952"/>
-            <a:ext cx="4206240" cy="822960"/>
+            <a:off x="457200" y="3931920"/>
+            <a:ext cx="4206240" cy="777240"/>
           </a:xfrm>
           <a:prstGeom prst="rect">
             <a:avLst/>
@@ -4851,7 +5185,7 @@
               <a:buNone/>
             </a:pPr>
             <a:r>
-              <a:rPr lang="en-US" sz="1250" dirty="0">
+              <a:rPr lang="en-US" sz="1100" dirty="0">
                 <a:solidFill>
                   <a:srgbClr val="6B7785"/>
                 </a:solidFill>
@@ -4859,9 +5193,20 @@
                 <a:ea typeface="Calibri" pitchFamily="34" charset="-122"/>
                 <a:cs typeface="Calibri" pitchFamily="34" charset="-120"/>
               </a:rPr>
-              <a:t>Only dependency: Java 21. The CLI bundles LuCLI + Lucee, so a laptop with no CFML engine installed is running a Wheels app about a minute after brew finishes.</a:t>
-            </a:r>
-            <a:endParaRPr lang="en-US" sz="1250" dirty="0"/>
+              <a:t>Only dependency: Java 21. Linux is a first-class target — the same brew formula runs on Ubuntu, Debian, Fedora and friends, so CI runners, Docker images and servers get the same CLI as your </a:t>
+            </a:r>
+            <a:r>
+              <a:rPr lang="en-US" sz="1100">
+                <a:solidFill>
+                  <a:srgbClr val="6B7785"/>
+                </a:solidFill>
+                <a:latin typeface="Calibri" pitchFamily="34" charset="0"/>
+                <a:ea typeface="Calibri" pitchFamily="34" charset="-122"/>
+                <a:cs typeface="Calibri" pitchFamily="34" charset="-120"/>
+              </a:rPr>
+              <a:t>laptop. Support the native yum and apt package managers on Linux. </a:t>
+            </a:r>
+            <a:endParaRPr lang="en-US" sz="1100" dirty="0"/>
           </a:p>
         </p:txBody>
       </p:sp>
@@ -5163,7 +5508,7 @@
               <a:buNone/>
             </a:pPr>
             <a:r>
-              <a:rPr lang="en-US" sz="1100" dirty="0" err="1">
+              <a:rPr lang="en-US" sz="1100" dirty="0">
                 <a:solidFill>
                   <a:srgbClr val="6B7785"/>
                 </a:solidFill>
@@ -5171,18 +5516,7 @@
                 <a:ea typeface="Calibri" pitchFamily="34" charset="-122"/>
                 <a:cs typeface="Calibri" pitchFamily="34" charset="-120"/>
               </a:rPr>
-              <a:t>WheelsBox</a:t>
-            </a:r>
-            <a:r>
-              <a:rPr lang="en-US" sz="1100" dirty="0">
-                <a:solidFill>
-                  <a:srgbClr val="6B7785"/>
-                </a:solidFill>
-                <a:latin typeface="Calibri" pitchFamily="34" charset="0"/>
-                <a:ea typeface="Calibri" pitchFamily="34" charset="-122"/>
-                <a:cs typeface="Calibri" pitchFamily="34" charset="-120"/>
-              </a:rPr>
-              <a:t> runner and diagnostics</a:t>
+              <a:t>WheelsTest runner and diagnostics</a:t>
             </a:r>
             <a:endParaRPr lang="en-US" sz="1100" dirty="0"/>
           </a:p>
@@ -6690,7 +7024,7 @@
                 <a:ea typeface="Courier New" pitchFamily="34" charset="-122"/>
                 <a:cs typeface="Courier New" pitchFamily="34" charset="-120"/>
               </a:rPr>
-              <a:t># browser opens on the welcome page</a:t>
+              <a:t># browser opens on the welcome page:</a:t>
             </a:r>
             <a:endParaRPr lang="en-US" sz="1100" dirty="0"/>
           </a:p>
@@ -6710,7 +7044,7 @@
                 <a:ea typeface="Courier New" pitchFamily="34" charset="-122"/>
                 <a:cs typeface="Courier New" pitchFamily="34" charset="-120"/>
               </a:rPr>
-              <a:t># status line: version · engine · db · env</a:t>
+              <a:t># "Your Wheels 4.1 application is running on</a:t>
             </a:r>
             <a:endParaRPr lang="en-US" sz="1100" dirty="0"/>
           </a:p>
@@ -6721,6 +7055,17 @@
               </a:lnSpc>
               <a:buNone/>
             </a:pPr>
+            <a:r>
+              <a:rPr lang="en-US" sz="1100" dirty="0">
+                <a:solidFill>
+                  <a:srgbClr val="9AA7B4"/>
+                </a:solidFill>
+                <a:latin typeface="Courier New" pitchFamily="34" charset="0"/>
+                <a:ea typeface="Courier New" pitchFamily="34" charset="-122"/>
+                <a:cs typeface="Courier New" pitchFamily="34" charset="-120"/>
+              </a:rPr>
+              <a:t>#  Lucee with blogdemo (development)"</a:t>
+            </a:r>
             <a:endParaRPr lang="en-US" sz="1100" dirty="0"/>
           </a:p>
           <a:p>
@@ -6730,28 +7075,6 @@
               </a:lnSpc>
               <a:buNone/>
             </a:pPr>
-            <a:r>
-              <a:rPr lang="en-US" sz="1100" dirty="0">
-                <a:solidFill>
-                  <a:srgbClr val="EF3B2D"/>
-                </a:solidFill>
-                <a:latin typeface="Courier New" pitchFamily="34" charset="0"/>
-                <a:ea typeface="Courier New" pitchFamily="34" charset="-122"/>
-                <a:cs typeface="Courier New" pitchFamily="34" charset="-120"/>
-              </a:rPr>
-              <a:t>$ </a:t>
-            </a:r>
-            <a:r>
-              <a:rPr lang="en-US" sz="1100" dirty="0">
-                <a:solidFill>
-                  <a:srgbClr val="E6EDF3"/>
-                </a:solidFill>
-                <a:latin typeface="Courier New" pitchFamily="34" charset="0"/>
-                <a:ea typeface="Courier New" pitchFamily="34" charset="-122"/>
-                <a:cs typeface="Courier New" pitchFamily="34" charset="-120"/>
-              </a:rPr>
-              <a:t>ls</a:t>
-            </a:r>
             <a:endParaRPr lang="en-US" sz="1100" dirty="0"/>
           </a:p>
           <a:p>
@@ -6764,13 +7087,64 @@
             <a:r>
               <a:rPr lang="en-US" sz="1100" dirty="0">
                 <a:solidFill>
+                  <a:srgbClr val="EF3B2D"/>
+                </a:solidFill>
+                <a:latin typeface="Courier New" pitchFamily="34" charset="0"/>
+                <a:ea typeface="Courier New" pitchFamily="34" charset="-122"/>
+                <a:cs typeface="Courier New" pitchFamily="34" charset="-120"/>
+              </a:rPr>
+              <a:t>$ </a:t>
+            </a:r>
+            <a:r>
+              <a:rPr lang="en-US" sz="1100" dirty="0">
+                <a:solidFill>
                   <a:srgbClr val="E6EDF3"/>
                 </a:solidFill>
                 <a:latin typeface="Courier New" pitchFamily="34" charset="0"/>
                 <a:ea typeface="Courier New" pitchFamily="34" charset="-122"/>
                 <a:cs typeface="Courier New" pitchFamily="34" charset="-120"/>
               </a:rPr>
-              <a:t>app  config  db  public  tests  vendor  wheels.json</a:t>
+              <a:t>ls</a:t>
+            </a:r>
+            <a:endParaRPr lang="en-US" sz="1100" dirty="0"/>
+          </a:p>
+          <a:p>
+            <a:pPr marL="0" indent="0">
+              <a:lnSpc>
+                <a:spcPct val="115000"/>
+              </a:lnSpc>
+              <a:buNone/>
+            </a:pPr>
+            <a:r>
+              <a:rPr lang="en-US" sz="1100" dirty="0">
+                <a:solidFill>
+                  <a:srgbClr val="E6EDF3"/>
+                </a:solidFill>
+                <a:latin typeface="Courier New" pitchFamily="34" charset="0"/>
+                <a:ea typeface="Courier New" pitchFamily="34" charset="-122"/>
+                <a:cs typeface="Courier New" pitchFamily="34" charset="-120"/>
+              </a:rPr>
+              <a:t>AGENTS.md  CLAUDE.md  app  config  db  lucee.json</a:t>
+            </a:r>
+            <a:endParaRPr lang="en-US" sz="1100" dirty="0"/>
+          </a:p>
+          <a:p>
+            <a:pPr marL="0" indent="0">
+              <a:lnSpc>
+                <a:spcPct val="115000"/>
+              </a:lnSpc>
+              <a:buNone/>
+            </a:pPr>
+            <a:r>
+              <a:rPr lang="en-US" sz="1100" dirty="0">
+                <a:solidFill>
+                  <a:srgbClr val="E6EDF3"/>
+                </a:solidFill>
+                <a:latin typeface="Courier New" pitchFamily="34" charset="0"/>
+                <a:ea typeface="Courier New" pitchFamily="34" charset="-122"/>
+                <a:cs typeface="Courier New" pitchFamily="34" charset="-120"/>
+              </a:rPr>
+              <a:t>public  rewrite.config  tests  vendor</a:t>
             </a:r>
             <a:endParaRPr lang="en-US" sz="1100" dirty="0"/>
           </a:p>
@@ -6832,7 +7206,7 @@
                 <a:ea typeface="Calibri" pitchFamily="34" charset="-122"/>
                 <a:cs typeface="Calibri" pitchFamily="34" charset="-120"/>
               </a:rPr>
-              <a:t>Point at the runtime status line. Then ls: your code in app/, the framework in vendor/.</a:t>
+              <a:t>Point at the welcome line: version, engine, datasource, environment. Then ls: your code in app/, the framework in vendor/ — and CLAUDE.md and AGENTS.md are already there. We'll come back to those.</a:t>
             </a:r>
             <a:endParaRPr lang="en-US" sz="1400" dirty="0"/>
           </a:p>
@@ -7006,7 +7380,7 @@
                 <a:ea typeface="Calibri" pitchFamily="34" charset="-122"/>
                 <a:cs typeface="Calibri" pitchFamily="34" charset="-120"/>
               </a:rPr>
-              <a:t>LIVE DEMO · BEAT 2 OF 8 · ~6 MIN</a:t>
+              <a:t>LIVE DEMO · BEAT 2 OF 8 · ~8 MIN</a:t>
             </a:r>
             <a:endParaRPr lang="en-US" sz="1000" dirty="0"/>
           </a:p>
@@ -7248,7 +7622,7 @@
                 <a:ea typeface="Courier New" pitchFamily="34" charset="-122"/>
                 <a:cs typeface="Courier New" pitchFamily="34" charset="-120"/>
               </a:rPr>
-              <a:t>    title:string body:text publishedAt:datetime</a:t>
+              <a:t>    title:string{50} body:text publishedAt:datetime \</a:t>
             </a:r>
             <a:endParaRPr lang="en-US" sz="1100" dirty="0"/>
           </a:p>
@@ -7259,6 +7633,50 @@
               </a:lnSpc>
               <a:buNone/>
             </a:pPr>
+            <a:r>
+              <a:rPr lang="en-US" sz="1100" dirty="0">
+                <a:solidFill>
+                  <a:srgbClr val="E6EDF3"/>
+                </a:solidFill>
+                <a:latin typeface="Courier New" pitchFamily="34" charset="0"/>
+                <a:ea typeface="Courier New" pitchFamily="34" charset="-122"/>
+                <a:cs typeface="Courier New" pitchFamily="34" charset="-120"/>
+              </a:rPr>
+              <a:t>    </a:t>
+            </a:r>
+            <a:r>
+              <a:rPr lang="en-US" sz="1100" dirty="0">
+                <a:solidFill>
+                  <a:srgbClr val="EF3B2D"/>
+                </a:solidFill>
+                <a:latin typeface="Courier New" pitchFamily="34" charset="0"/>
+                <a:ea typeface="Courier New" pitchFamily="34" charset="-122"/>
+                <a:cs typeface="Courier New" pitchFamily="34" charset="-120"/>
+              </a:rPr>
+              <a:t>--dry-run</a:t>
+            </a:r>
+            <a:r>
+              <a:rPr lang="en-US" sz="1100" dirty="0">
+                <a:solidFill>
+                  <a:srgbClr val="E6EDF3"/>
+                </a:solidFill>
+                <a:latin typeface="Courier New" pitchFamily="34" charset="0"/>
+                <a:ea typeface="Courier New" pitchFamily="34" charset="-122"/>
+                <a:cs typeface="Courier New" pitchFamily="34" charset="-120"/>
+              </a:rPr>
+              <a:t>       </a:t>
+            </a:r>
+            <a:r>
+              <a:rPr lang="en-US" sz="1100" dirty="0">
+                <a:solidFill>
+                  <a:srgbClr val="9AA7B4"/>
+                </a:solidFill>
+                <a:latin typeface="Courier New" pitchFamily="34" charset="0"/>
+                <a:ea typeface="Courier New" pitchFamily="34" charset="-122"/>
+                <a:cs typeface="Courier New" pitchFamily="34" charset="-120"/>
+              </a:rPr>
+              <a:t># plan only, writes nothing</a:t>
+            </a:r>
             <a:endParaRPr lang="en-US" sz="1100" dirty="0"/>
           </a:p>
           <a:p>
@@ -7271,13 +7689,35 @@
             <a:r>
               <a:rPr lang="en-US" sz="1100" dirty="0">
                 <a:solidFill>
+                  <a:srgbClr val="EF3B2D"/>
+                </a:solidFill>
+                <a:latin typeface="Courier New" pitchFamily="34" charset="0"/>
+                <a:ea typeface="Courier New" pitchFamily="34" charset="-122"/>
+                <a:cs typeface="Courier New" pitchFamily="34" charset="-120"/>
+              </a:rPr>
+              <a:t>$ </a:t>
+            </a:r>
+            <a:r>
+              <a:rPr lang="en-US" sz="1100" dirty="0">
+                <a:solidFill>
+                  <a:srgbClr val="E6EDF3"/>
+                </a:solidFill>
+                <a:latin typeface="Courier New" pitchFamily="34" charset="0"/>
+                <a:ea typeface="Courier New" pitchFamily="34" charset="-122"/>
+                <a:cs typeface="Courier New" pitchFamily="34" charset="-120"/>
+              </a:rPr>
+              <a:t>wheels generate scaffold Post …  </a:t>
+            </a:r>
+            <a:r>
+              <a:rPr lang="en-US" sz="1100" dirty="0">
+                <a:solidFill>
                   <a:srgbClr val="9AA7B4"/>
                 </a:solidFill>
                 <a:latin typeface="Courier New" pitchFamily="34" charset="0"/>
                 <a:ea typeface="Courier New" pitchFamily="34" charset="-122"/>
                 <a:cs typeface="Courier New" pitchFamily="34" charset="-120"/>
               </a:rPr>
-              <a:t>  app/models/Post.cfc</a:t>
+              <a:t># for real</a:t>
             </a:r>
             <a:endParaRPr lang="en-US" sz="1100" dirty="0"/>
           </a:p>
@@ -7297,7 +7737,7 @@
                 <a:ea typeface="Courier New" pitchFamily="34" charset="-122"/>
                 <a:cs typeface="Courier New" pitchFamily="34" charset="-120"/>
               </a:rPr>
-              <a:t>  app/migrator/migrations/…_create_posts_table.cfc</a:t>
+              <a:t>  app/models/Post.cfc · app/controllers/Posts.cfc</a:t>
             </a:r>
             <a:endParaRPr lang="en-US" sz="1100" dirty="0"/>
           </a:p>
@@ -7317,7 +7757,7 @@
                 <a:ea typeface="Courier New" pitchFamily="34" charset="-122"/>
                 <a:cs typeface="Courier New" pitchFamily="34" charset="-120"/>
               </a:rPr>
-              <a:t>  app/controllers/Posts.cfc</a:t>
+              <a:t>  app/migrator/migrations/…_create_posts_table.cfc</a:t>
             </a:r>
             <a:endParaRPr lang="en-US" sz="1100" dirty="0"/>
           </a:p>
@@ -7357,7 +7797,7 @@
                 <a:ea typeface="Courier New" pitchFamily="34" charset="-122"/>
                 <a:cs typeface="Courier New" pitchFamily="34" charset="-120"/>
               </a:rPr>
-              <a:t>  tests/specs/models/PostSpec.cfc</a:t>
+              <a:t>  tests/specs/{models,controllers}/…Spec.cfc</a:t>
             </a:r>
             <a:endParaRPr lang="en-US" sz="1100" dirty="0"/>
           </a:p>
@@ -7377,7 +7817,7 @@
                 <a:ea typeface="Courier New" pitchFamily="34" charset="-122"/>
                 <a:cs typeface="Courier New" pitchFamily="34" charset="-120"/>
               </a:rPr>
-              <a:t>  tests/specs/controllers/PostsControllerSpec.cfc</a:t>
+              <a:t>  config/routes.cfm  +.resources("posts")</a:t>
             </a:r>
             <a:endParaRPr lang="en-US" sz="1100" dirty="0"/>
           </a:p>
@@ -7388,17 +7828,6 @@
               </a:lnSpc>
               <a:buNone/>
             </a:pPr>
-            <a:r>
-              <a:rPr lang="en-US" sz="1100" dirty="0">
-                <a:solidFill>
-                  <a:srgbClr val="9AA7B4"/>
-                </a:solidFill>
-                <a:latin typeface="Courier New" pitchFamily="34" charset="0"/>
-                <a:ea typeface="Courier New" pitchFamily="34" charset="-122"/>
-                <a:cs typeface="Courier New" pitchFamily="34" charset="-120"/>
-              </a:rPr>
-              <a:t>  config/routes.cfm  +.resources("posts")</a:t>
-            </a:r>
             <a:endParaRPr lang="en-US" sz="1100" dirty="0"/>
           </a:p>
           <a:p>
@@ -7408,6 +7837,28 @@
               </a:lnSpc>
               <a:buNone/>
             </a:pPr>
+            <a:r>
+              <a:rPr lang="en-US" sz="1100" dirty="0">
+                <a:solidFill>
+                  <a:srgbClr val="EF3B2D"/>
+                </a:solidFill>
+                <a:latin typeface="Courier New" pitchFamily="34" charset="0"/>
+                <a:ea typeface="Courier New" pitchFamily="34" charset="-122"/>
+                <a:cs typeface="Courier New" pitchFamily="34" charset="-120"/>
+              </a:rPr>
+              <a:t>$ </a:t>
+            </a:r>
+            <a:r>
+              <a:rPr lang="en-US" sz="1100" dirty="0">
+                <a:solidFill>
+                  <a:srgbClr val="E6EDF3"/>
+                </a:solidFill>
+                <a:latin typeface="Courier New" pitchFamily="34" charset="0"/>
+                <a:ea typeface="Courier New" pitchFamily="34" charset="-122"/>
+                <a:cs typeface="Courier New" pitchFamily="34" charset="-120"/>
+              </a:rPr>
+              <a:t>wheels migrate latest</a:t>
+            </a:r>
             <a:endParaRPr lang="en-US" sz="1100" dirty="0"/>
           </a:p>
           <a:p>
@@ -7437,7 +7888,18 @@
                 <a:ea typeface="Courier New" pitchFamily="34" charset="-122"/>
                 <a:cs typeface="Courier New" pitchFamily="34" charset="-120"/>
               </a:rPr>
-              <a:t>wheels migrate latest</a:t>
+              <a:t>wheels seed --generate   </a:t>
+            </a:r>
+            <a:r>
+              <a:rPr lang="en-US" sz="1100" dirty="0">
+                <a:solidFill>
+                  <a:srgbClr val="9AA7B4"/>
+                </a:solidFill>
+                <a:latin typeface="Courier New" pitchFamily="34" charset="0"/>
+                <a:ea typeface="Courier New" pitchFamily="34" charset="-122"/>
+                <a:cs typeface="Courier New" pitchFamily="34" charset="-120"/>
+              </a:rPr>
+              <a:t># sample rows</a:t>
             </a:r>
             <a:endParaRPr lang="en-US" sz="1100" dirty="0"/>
           </a:p>
@@ -7468,7 +7930,49 @@
                 <a:ea typeface="Courier New" pitchFamily="34" charset="-122"/>
                 <a:cs typeface="Courier New" pitchFamily="34" charset="-120"/>
               </a:rPr>
-              <a:t>wheels routes</a:t>
+              <a:t>wheels reload            </a:t>
+            </a:r>
+            <a:r>
+              <a:rPr lang="en-US" sz="1100" dirty="0">
+                <a:solidFill>
+                  <a:srgbClr val="9AA7B4"/>
+                </a:solidFill>
+                <a:latin typeface="Courier New" pitchFamily="34" charset="0"/>
+                <a:ea typeface="Courier New" pitchFamily="34" charset="-122"/>
+                <a:cs typeface="Courier New" pitchFamily="34" charset="-120"/>
+              </a:rPr>
+              <a:t># pick up new routes</a:t>
+            </a:r>
+            <a:endParaRPr lang="en-US" sz="1100" dirty="0"/>
+          </a:p>
+          <a:p>
+            <a:pPr marL="0" indent="0">
+              <a:lnSpc>
+                <a:spcPct val="115000"/>
+              </a:lnSpc>
+              <a:buNone/>
+            </a:pPr>
+            <a:r>
+              <a:rPr lang="en-US" sz="1100" dirty="0">
+                <a:solidFill>
+                  <a:srgbClr val="EF3B2D"/>
+                </a:solidFill>
+                <a:latin typeface="Courier New" pitchFamily="34" charset="0"/>
+                <a:ea typeface="Courier New" pitchFamily="34" charset="-122"/>
+                <a:cs typeface="Courier New" pitchFamily="34" charset="-120"/>
+              </a:rPr>
+              <a:t>$ </a:t>
+            </a:r>
+            <a:r>
+              <a:rPr lang="en-US" sz="1100" dirty="0">
+                <a:solidFill>
+                  <a:srgbClr val="E6EDF3"/>
+                </a:solidFill>
+                <a:latin typeface="Courier New" pitchFamily="34" charset="0"/>
+                <a:ea typeface="Courier New" pitchFamily="34" charset="-122"/>
+                <a:cs typeface="Courier New" pitchFamily="34" charset="-120"/>
+              </a:rPr>
+              <a:t>wheels routes | grep posts</a:t>
             </a:r>
             <a:endParaRPr lang="en-US" sz="1100" dirty="0"/>
           </a:p>
@@ -7530,7 +8034,7 @@
                 <a:ea typeface="Calibri" pitchFamily="34" charset="-122"/>
                 <a:cs typeface="Calibri" pitchFamily="34" charset="-120"/>
               </a:rPr>
-              <a:t>Over the route table: seven routes, one line of config, named helpers so views never hard-code a URL.</a:t>
+              <a:t>--dry-run: “Here's everything it would write. Nothing has happened yet.” Then for real.</a:t>
             </a:r>
             <a:endParaRPr lang="en-US" sz="1400" dirty="0"/>
           </a:p>
@@ -7553,7 +8057,30 @@
                 <a:ea typeface="Calibri" pitchFamily="34" charset="-122"/>
                 <a:cs typeface="Calibri" pitchFamily="34" charset="-120"/>
               </a:rPr>
-              <a:t>Then the browser: /posts → create → edit → delete. Slowly. This is the payoff shot.</a:t>
+              <a:t>{50}: column length and validatesLengthOf(maximum=50) from one declaration.</a:t>
+            </a:r>
+            <a:endParaRPr lang="en-US" sz="1400" dirty="0"/>
+          </a:p>
+          <a:p>
+            <a:pPr marL="0" indent="0">
+              <a:buNone/>
+            </a:pPr>
+            <a:endParaRPr lang="en-US" sz="1400" dirty="0"/>
+          </a:p>
+          <a:p>
+            <a:pPr marL="0" indent="0">
+              <a:buNone/>
+            </a:pPr>
+            <a:r>
+              <a:rPr lang="en-US" sz="1400" i="1" dirty="0">
+                <a:solidFill>
+                  <a:srgbClr val="C9D3DD"/>
+                </a:solidFill>
+                <a:latin typeface="Calibri" pitchFamily="34" charset="0"/>
+                <a:ea typeface="Calibri" pitchFamily="34" charset="-122"/>
+                <a:cs typeface="Calibri" pitchFamily="34" charset="-120"/>
+              </a:rPr>
+              <a:t>seed, reload, then the browser: create a post titled “Hello, Wheels” → edit → delete. Slowly. Point at the flash message.</a:t>
             </a:r>
             <a:endParaRPr lang="en-US" sz="1400" dirty="0"/>
           </a:p>
@@ -7766,7 +8293,7 @@
                 <a:ea typeface="Calibri" pitchFamily="34" charset="-122"/>
                 <a:cs typeface="Calibri" pitchFamily="34" charset="-120"/>
               </a:rPr>
-              <a:t>It wrote files. They have your name on them.</a:t>
+              <a:t>It wrote files. You own them.</a:t>
             </a:r>
             <a:endParaRPr lang="en-US" sz="3000" dirty="0"/>
           </a:p>
@@ -7938,7 +8465,7 @@
                 <a:ea typeface="Courier New" pitchFamily="34" charset="-122"/>
                 <a:cs typeface="Courier New" pitchFamily="34" charset="-120"/>
               </a:rPr>
-              <a:t>// app/models/Post.cfc</a:t>
+              <a:t>// app/models/Post.cfc — as generated</a:t>
             </a:r>
             <a:endParaRPr lang="en-US" sz="1100" dirty="0"/>
           </a:p>
@@ -8064,7 +8591,7 @@
                 <a:ea typeface="Courier New" pitchFamily="34" charset="-122"/>
                 <a:cs typeface="Courier New" pitchFamily="34" charset="-120"/>
               </a:rPr>
-              <a:t>"title,body"</a:t>
+              <a:t>"title,body,publishedAt"</a:t>
             </a:r>
             <a:r>
               <a:rPr lang="en-US" sz="1100" dirty="0">
@@ -8117,7 +8644,7 @@
                 <a:ea typeface="Courier New" pitchFamily="34" charset="-122"/>
                 <a:cs typeface="Courier New" pitchFamily="34" charset="-120"/>
               </a:rPr>
-              <a:t>, maximum=120);</a:t>
+              <a:t>, maximum=50);</a:t>
             </a:r>
             <a:endParaRPr lang="en-US" sz="1100" dirty="0"/>
           </a:p>
@@ -8137,29 +8664,18 @@
                 <a:ea typeface="Courier New" pitchFamily="34" charset="-122"/>
                 <a:cs typeface="Courier New" pitchFamily="34" charset="-120"/>
               </a:rPr>
-              <a:t>    hasMany(</a:t>
+              <a:t>    </a:t>
             </a:r>
             <a:r>
               <a:rPr lang="en-US" sz="1100" dirty="0">
                 <a:solidFill>
-                  <a:srgbClr val="3DDC84"/>
-                </a:solidFill>
-                <a:latin typeface="Courier New" pitchFamily="34" charset="0"/>
-                <a:ea typeface="Courier New" pitchFamily="34" charset="-122"/>
-                <a:cs typeface="Courier New" pitchFamily="34" charset="-120"/>
-              </a:rPr>
-              <a:t>"comments"</a:t>
-            </a:r>
-            <a:r>
-              <a:rPr lang="en-US" sz="1100" dirty="0">
-                <a:solidFill>
-                  <a:srgbClr val="E6EDF3"/>
-                </a:solidFill>
-                <a:latin typeface="Courier New" pitchFamily="34" charset="0"/>
-                <a:ea typeface="Courier New" pitchFamily="34" charset="-122"/>
-                <a:cs typeface="Courier New" pitchFamily="34" charset="-120"/>
-              </a:rPr>
-              <a:t>);</a:t>
+                  <a:srgbClr val="9AA7B4"/>
+                </a:solidFill>
+                <a:latin typeface="Courier New" pitchFamily="34" charset="0"/>
+                <a:ea typeface="Courier New" pitchFamily="34" charset="-122"/>
+                <a:cs typeface="Courier New" pitchFamily="34" charset="-120"/>
+              </a:rPr>
+              <a:t>// you type:</a:t>
             </a:r>
             <a:endParaRPr lang="en-US" sz="1100" dirty="0"/>
           </a:p>
@@ -8179,7 +8695,29 @@
                 <a:ea typeface="Courier New" pitchFamily="34" charset="-122"/>
                 <a:cs typeface="Courier New" pitchFamily="34" charset="-120"/>
               </a:rPr>
-              <a:t>  }</a:t>
+              <a:t>    validatesExclusionOf(property=</a:t>
+            </a:r>
+            <a:r>
+              <a:rPr lang="en-US" sz="1100" dirty="0">
+                <a:solidFill>
+                  <a:srgbClr val="3DDC84"/>
+                </a:solidFill>
+                <a:latin typeface="Courier New" pitchFamily="34" charset="0"/>
+                <a:ea typeface="Courier New" pitchFamily="34" charset="-122"/>
+                <a:cs typeface="Courier New" pitchFamily="34" charset="-120"/>
+              </a:rPr>
+              <a:t>"title"</a:t>
+            </a:r>
+            <a:r>
+              <a:rPr lang="en-US" sz="1100" dirty="0">
+                <a:solidFill>
+                  <a:srgbClr val="E6EDF3"/>
+                </a:solidFill>
+                <a:latin typeface="Courier New" pitchFamily="34" charset="0"/>
+                <a:ea typeface="Courier New" pitchFamily="34" charset="-122"/>
+                <a:cs typeface="Courier New" pitchFamily="34" charset="-120"/>
+              </a:rPr>
+              <a:t>,</a:t>
             </a:r>
             <a:endParaRPr lang="en-US" sz="1100" dirty="0"/>
           </a:p>
@@ -8199,7 +8737,29 @@
                 <a:ea typeface="Courier New" pitchFamily="34" charset="-122"/>
                 <a:cs typeface="Courier New" pitchFamily="34" charset="-120"/>
               </a:rPr>
-              <a:t>}</a:t>
+              <a:t>                         list=</a:t>
+            </a:r>
+            <a:r>
+              <a:rPr lang="en-US" sz="1100" dirty="0">
+                <a:solidFill>
+                  <a:srgbClr val="3DDC84"/>
+                </a:solidFill>
+                <a:latin typeface="Courier New" pitchFamily="34" charset="0"/>
+                <a:ea typeface="Courier New" pitchFamily="34" charset="-122"/>
+                <a:cs typeface="Courier New" pitchFamily="34" charset="-120"/>
+              </a:rPr>
+              <a:t>"Untitled"</a:t>
+            </a:r>
+            <a:r>
+              <a:rPr lang="en-US" sz="1100" dirty="0">
+                <a:solidFill>
+                  <a:srgbClr val="E6EDF3"/>
+                </a:solidFill>
+                <a:latin typeface="Courier New" pitchFamily="34" charset="0"/>
+                <a:ea typeface="Courier New" pitchFamily="34" charset="-122"/>
+                <a:cs typeface="Courier New" pitchFamily="34" charset="-120"/>
+              </a:rPr>
+              <a:t>);</a:t>
             </a:r>
             <a:endParaRPr lang="en-US" sz="1100" dirty="0"/>
           </a:p>
@@ -8210,6 +8770,39 @@
               </a:lnSpc>
               <a:buNone/>
             </a:pPr>
+            <a:r>
+              <a:rPr lang="en-US" sz="1100" dirty="0">
+                <a:solidFill>
+                  <a:srgbClr val="E6EDF3"/>
+                </a:solidFill>
+                <a:latin typeface="Courier New" pitchFamily="34" charset="0"/>
+                <a:ea typeface="Courier New" pitchFamily="34" charset="-122"/>
+                <a:cs typeface="Courier New" pitchFamily="34" charset="-120"/>
+              </a:rPr>
+              <a:t>    hasMany(</a:t>
+            </a:r>
+            <a:r>
+              <a:rPr lang="en-US" sz="1100" dirty="0">
+                <a:solidFill>
+                  <a:srgbClr val="3DDC84"/>
+                </a:solidFill>
+                <a:latin typeface="Courier New" pitchFamily="34" charset="0"/>
+                <a:ea typeface="Courier New" pitchFamily="34" charset="-122"/>
+                <a:cs typeface="Courier New" pitchFamily="34" charset="-120"/>
+              </a:rPr>
+              <a:t>"comments"</a:t>
+            </a:r>
+            <a:r>
+              <a:rPr lang="en-US" sz="1100" dirty="0">
+                <a:solidFill>
+                  <a:srgbClr val="E6EDF3"/>
+                </a:solidFill>
+                <a:latin typeface="Courier New" pitchFamily="34" charset="0"/>
+                <a:ea typeface="Courier New" pitchFamily="34" charset="-122"/>
+                <a:cs typeface="Courier New" pitchFamily="34" charset="-120"/>
+              </a:rPr>
+              <a:t>);</a:t>
+            </a:r>
             <a:endParaRPr lang="en-US" sz="1100" dirty="0"/>
           </a:p>
           <a:p>
@@ -8222,24 +8815,13 @@
             <a:r>
               <a:rPr lang="en-US" sz="1100" dirty="0">
                 <a:solidFill>
-                  <a:srgbClr val="EF3B2D"/>
-                </a:solidFill>
-                <a:latin typeface="Courier New" pitchFamily="34" charset="0"/>
-                <a:ea typeface="Courier New" pitchFamily="34" charset="-122"/>
-                <a:cs typeface="Courier New" pitchFamily="34" charset="-120"/>
-              </a:rPr>
-              <a:t>$ </a:t>
-            </a:r>
-            <a:r>
-              <a:rPr lang="en-US" sz="1100" dirty="0">
-                <a:solidFill>
                   <a:srgbClr val="E6EDF3"/>
                 </a:solidFill>
                 <a:latin typeface="Courier New" pitchFamily="34" charset="0"/>
                 <a:ea typeface="Courier New" pitchFamily="34" charset="-122"/>
                 <a:cs typeface="Courier New" pitchFamily="34" charset="-120"/>
               </a:rPr>
-              <a:t>wheels reload</a:t>
+              <a:t>  }</a:t>
             </a:r>
             <a:endParaRPr lang="en-US" sz="1100" dirty="0"/>
           </a:p>
@@ -8253,6 +8835,66 @@
             <a:r>
               <a:rPr lang="en-US" sz="1100" dirty="0">
                 <a:solidFill>
+                  <a:srgbClr val="E6EDF3"/>
+                </a:solidFill>
+                <a:latin typeface="Courier New" pitchFamily="34" charset="0"/>
+                <a:ea typeface="Courier New" pitchFamily="34" charset="-122"/>
+                <a:cs typeface="Courier New" pitchFamily="34" charset="-120"/>
+              </a:rPr>
+              <a:t>}</a:t>
+            </a:r>
+            <a:endParaRPr lang="en-US" sz="1100" dirty="0"/>
+          </a:p>
+          <a:p>
+            <a:pPr marL="0" indent="0">
+              <a:lnSpc>
+                <a:spcPct val="115000"/>
+              </a:lnSpc>
+              <a:buNone/>
+            </a:pPr>
+            <a:endParaRPr lang="en-US" sz="1100" dirty="0"/>
+          </a:p>
+          <a:p>
+            <a:pPr marL="0" indent="0">
+              <a:lnSpc>
+                <a:spcPct val="115000"/>
+              </a:lnSpc>
+              <a:buNone/>
+            </a:pPr>
+            <a:r>
+              <a:rPr lang="en-US" sz="1100" dirty="0">
+                <a:solidFill>
+                  <a:srgbClr val="EF3B2D"/>
+                </a:solidFill>
+                <a:latin typeface="Courier New" pitchFamily="34" charset="0"/>
+                <a:ea typeface="Courier New" pitchFamily="34" charset="-122"/>
+                <a:cs typeface="Courier New" pitchFamily="34" charset="-120"/>
+              </a:rPr>
+              <a:t>$ </a:t>
+            </a:r>
+            <a:r>
+              <a:rPr lang="en-US" sz="1100" dirty="0">
+                <a:solidFill>
+                  <a:srgbClr val="E6EDF3"/>
+                </a:solidFill>
+                <a:latin typeface="Courier New" pitchFamily="34" charset="0"/>
+                <a:ea typeface="Courier New" pitchFamily="34" charset="-122"/>
+                <a:cs typeface="Courier New" pitchFamily="34" charset="-120"/>
+              </a:rPr>
+              <a:t>wheels reload</a:t>
+            </a:r>
+            <a:endParaRPr lang="en-US" sz="1100" dirty="0"/>
+          </a:p>
+          <a:p>
+            <a:pPr marL="0" indent="0">
+              <a:lnSpc>
+                <a:spcPct val="115000"/>
+              </a:lnSpc>
+              <a:buNone/>
+            </a:pPr>
+            <a:r>
+              <a:rPr lang="en-US" sz="1100" dirty="0">
+                <a:solidFill>
                   <a:srgbClr val="9AA7B4"/>
                 </a:solidFill>
                 <a:latin typeface="Courier New" pitchFamily="34" charset="0"/>
@@ -8321,7 +8963,7 @@
                 <a:ea typeface="Calibri" pitchFamily="34" charset="-122"/>
                 <a:cs typeface="Calibri" pitchFamily="34" charset="-120"/>
               </a:rPr>
-              <a:t>First hand-typed code of the night. Make it count.</a:t>
+              <a:t>First hand-typed code of the night: one business rule (no placeholder titles) and the association. Reload.</a:t>
             </a:r>
             <a:endParaRPr lang="en-US" sz="1400" dirty="0"/>
           </a:p>
@@ -8802,6 +9444,39 @@
               </a:lnSpc>
               <a:buNone/>
             </a:pPr>
+            <a:r>
+              <a:rPr lang="en-US" sz="1100" dirty="0">
+                <a:solidFill>
+                  <a:srgbClr val="EF3B2D"/>
+                </a:solidFill>
+                <a:latin typeface="Courier New" pitchFamily="34" charset="0"/>
+                <a:ea typeface="Courier New" pitchFamily="34" charset="-122"/>
+                <a:cs typeface="Courier New" pitchFamily="34" charset="-120"/>
+              </a:rPr>
+              <a:t>$ </a:t>
+            </a:r>
+            <a:r>
+              <a:rPr lang="en-US" sz="1100" dirty="0">
+                <a:solidFill>
+                  <a:srgbClr val="E6EDF3"/>
+                </a:solidFill>
+                <a:latin typeface="Courier New" pitchFamily="34" charset="0"/>
+                <a:ea typeface="Courier New" pitchFamily="34" charset="-122"/>
+                <a:cs typeface="Courier New" pitchFamily="34" charset="-120"/>
+              </a:rPr>
+              <a:t>wheels seed --generate   </a:t>
+            </a:r>
+            <a:r>
+              <a:rPr lang="en-US" sz="1100" dirty="0">
+                <a:solidFill>
+                  <a:srgbClr val="9AA7B4"/>
+                </a:solidFill>
+                <a:latin typeface="Courier New" pitchFamily="34" charset="0"/>
+                <a:ea typeface="Courier New" pitchFamily="34" charset="-122"/>
+                <a:cs typeface="Courier New" pitchFamily="34" charset="-120"/>
+              </a:rPr>
+              <a:t># comments, post_id 1..10</a:t>
+            </a:r>
             <a:endParaRPr lang="en-US" sz="1100" dirty="0"/>
           </a:p>
           <a:p>
@@ -8831,7 +9506,7 @@
                 <a:ea typeface="Courier New" pitchFamily="34" charset="-122"/>
                 <a:cs typeface="Courier New" pitchFamily="34" charset="-120"/>
               </a:rPr>
-              <a:t>wheels console</a:t>
+              <a:t>wheels reload</a:t>
             </a:r>
             <a:endParaRPr lang="en-US" sz="1100" dirty="0"/>
           </a:p>
@@ -8842,61 +9517,6 @@
               </a:lnSpc>
               <a:buNone/>
             </a:pPr>
-            <a:r>
-              <a:rPr lang="en-US" sz="1100" dirty="0">
-                <a:solidFill>
-                  <a:srgbClr val="E6EDF3"/>
-                </a:solidFill>
-                <a:latin typeface="Courier New" pitchFamily="34" charset="0"/>
-                <a:ea typeface="Courier New" pitchFamily="34" charset="-122"/>
-                <a:cs typeface="Courier New" pitchFamily="34" charset="-120"/>
-              </a:rPr>
-              <a:t>wheels&gt; post = model(</a:t>
-            </a:r>
-            <a:r>
-              <a:rPr lang="en-US" sz="1100" dirty="0">
-                <a:solidFill>
-                  <a:srgbClr val="3DDC84"/>
-                </a:solidFill>
-                <a:latin typeface="Courier New" pitchFamily="34" charset="0"/>
-                <a:ea typeface="Courier New" pitchFamily="34" charset="-122"/>
-                <a:cs typeface="Courier New" pitchFamily="34" charset="-120"/>
-              </a:rPr>
-              <a:t>"Post"</a:t>
-            </a:r>
-            <a:r>
-              <a:rPr lang="en-US" sz="1100" dirty="0">
-                <a:solidFill>
-                  <a:srgbClr val="E6EDF3"/>
-                </a:solidFill>
-                <a:latin typeface="Courier New" pitchFamily="34" charset="0"/>
-                <a:ea typeface="Courier New" pitchFamily="34" charset="-122"/>
-                <a:cs typeface="Courier New" pitchFamily="34" charset="-120"/>
-              </a:rPr>
-              <a:t>).findOne(include=</a:t>
-            </a:r>
-            <a:r>
-              <a:rPr lang="en-US" sz="1100" dirty="0">
-                <a:solidFill>
-                  <a:srgbClr val="3DDC84"/>
-                </a:solidFill>
-                <a:latin typeface="Courier New" pitchFamily="34" charset="0"/>
-                <a:ea typeface="Courier New" pitchFamily="34" charset="-122"/>
-                <a:cs typeface="Courier New" pitchFamily="34" charset="-120"/>
-              </a:rPr>
-              <a:t>"comments"</a:t>
-            </a:r>
-            <a:r>
-              <a:rPr lang="en-US" sz="1100" dirty="0">
-                <a:solidFill>
-                  <a:srgbClr val="E6EDF3"/>
-                </a:solidFill>
-                <a:latin typeface="Courier New" pitchFamily="34" charset="0"/>
-                <a:ea typeface="Courier New" pitchFamily="34" charset="-122"/>
-                <a:cs typeface="Courier New" pitchFamily="34" charset="-120"/>
-              </a:rPr>
-              <a:t>);</a:t>
-            </a:r>
             <a:endParaRPr lang="en-US" sz="1100" dirty="0"/>
           </a:p>
           <a:p>
@@ -8909,13 +9529,24 @@
             <a:r>
               <a:rPr lang="en-US" sz="1100" dirty="0">
                 <a:solidFill>
+                  <a:srgbClr val="EF3B2D"/>
+                </a:solidFill>
+                <a:latin typeface="Courier New" pitchFamily="34" charset="0"/>
+                <a:ea typeface="Courier New" pitchFamily="34" charset="-122"/>
+                <a:cs typeface="Courier New" pitchFamily="34" charset="-120"/>
+              </a:rPr>
+              <a:t>$ </a:t>
+            </a:r>
+            <a:r>
+              <a:rPr lang="en-US" sz="1100" dirty="0">
+                <a:solidFill>
                   <a:srgbClr val="E6EDF3"/>
                 </a:solidFill>
                 <a:latin typeface="Courier New" pitchFamily="34" charset="0"/>
                 <a:ea typeface="Courier New" pitchFamily="34" charset="-122"/>
                 <a:cs typeface="Courier New" pitchFamily="34" charset="-120"/>
               </a:rPr>
-              <a:t>wheels&gt; post.title</a:t>
+              <a:t>wheels console</a:t>
             </a:r>
             <a:endParaRPr lang="en-US" sz="1100" dirty="0"/>
           </a:p>
@@ -8957,7 +9588,7 @@
                 <a:ea typeface="Courier New" pitchFamily="34" charset="-122"/>
                 <a:cs typeface="Courier New" pitchFamily="34" charset="-120"/>
               </a:rPr>
-              <a:t>)</a:t>
+              <a:t>).findByKey(1).comments()</a:t>
             </a:r>
             <a:endParaRPr lang="en-US" sz="1100" dirty="0"/>
           </a:p>
@@ -8977,7 +9608,7 @@
                 <a:ea typeface="Courier New" pitchFamily="34" charset="-122"/>
                 <a:cs typeface="Courier New" pitchFamily="34" charset="-120"/>
               </a:rPr>
-              <a:t>          .where(</a:t>
+              <a:t>wheels&gt; model(</a:t>
             </a:r>
             <a:r>
               <a:rPr lang="en-US" sz="1100" dirty="0">
@@ -8988,7 +9619,7 @@
                 <a:ea typeface="Courier New" pitchFamily="34" charset="-122"/>
                 <a:cs typeface="Courier New" pitchFamily="34" charset="-120"/>
               </a:rPr>
-              <a:t>"title LIKE '%Wheels%'"</a:t>
+              <a:t>"Comment"</a:t>
             </a:r>
             <a:r>
               <a:rPr lang="en-US" sz="1100" dirty="0">
@@ -8999,7 +9630,7 @@
                 <a:ea typeface="Courier New" pitchFamily="34" charset="-122"/>
                 <a:cs typeface="Courier New" pitchFamily="34" charset="-120"/>
               </a:rPr>
-              <a:t>)</a:t>
+              <a:t>).findByKey(3).post().title</a:t>
             </a:r>
             <a:endParaRPr lang="en-US" sz="1100" dirty="0"/>
           </a:p>
@@ -9019,6 +9650,134 @@
                 <a:ea typeface="Courier New" pitchFamily="34" charset="-122"/>
                 <a:cs typeface="Courier New" pitchFamily="34" charset="-120"/>
               </a:rPr>
+              <a:t>wheels&gt; model(</a:t>
+            </a:r>
+            <a:r>
+              <a:rPr lang="en-US" sz="1100" dirty="0">
+                <a:solidFill>
+                  <a:srgbClr val="3DDC84"/>
+                </a:solidFill>
+                <a:latin typeface="Courier New" pitchFamily="34" charset="0"/>
+                <a:ea typeface="Courier New" pitchFamily="34" charset="-122"/>
+                <a:cs typeface="Courier New" pitchFamily="34" charset="-120"/>
+              </a:rPr>
+              <a:t>"Post"</a:t>
+            </a:r>
+            <a:r>
+              <a:rPr lang="en-US" sz="1100" dirty="0">
+                <a:solidFill>
+                  <a:srgbClr val="E6EDF3"/>
+                </a:solidFill>
+                <a:latin typeface="Courier New" pitchFamily="34" charset="0"/>
+                <a:ea typeface="Courier New" pitchFamily="34" charset="-122"/>
+                <a:cs typeface="Courier New" pitchFamily="34" charset="-120"/>
+              </a:rPr>
+              <a:t>)</a:t>
+            </a:r>
+            <a:endParaRPr lang="en-US" sz="1100" dirty="0"/>
+          </a:p>
+          <a:p>
+            <a:pPr marL="0" indent="0">
+              <a:lnSpc>
+                <a:spcPct val="115000"/>
+              </a:lnSpc>
+              <a:buNone/>
+            </a:pPr>
+            <a:r>
+              <a:rPr lang="en-US" sz="1100" dirty="0">
+                <a:solidFill>
+                  <a:srgbClr val="E6EDF3"/>
+                </a:solidFill>
+                <a:latin typeface="Courier New" pitchFamily="34" charset="0"/>
+                <a:ea typeface="Courier New" pitchFamily="34" charset="-122"/>
+                <a:cs typeface="Courier New" pitchFamily="34" charset="-120"/>
+              </a:rPr>
+              <a:t>          .where(</a:t>
+            </a:r>
+            <a:r>
+              <a:rPr lang="en-US" sz="1100" dirty="0">
+                <a:solidFill>
+                  <a:srgbClr val="3DDC84"/>
+                </a:solidFill>
+                <a:latin typeface="Courier New" pitchFamily="34" charset="0"/>
+                <a:ea typeface="Courier New" pitchFamily="34" charset="-122"/>
+                <a:cs typeface="Courier New" pitchFamily="34" charset="-120"/>
+              </a:rPr>
+              <a:t>"title"</a:t>
+            </a:r>
+            <a:r>
+              <a:rPr lang="en-US" sz="1100" dirty="0">
+                <a:solidFill>
+                  <a:srgbClr val="E6EDF3"/>
+                </a:solidFill>
+                <a:latin typeface="Courier New" pitchFamily="34" charset="0"/>
+                <a:ea typeface="Courier New" pitchFamily="34" charset="-122"/>
+                <a:cs typeface="Courier New" pitchFamily="34" charset="-120"/>
+              </a:rPr>
+              <a:t>, </a:t>
+            </a:r>
+            <a:r>
+              <a:rPr lang="en-US" sz="1100" dirty="0">
+                <a:solidFill>
+                  <a:srgbClr val="3DDC84"/>
+                </a:solidFill>
+                <a:latin typeface="Courier New" pitchFamily="34" charset="0"/>
+                <a:ea typeface="Courier New" pitchFamily="34" charset="-122"/>
+                <a:cs typeface="Courier New" pitchFamily="34" charset="-120"/>
+              </a:rPr>
+              <a:t>"LIKE"</a:t>
+            </a:r>
+            <a:r>
+              <a:rPr lang="en-US" sz="1100" dirty="0">
+                <a:solidFill>
+                  <a:srgbClr val="E6EDF3"/>
+                </a:solidFill>
+                <a:latin typeface="Courier New" pitchFamily="34" charset="0"/>
+                <a:ea typeface="Courier New" pitchFamily="34" charset="-122"/>
+                <a:cs typeface="Courier New" pitchFamily="34" charset="-120"/>
+              </a:rPr>
+              <a:t>, </a:t>
+            </a:r>
+            <a:r>
+              <a:rPr lang="en-US" sz="1100" dirty="0">
+                <a:solidFill>
+                  <a:srgbClr val="3DDC84"/>
+                </a:solidFill>
+                <a:latin typeface="Courier New" pitchFamily="34" charset="0"/>
+                <a:ea typeface="Courier New" pitchFamily="34" charset="-122"/>
+                <a:cs typeface="Courier New" pitchFamily="34" charset="-120"/>
+              </a:rPr>
+              <a:t>"%Wheels%"</a:t>
+            </a:r>
+            <a:r>
+              <a:rPr lang="en-US" sz="1100" dirty="0">
+                <a:solidFill>
+                  <a:srgbClr val="E6EDF3"/>
+                </a:solidFill>
+                <a:latin typeface="Courier New" pitchFamily="34" charset="0"/>
+                <a:ea typeface="Courier New" pitchFamily="34" charset="-122"/>
+                <a:cs typeface="Courier New" pitchFamily="34" charset="-120"/>
+              </a:rPr>
+              <a:t>)</a:t>
+            </a:r>
+            <a:endParaRPr lang="en-US" sz="1100" dirty="0"/>
+          </a:p>
+          <a:p>
+            <a:pPr marL="0" indent="0">
+              <a:lnSpc>
+                <a:spcPct val="115000"/>
+              </a:lnSpc>
+              <a:buNone/>
+            </a:pPr>
+            <a:r>
+              <a:rPr lang="en-US" sz="1100" dirty="0">
+                <a:solidFill>
+                  <a:srgbClr val="E6EDF3"/>
+                </a:solidFill>
+                <a:latin typeface="Courier New" pitchFamily="34" charset="0"/>
+                <a:ea typeface="Courier New" pitchFamily="34" charset="-122"/>
+                <a:cs typeface="Courier New" pitchFamily="34" charset="-120"/>
+              </a:rPr>
               <a:t>          .orderBy(</a:t>
             </a:r>
             <a:r>
@@ -9030,7 +9789,29 @@
                 <a:ea typeface="Courier New" pitchFamily="34" charset="-122"/>
                 <a:cs typeface="Courier New" pitchFamily="34" charset="-120"/>
               </a:rPr>
-              <a:t>"publishedAt DESC"</a:t>
+              <a:t>"publishedAt"</a:t>
+            </a:r>
+            <a:r>
+              <a:rPr lang="en-US" sz="1100" dirty="0">
+                <a:solidFill>
+                  <a:srgbClr val="E6EDF3"/>
+                </a:solidFill>
+                <a:latin typeface="Courier New" pitchFamily="34" charset="0"/>
+                <a:ea typeface="Courier New" pitchFamily="34" charset="-122"/>
+                <a:cs typeface="Courier New" pitchFamily="34" charset="-120"/>
+              </a:rPr>
+              <a:t>, </a:t>
+            </a:r>
+            <a:r>
+              <a:rPr lang="en-US" sz="1100" dirty="0">
+                <a:solidFill>
+                  <a:srgbClr val="3DDC84"/>
+                </a:solidFill>
+                <a:latin typeface="Courier New" pitchFamily="34" charset="0"/>
+                <a:ea typeface="Courier New" pitchFamily="34" charset="-122"/>
+                <a:cs typeface="Courier New" pitchFamily="34" charset="-120"/>
+              </a:rPr>
+              <a:t>"DESC"</a:t>
             </a:r>
             <a:r>
               <a:rPr lang="en-US" sz="1100" dirty="0">
@@ -9080,7 +9861,7 @@
                 <a:ea typeface="Calibri" pitchFamily="34" charset="-122"/>
                 <a:cs typeface="Calibri" pitchFamily="34" charset="-120"/>
               </a:rPr>
-              <a:t>“--belongsTo=post added the postId column and wired belongsTo into the model. hasMany on Post was already there, so the relationship is complete both ways.”</a:t>
+              <a:t>“--belongsTo=post added the post_id column and wired belongsTo into the model. hasMany on Post was already there, so the relationship is complete both ways.”</a:t>
             </a:r>
             <a:endParaRPr lang="en-US" sz="1400" dirty="0"/>
           </a:p>
@@ -9103,7 +9884,7 @@
                 <a:ea typeface="Calibri" pitchFamily="34" charset="-122"/>
                 <a:cs typeface="Calibri" pitchFamily="34" charset="-120"/>
               </a:rPr>
-              <a:t>Most CF developers have never had a REPL. Enjoy the moment.</a:t>
+              <a:t>Seed again so there are comments, reload, then the REPL — most CF developers have never had one.</a:t>
             </a:r>
             <a:endParaRPr lang="en-US" sz="1400" dirty="0"/>
           </a:p>
@@ -9564,6 +10345,28 @@
               </a:lnSpc>
               <a:buNone/>
             </a:pPr>
+            <a:r>
+              <a:rPr lang="en-US" sz="1100" dirty="0">
+                <a:solidFill>
+                  <a:srgbClr val="EF3B2D"/>
+                </a:solidFill>
+                <a:latin typeface="Courier New" pitchFamily="34" charset="0"/>
+                <a:ea typeface="Courier New" pitchFamily="34" charset="-122"/>
+                <a:cs typeface="Courier New" pitchFamily="34" charset="-120"/>
+              </a:rPr>
+              <a:t>$ </a:t>
+            </a:r>
+            <a:r>
+              <a:rPr lang="en-US" sz="1100" dirty="0">
+                <a:solidFill>
+                  <a:srgbClr val="E6EDF3"/>
+                </a:solidFill>
+                <a:latin typeface="Courier New" pitchFamily="34" charset="0"/>
+                <a:ea typeface="Courier New" pitchFamily="34" charset="-122"/>
+                <a:cs typeface="Courier New" pitchFamily="34" charset="-120"/>
+              </a:rPr>
+              <a:t>wheels reload</a:t>
+            </a:r>
             <a:endParaRPr lang="en-US" sz="1100" dirty="0"/>
           </a:p>
           <a:p>
@@ -9573,17 +10376,6 @@
               </a:lnSpc>
               <a:buNone/>
             </a:pPr>
-            <a:r>
-              <a:rPr lang="en-US" sz="1100" dirty="0">
-                <a:solidFill>
-                  <a:srgbClr val="9AA7B4"/>
-                </a:solidFill>
-                <a:latin typeface="Courier New" pitchFamily="34" charset="0"/>
-                <a:ea typeface="Courier New" pitchFamily="34" charset="-122"/>
-                <a:cs typeface="Courier New" pitchFamily="34" charset="-120"/>
-              </a:rPr>
-              <a:t>  User model · Sessions/Registrations/Passwords</a:t>
-            </a:r>
             <a:endParaRPr lang="en-US" sz="1100" dirty="0"/>
           </a:p>
           <a:p>
@@ -9602,7 +10394,7 @@
                 <a:ea typeface="Courier New" pitchFamily="34" charset="-122"/>
                 <a:cs typeface="Courier New" pitchFamily="34" charset="-120"/>
               </a:rPr>
-              <a:t>  CSRF-safe views · users migration, unique email</a:t>
+              <a:t>  User model · Sessions/Registrations/Passwords</a:t>
             </a:r>
             <a:endParaRPr lang="en-US" sz="1100" dirty="0"/>
           </a:p>
@@ -9622,7 +10414,7 @@
                 <a:ea typeface="Courier New" pitchFamily="34" charset="-122"/>
                 <a:cs typeface="Courier New" pitchFamily="34" charset="-120"/>
               </a:rPr>
-              <a:t>  routes + services injected · specs generated</a:t>
+              <a:t>  CSRF-safe views · users migration, unique email</a:t>
             </a:r>
             <a:endParaRPr lang="en-US" sz="1100" dirty="0"/>
           </a:p>
@@ -9633,6 +10425,17 @@
               </a:lnSpc>
               <a:buNone/>
             </a:pPr>
+            <a:r>
+              <a:rPr lang="en-US" sz="1100" dirty="0">
+                <a:solidFill>
+                  <a:srgbClr val="9AA7B4"/>
+                </a:solidFill>
+                <a:latin typeface="Courier New" pitchFamily="34" charset="0"/>
+                <a:ea typeface="Courier New" pitchFamily="34" charset="-122"/>
+                <a:cs typeface="Courier New" pitchFamily="34" charset="-120"/>
+              </a:rPr>
+              <a:t>  routes + services injected · specs generated</a:t>
+            </a:r>
             <a:endParaRPr lang="en-US" sz="1100" dirty="0"/>
           </a:p>
           <a:p>
@@ -9642,17 +10445,6 @@
               </a:lnSpc>
               <a:buNone/>
             </a:pPr>
-            <a:r>
-              <a:rPr lang="en-US" sz="1100" dirty="0">
-                <a:solidFill>
-                  <a:srgbClr val="9AA7B4"/>
-                </a:solidFill>
-                <a:latin typeface="Courier New" pitchFamily="34" charset="0"/>
-                <a:ea typeface="Courier New" pitchFamily="34" charset="-122"/>
-                <a:cs typeface="Courier New" pitchFamily="34" charset="-120"/>
-              </a:rPr>
-              <a:t>  PBKDF2-HMAC-SHA256 · 600k iterations · random salt</a:t>
-            </a:r>
             <a:endParaRPr lang="en-US" sz="1100" dirty="0"/>
           </a:p>
           <a:p>
@@ -9671,7 +10463,7 @@
                 <a:ea typeface="Courier New" pitchFamily="34" charset="-122"/>
                 <a:cs typeface="Courier New" pitchFamily="34" charset="-120"/>
               </a:rPr>
-              <a:t>  constant-time verify() · needsRehash()</a:t>
+              <a:t>  bcryptHash() / bcryptVerify() — bundled jBCrypt,</a:t>
             </a:r>
             <a:endParaRPr lang="en-US" sz="1100" dirty="0"/>
           </a:p>
@@ -9682,6 +10474,17 @@
               </a:lnSpc>
               <a:buNone/>
             </a:pPr>
+            <a:r>
+              <a:rPr lang="en-US" sz="1100" dirty="0">
+                <a:solidFill>
+                  <a:srgbClr val="9AA7B4"/>
+                </a:solidFill>
+                <a:latin typeface="Courier New" pitchFamily="34" charset="0"/>
+                <a:ea typeface="Courier New" pitchFamily="34" charset="-122"/>
+                <a:cs typeface="Courier New" pitchFamily="34" charset="-120"/>
+              </a:rPr>
+              <a:t>  no dependency to install · bcryptNeedsRehash()</a:t>
+            </a:r>
             <a:endParaRPr lang="en-US" sz="1100" dirty="0"/>
           </a:p>
           <a:p>
@@ -9691,28 +10494,6 @@
               </a:lnSpc>
               <a:buNone/>
             </a:pPr>
-            <a:r>
-              <a:rPr lang="en-US" sz="1100" dirty="0">
-                <a:solidFill>
-                  <a:srgbClr val="EF3B2D"/>
-                </a:solidFill>
-                <a:latin typeface="Courier New" pitchFamily="34" charset="0"/>
-                <a:ea typeface="Courier New" pitchFamily="34" charset="-122"/>
-                <a:cs typeface="Courier New" pitchFamily="34" charset="-120"/>
-              </a:rPr>
-              <a:t>$ </a:t>
-            </a:r>
-            <a:r>
-              <a:rPr lang="en-US" sz="1100" dirty="0">
-                <a:solidFill>
-                  <a:srgbClr val="E6EDF3"/>
-                </a:solidFill>
-                <a:latin typeface="Courier New" pitchFamily="34" charset="0"/>
-                <a:ea typeface="Courier New" pitchFamily="34" charset="-122"/>
-                <a:cs typeface="Courier New" pitchFamily="34" charset="-120"/>
-              </a:rPr>
-              <a:t>wheels generate policy Post</a:t>
-            </a:r>
             <a:endParaRPr lang="en-US" sz="1100" dirty="0"/>
           </a:p>
           <a:p>
@@ -9725,6 +10506,37 @@
             <a:r>
               <a:rPr lang="en-US" sz="1100" dirty="0">
                 <a:solidFill>
+                  <a:srgbClr val="EF3B2D"/>
+                </a:solidFill>
+                <a:latin typeface="Courier New" pitchFamily="34" charset="0"/>
+                <a:ea typeface="Courier New" pitchFamily="34" charset="-122"/>
+                <a:cs typeface="Courier New" pitchFamily="34" charset="-120"/>
+              </a:rPr>
+              <a:t>$ </a:t>
+            </a:r>
+            <a:r>
+              <a:rPr lang="en-US" sz="1100" dirty="0">
+                <a:solidFill>
+                  <a:srgbClr val="E6EDF3"/>
+                </a:solidFill>
+                <a:latin typeface="Courier New" pitchFamily="34" charset="0"/>
+                <a:ea typeface="Courier New" pitchFamily="34" charset="-122"/>
+                <a:cs typeface="Courier New" pitchFamily="34" charset="-120"/>
+              </a:rPr>
+              <a:t>wheels generate policy Post</a:t>
+            </a:r>
+            <a:endParaRPr lang="en-US" sz="1100" dirty="0"/>
+          </a:p>
+          <a:p>
+            <a:pPr marL="0" indent="0">
+              <a:lnSpc>
+                <a:spcPct val="115000"/>
+              </a:lnSpc>
+              <a:buNone/>
+            </a:pPr>
+            <a:r>
+              <a:rPr lang="en-US" sz="1100" dirty="0">
+                <a:solidFill>
                   <a:srgbClr val="9AA7B4"/>
                 </a:solidFill>
                 <a:latin typeface="Courier New" pitchFamily="34" charset="0"/>
@@ -9793,51 +10605,7 @@
                 <a:ea typeface="Calibri" pitchFamily="34" charset="-122"/>
                 <a:cs typeface="Calibri" pitchFamily="34" charset="-120"/>
               </a:rPr>
-              <a:t>“That is not a checkbox — that's the thing every one of us has hand-rolled badly at least once. And the hashes are byte-identical on Lucee, Adobe, </a:t>
-            </a:r>
-            <a:r>
-              <a:rPr lang="en-US" sz="1400" i="1" dirty="0" err="1">
-                <a:solidFill>
-                  <a:srgbClr val="C9D3DD"/>
-                </a:solidFill>
-                <a:latin typeface="Calibri" pitchFamily="34" charset="0"/>
-                <a:ea typeface="Calibri" pitchFamily="34" charset="-122"/>
-                <a:cs typeface="Calibri" pitchFamily="34" charset="-120"/>
-              </a:rPr>
-              <a:t>BoxLang</a:t>
-            </a:r>
-            <a:r>
-              <a:rPr lang="en-US" sz="1400" i="1" dirty="0">
-                <a:solidFill>
-                  <a:srgbClr val="C9D3DD"/>
-                </a:solidFill>
-                <a:latin typeface="Calibri" pitchFamily="34" charset="0"/>
-                <a:ea typeface="Calibri" pitchFamily="34" charset="-122"/>
-                <a:cs typeface="Calibri" pitchFamily="34" charset="-120"/>
-              </a:rPr>
-              <a:t>, and </a:t>
-            </a:r>
-            <a:r>
-              <a:rPr lang="en-US" sz="1400" i="1" dirty="0" err="1">
-                <a:solidFill>
-                  <a:srgbClr val="C9D3DD"/>
-                </a:solidFill>
-                <a:latin typeface="Calibri" pitchFamily="34" charset="0"/>
-                <a:ea typeface="Calibri" pitchFamily="34" charset="-122"/>
-                <a:cs typeface="Calibri" pitchFamily="34" charset="-120"/>
-              </a:rPr>
-              <a:t>RustCFML</a:t>
-            </a:r>
-            <a:r>
-              <a:rPr lang="en-US" sz="1400" i="1" dirty="0">
-                <a:solidFill>
-                  <a:srgbClr val="C9D3DD"/>
-                </a:solidFill>
-                <a:latin typeface="Calibri" pitchFamily="34" charset="0"/>
-                <a:ea typeface="Calibri" pitchFamily="34" charset="-122"/>
-                <a:cs typeface="Calibri" pitchFamily="34" charset="-120"/>
-              </a:rPr>
-              <a:t>.”</a:t>
+              <a:t>“Passwords go through bcrypt. The framework bundles jBCrypt, so there's nothing to install and nothing to hand-roll — and that's the thing every one of us has hand-rolled badly at least once. The same hash verifies on Lucee, Adobe, BoxLang and RustCFML, so you can move engines and nobody resets a password.”</a:t>
             </a:r>
             <a:endParaRPr lang="en-US" sz="1400" dirty="0"/>
           </a:p>
@@ -10299,7 +11067,7 @@
                 <a:ea typeface="Courier New" pitchFamily="34" charset="-122"/>
                 <a:cs typeface="Courier New" pitchFamily="34" charset="-120"/>
               </a:rPr>
-              <a:t># specs came with the scaffold (TestBox)</a:t>
+              <a:t># model + 7 CRUD specs per scaffold, plus auth specs</a:t>
             </a:r>
             <a:endParaRPr lang="en-US" sz="1100" dirty="0"/>
           </a:p>
@@ -10359,7 +11127,7 @@
                 <a:ea typeface="Courier New" pitchFamily="34" charset="-122"/>
                 <a:cs typeface="Courier New" pitchFamily="34" charset="-120"/>
               </a:rPr>
-              <a:t>"requires a title"</a:t>
+              <a:t>"requires a body"</a:t>
             </a:r>
             <a:r>
               <a:rPr lang="en-US" sz="1100" dirty="0">
@@ -10370,29 +11138,7 @@
                 <a:ea typeface="Courier New" pitchFamily="34" charset="-122"/>
                 <a:cs typeface="Courier New" pitchFamily="34" charset="-120"/>
               </a:rPr>
-              <a:t>, </a:t>
-            </a:r>
-            <a:r>
-              <a:rPr lang="en-US" sz="1100" dirty="0">
-                <a:solidFill>
-                  <a:srgbClr val="EF3B2D"/>
-                </a:solidFill>
-                <a:latin typeface="Courier New" pitchFamily="34" charset="0"/>
-                <a:ea typeface="Courier New" pitchFamily="34" charset="-122"/>
-                <a:cs typeface="Courier New" pitchFamily="34" charset="-120"/>
-              </a:rPr>
-              <a:t>function</a:t>
-            </a:r>
-            <a:r>
-              <a:rPr lang="en-US" sz="1100" dirty="0">
-                <a:solidFill>
-                  <a:srgbClr val="E6EDF3"/>
-                </a:solidFill>
-                <a:latin typeface="Courier New" pitchFamily="34" charset="0"/>
-                <a:ea typeface="Courier New" pitchFamily="34" charset="-122"/>
-                <a:cs typeface="Courier New" pitchFamily="34" charset="-120"/>
-              </a:rPr>
-              <a:t>() {</a:t>
+              <a:t>, () =&gt; {</a:t>
             </a:r>
             <a:endParaRPr lang="en-US" sz="1100" dirty="0"/>
           </a:p>
@@ -10456,7 +11202,7 @@
                 <a:ea typeface="Courier New" pitchFamily="34" charset="-122"/>
                 <a:cs typeface="Courier New" pitchFamily="34" charset="-120"/>
               </a:rPr>
-              <a:t>).new(body=</a:t>
+              <a:t>).new(title=</a:t>
             </a:r>
             <a:r>
               <a:rPr lang="en-US" sz="1100" dirty="0">
@@ -10467,7 +11213,7 @@
                 <a:ea typeface="Courier New" pitchFamily="34" charset="-122"/>
                 <a:cs typeface="Courier New" pitchFamily="34" charset="-120"/>
               </a:rPr>
-              <a:t>"no title"</a:t>
+              <a:t>"No body here"</a:t>
             </a:r>
             <a:r>
               <a:rPr lang="en-US" sz="1100" dirty="0">
@@ -10529,7 +11275,7 @@
                 <a:ea typeface="Courier New" pitchFamily="34" charset="-122"/>
                 <a:cs typeface="Courier New" pitchFamily="34" charset="-120"/>
               </a:rPr>
-              <a:t>"title"</a:t>
+              <a:t>"body"</a:t>
             </a:r>
             <a:r>
               <a:rPr lang="en-US" sz="1100" dirty="0">
@@ -10631,7 +11377,7 @@
                 <a:ea typeface="Courier New" pitchFamily="34" charset="-122"/>
                 <a:cs typeface="Courier New" pitchFamily="34" charset="-120"/>
               </a:rPr>
-              <a:t>  → break validation → </a:t>
+              <a:t>  → comment out presence → </a:t>
             </a:r>
             <a:r>
               <a:rPr lang="en-US" sz="1100" dirty="0">
@@ -10692,29 +11438,7 @@
                 <a:ea typeface="Calibri" pitchFamily="34" charset="-122"/>
                 <a:cs typeface="Calibri" pitchFamily="34" charset="-120"/>
               </a:rPr>
-              <a:t>“If you've written TestBox, you've written </a:t>
-            </a:r>
-            <a:r>
-              <a:rPr lang="en-US" sz="1400" i="1" dirty="0" err="1">
-                <a:solidFill>
-                  <a:srgbClr val="C9D3DD"/>
-                </a:solidFill>
-                <a:latin typeface="Calibri" pitchFamily="34" charset="0"/>
-                <a:ea typeface="Calibri" pitchFamily="34" charset="-122"/>
-                <a:cs typeface="Calibri" pitchFamily="34" charset="-120"/>
-              </a:rPr>
-              <a:t>WheelsTests</a:t>
-            </a:r>
-            <a:r>
-              <a:rPr lang="en-US" sz="1400" i="1" dirty="0">
-                <a:solidFill>
-                  <a:srgbClr val="C9D3DD"/>
-                </a:solidFill>
-                <a:latin typeface="Calibri" pitchFamily="34" charset="0"/>
-                <a:ea typeface="Calibri" pitchFamily="34" charset="-122"/>
-                <a:cs typeface="Calibri" pitchFamily="34" charset="-120"/>
-              </a:rPr>
-              <a:t>.”</a:t>
+              <a:t>“WheelsTest ships inside the framework — describe, it, expect. No extra dependency, nothing to install.”</a:t>
             </a:r>
             <a:endParaRPr lang="en-US" sz="1400" dirty="0"/>
           </a:p>
@@ -11156,7 +11880,18 @@
                 <a:ea typeface="Courier New" pitchFamily="34" charset="-122"/>
                 <a:cs typeface="Courier New" pitchFamily="34" charset="-120"/>
               </a:rPr>
-              <a:t>wheels info      </a:t>
+              <a:t>wheels info          </a:t>
+            </a:r>
+            <a:r>
+              <a:rPr lang="en-US" sz="1100" dirty="0">
+                <a:solidFill>
+                  <a:srgbClr val="9AA7B4"/>
+                </a:solidFill>
+                <a:latin typeface="Courier New" pitchFamily="34" charset="0"/>
+                <a:ea typeface="Courier New" pitchFamily="34" charset="-122"/>
+                <a:cs typeface="Courier New" pitchFamily="34" charset="-120"/>
+              </a:rPr>
+              <a:t># version · engine · db</a:t>
             </a:r>
             <a:endParaRPr lang="en-US" sz="1100" dirty="0"/>
           </a:p>
@@ -11170,13 +11905,35 @@
             <a:r>
               <a:rPr lang="en-US" sz="1100" dirty="0">
                 <a:solidFill>
+                  <a:srgbClr val="EF3B2D"/>
+                </a:solidFill>
+                <a:latin typeface="Courier New" pitchFamily="34" charset="0"/>
+                <a:ea typeface="Courier New" pitchFamily="34" charset="-122"/>
+                <a:cs typeface="Courier New" pitchFamily="34" charset="-120"/>
+              </a:rPr>
+              <a:t>$ </a:t>
+            </a:r>
+            <a:r>
+              <a:rPr lang="en-US" sz="1100" dirty="0">
+                <a:solidFill>
+                  <a:srgbClr val="E6EDF3"/>
+                </a:solidFill>
+                <a:latin typeface="Courier New" pitchFamily="34" charset="0"/>
+                <a:ea typeface="Courier New" pitchFamily="34" charset="-122"/>
+                <a:cs typeface="Courier New" pitchFamily="34" charset="-120"/>
+              </a:rPr>
+              <a:t>wheels migrate diff  </a:t>
+            </a:r>
+            <a:r>
+              <a:rPr lang="en-US" sz="1100" dirty="0">
+                <a:solidFill>
                   <a:srgbClr val="9AA7B4"/>
                 </a:solidFill>
                 <a:latin typeface="Courier New" pitchFamily="34" charset="0"/>
                 <a:ea typeface="Courier New" pitchFamily="34" charset="-122"/>
                 <a:cs typeface="Courier New" pitchFamily="34" charset="-120"/>
               </a:rPr>
-              <a:t># version · engine · env · config</a:t>
+              <a:t># models vs. schema drift</a:t>
             </a:r>
             <a:endParaRPr lang="en-US" sz="1100" dirty="0"/>
           </a:p>
@@ -11207,7 +11964,18 @@
                 <a:ea typeface="Courier New" pitchFamily="34" charset="-122"/>
                 <a:cs typeface="Courier New" pitchFamily="34" charset="-120"/>
               </a:rPr>
-              <a:t>wheels doctor    </a:t>
+              <a:t>wheels coverage      </a:t>
+            </a:r>
+            <a:r>
+              <a:rPr lang="en-US" sz="1100" dirty="0">
+                <a:solidFill>
+                  <a:srgbClr val="9AA7B4"/>
+                </a:solidFill>
+                <a:latin typeface="Courier New" pitchFamily="34" charset="0"/>
+                <a:ea typeface="Courier New" pitchFamily="34" charset="-122"/>
+                <a:cs typeface="Courier New" pitchFamily="34" charset="-120"/>
+              </a:rPr>
+              <a:t># CRAP: complexity × untested</a:t>
             </a:r>
             <a:endParaRPr lang="en-US" sz="1100" dirty="0"/>
           </a:p>
@@ -11218,17 +11986,6 @@
               </a:lnSpc>
               <a:buNone/>
             </a:pPr>
-            <a:r>
-              <a:rPr lang="en-US" sz="1100" dirty="0">
-                <a:solidFill>
-                  <a:srgbClr val="9AA7B4"/>
-                </a:solidFill>
-                <a:latin typeface="Courier New" pitchFamily="34" charset="0"/>
-                <a:ea typeface="Courier New" pitchFamily="34" charset="-122"/>
-                <a:cs typeface="Courier New" pitchFamily="34" charset="-120"/>
-              </a:rPr>
-              <a:t># setup diagnostics</a:t>
-            </a:r>
             <a:endParaRPr lang="en-US" sz="1100" dirty="0"/>
           </a:p>
           <a:p>
@@ -11258,7 +12015,7 @@
                 <a:ea typeface="Courier New" pitchFamily="34" charset="-122"/>
                 <a:cs typeface="Courier New" pitchFamily="34" charset="-120"/>
               </a:rPr>
-              <a:t>wheels stats     </a:t>
+              <a:t>wheels generate api-resource Product \</a:t>
             </a:r>
             <a:endParaRPr lang="en-US" sz="1100" dirty="0"/>
           </a:p>
@@ -11272,13 +12029,13 @@
             <a:r>
               <a:rPr lang="en-US" sz="1100" dirty="0">
                 <a:solidFill>
-                  <a:srgbClr val="9AA7B4"/>
-                </a:solidFill>
-                <a:latin typeface="Courier New" pitchFamily="34" charset="0"/>
-                <a:ea typeface="Courier New" pitchFamily="34" charset="-122"/>
-                <a:cs typeface="Courier New" pitchFamily="34" charset="-120"/>
-              </a:rPr>
-              <a:t># LOC, models, controllers, routes</a:t>
+                  <a:srgbClr val="E6EDF3"/>
+                </a:solidFill>
+                <a:latin typeface="Courier New" pitchFamily="34" charset="0"/>
+                <a:ea typeface="Courier New" pitchFamily="34" charset="-122"/>
+                <a:cs typeface="Courier New" pitchFamily="34" charset="-120"/>
+              </a:rPr>
+              <a:t>    name price:decimal sku:string</a:t>
             </a:r>
             <a:endParaRPr lang="en-US" sz="1100" dirty="0"/>
           </a:p>
@@ -11309,7 +12066,7 @@
                 <a:ea typeface="Courier New" pitchFamily="34" charset="-122"/>
                 <a:cs typeface="Courier New" pitchFamily="34" charset="-120"/>
               </a:rPr>
-              <a:t>wheels notes     </a:t>
+              <a:t>wheels migrate latest &amp;&amp; wheels reload</a:t>
             </a:r>
             <a:endParaRPr lang="en-US" sz="1100" dirty="0"/>
           </a:p>
@@ -11320,17 +12077,6 @@
               </a:lnSpc>
               <a:buNone/>
             </a:pPr>
-            <a:r>
-              <a:rPr lang="en-US" sz="1100" dirty="0">
-                <a:solidFill>
-                  <a:srgbClr val="9AA7B4"/>
-                </a:solidFill>
-                <a:latin typeface="Courier New" pitchFamily="34" charset="0"/>
-                <a:ea typeface="Courier New" pitchFamily="34" charset="-122"/>
-                <a:cs typeface="Courier New" pitchFamily="34" charset="-120"/>
-              </a:rPr>
-              <a:t># TODO / FIXME across the project</a:t>
-            </a:r>
             <a:endParaRPr lang="en-US" sz="1100" dirty="0"/>
           </a:p>
           <a:p>
@@ -11340,6 +12086,28 @@
               </a:lnSpc>
               <a:buNone/>
             </a:pPr>
+            <a:r>
+              <a:rPr lang="en-US" sz="1100" dirty="0">
+                <a:solidFill>
+                  <a:srgbClr val="EF3B2D"/>
+                </a:solidFill>
+                <a:latin typeface="Courier New" pitchFamily="34" charset="0"/>
+                <a:ea typeface="Courier New" pitchFamily="34" charset="-122"/>
+                <a:cs typeface="Courier New" pitchFamily="34" charset="-120"/>
+              </a:rPr>
+              <a:t>$ </a:t>
+            </a:r>
+            <a:r>
+              <a:rPr lang="en-US" sz="1100" dirty="0">
+                <a:solidFill>
+                  <a:srgbClr val="E6EDF3"/>
+                </a:solidFill>
+                <a:latin typeface="Courier New" pitchFamily="34" charset="0"/>
+                <a:ea typeface="Courier New" pitchFamily="34" charset="-122"/>
+                <a:cs typeface="Courier New" pitchFamily="34" charset="-120"/>
+              </a:rPr>
+              <a:t>curl -X POST localhost:8080/api/products \</a:t>
+            </a:r>
             <a:endParaRPr lang="en-US" sz="1100" dirty="0"/>
           </a:p>
           <a:p>
@@ -11352,24 +12120,13 @@
             <a:r>
               <a:rPr lang="en-US" sz="1100" dirty="0">
                 <a:solidFill>
-                  <a:srgbClr val="EF3B2D"/>
-                </a:solidFill>
-                <a:latin typeface="Courier New" pitchFamily="34" charset="0"/>
-                <a:ea typeface="Courier New" pitchFamily="34" charset="-122"/>
-                <a:cs typeface="Courier New" pitchFamily="34" charset="-120"/>
-              </a:rPr>
-              <a:t>$ </a:t>
-            </a:r>
-            <a:r>
-              <a:rPr lang="en-US" sz="1100" dirty="0">
-                <a:solidFill>
                   <a:srgbClr val="E6EDF3"/>
                 </a:solidFill>
                 <a:latin typeface="Courier New" pitchFamily="34" charset="0"/>
                 <a:ea typeface="Courier New" pitchFamily="34" charset="-122"/>
                 <a:cs typeface="Courier New" pitchFamily="34" charset="-120"/>
               </a:rPr>
-              <a:t>wheels generate api-resource Product \</a:t>
+              <a:t>    -H 'Content-Type: application/json' \</a:t>
             </a:r>
             <a:endParaRPr lang="en-US" sz="1100" dirty="0"/>
           </a:p>
@@ -11389,7 +12146,7 @@
                 <a:ea typeface="Courier New" pitchFamily="34" charset="-122"/>
                 <a:cs typeface="Courier New" pitchFamily="34" charset="-120"/>
               </a:rPr>
-              <a:t>    name price:decimal sku:string</a:t>
+              <a:t>    -d '{"product":{"name":"Drum","price":149.99}}'</a:t>
             </a:r>
             <a:endParaRPr lang="en-US" sz="1100" dirty="0"/>
           </a:p>
@@ -11409,7 +12166,7 @@
                 <a:ea typeface="Courier New" pitchFamily="34" charset="-122"/>
                 <a:cs typeface="Courier New" pitchFamily="34" charset="-120"/>
               </a:rPr>
-              <a:t># JSON controller at /api/products, versioned</a:t>
+              <a:t># 201 → JSON · then GET /api/products</a:t>
             </a:r>
             <a:endParaRPr lang="en-US" sz="1100" dirty="0"/>
           </a:p>
@@ -11471,7 +12228,7 @@
                 <a:ea typeface="Calibri" pitchFamily="34" charset="-122"/>
                 <a:cs typeface="Calibri" pitchFamily="34" charset="-120"/>
               </a:rPr>
-              <a:t>“Same generator, no views, JSON controller, namespaced and versioned routes. The API story is the same story.”</a:t>
+              <a:t>“Same generator, no views, JSON controller under an /api namespace. The API story is the same story.”</a:t>
             </a:r>
             <a:endParaRPr lang="en-US" sz="1400" dirty="0"/>
           </a:p>
@@ -11773,51 +12530,7 @@
                 <a:ea typeface="Calibri" pitchFamily="34" charset="-122"/>
                 <a:cs typeface="Calibri" pitchFamily="34" charset="-120"/>
               </a:rPr>
-              <a:t>CTO at PAI Industries — heavy-duty truck parts. Our ecommerce platform runs on Wheels in production (SQL Server + Elasticsearch + Rocket </a:t>
-            </a:r>
-            <a:r>
-              <a:rPr lang="en-US" sz="1500" dirty="0" err="1">
-                <a:solidFill>
-                  <a:srgbClr val="1A2430"/>
-                </a:solidFill>
-                <a:latin typeface="Calibri" pitchFamily="34" charset="0"/>
-                <a:ea typeface="Calibri" pitchFamily="34" charset="-122"/>
-                <a:cs typeface="Calibri" pitchFamily="34" charset="-120"/>
-              </a:rPr>
-              <a:t>UniVerse</a:t>
-            </a:r>
-            <a:r>
-              <a:rPr lang="en-US" sz="1500" dirty="0">
-                <a:solidFill>
-                  <a:srgbClr val="1A2430"/>
-                </a:solidFill>
-                <a:latin typeface="Calibri" pitchFamily="34" charset="0"/>
-                <a:ea typeface="Calibri" pitchFamily="34" charset="-122"/>
-                <a:cs typeface="Calibri" pitchFamily="34" charset="-120"/>
-              </a:rPr>
-              <a:t> + </a:t>
-            </a:r>
-            <a:r>
-              <a:rPr lang="en-US" sz="1500" dirty="0" err="1">
-                <a:solidFill>
-                  <a:srgbClr val="1A2430"/>
-                </a:solidFill>
-                <a:latin typeface="Calibri" pitchFamily="34" charset="0"/>
-                <a:ea typeface="Calibri" pitchFamily="34" charset="-122"/>
-                <a:cs typeface="Calibri" pitchFamily="34" charset="-120"/>
-              </a:rPr>
-              <a:t>CockroachDB</a:t>
-            </a:r>
-            <a:r>
-              <a:rPr lang="en-US" sz="1500" dirty="0">
-                <a:solidFill>
-                  <a:srgbClr val="1A2430"/>
-                </a:solidFill>
-                <a:latin typeface="Calibri" pitchFamily="34" charset="0"/>
-                <a:ea typeface="Calibri" pitchFamily="34" charset="-122"/>
-                <a:cs typeface="Calibri" pitchFamily="34" charset="-120"/>
-              </a:rPr>
-              <a:t>).</a:t>
+              <a:t>CTO at PAI Industries — heavy-duty truck parts. Our ecommerce platform runs on Wheels in production (SQL Server + Elasticsearch).</a:t>
             </a:r>
             <a:endParaRPr lang="en-US" sz="1500" dirty="0"/>
           </a:p>
@@ -12388,7 +13101,7 @@
                 <a:ea typeface="Courier New" pitchFamily="34" charset="-122"/>
                 <a:cs typeface="Courier New" pitchFamily="34" charset="-120"/>
               </a:rPr>
-              <a:t>wheels mcp</a:t>
+              <a:t>wheels mcp wheels</a:t>
             </a:r>
             <a:endParaRPr lang="en-US" sz="1100" dirty="0"/>
           </a:p>
@@ -12408,7 +13121,7 @@
                 <a:ea typeface="Courier New" pitchFamily="34" charset="-122"/>
                 <a:cs typeface="Courier New" pitchFamily="34" charset="-120"/>
               </a:rPr>
-              <a:t># every CLI command exposed as an MCP tool</a:t>
+              <a:t># stdio MCP server — 19 tools, auto-discovered</a:t>
             </a:r>
             <a:endParaRPr lang="en-US" sz="1100" dirty="0"/>
           </a:p>
@@ -12419,6 +13132,17 @@
               </a:lnSpc>
               <a:buNone/>
             </a:pPr>
+            <a:r>
+              <a:rPr lang="en-US" sz="1100" dirty="0">
+                <a:solidFill>
+                  <a:srgbClr val="9AA7B4"/>
+                </a:solidFill>
+                <a:latin typeface="Courier New" pitchFamily="34" charset="0"/>
+                <a:ea typeface="Courier New" pitchFamily="34" charset="-122"/>
+                <a:cs typeface="Courier New" pitchFamily="34" charset="-120"/>
+              </a:rPr>
+              <a:t># generate · migrate · seed · test · routes · reload</a:t>
+            </a:r>
             <a:endParaRPr lang="en-US" sz="1100" dirty="0"/>
           </a:p>
           <a:p>
@@ -12428,17 +13152,6 @@
               </a:lnSpc>
               <a:buNone/>
             </a:pPr>
-            <a:r>
-              <a:rPr lang="en-US" sz="1100" dirty="0">
-                <a:solidFill>
-                  <a:srgbClr val="9AA7B4"/>
-                </a:solidFill>
-                <a:latin typeface="Courier New" pitchFamily="34" charset="0"/>
-                <a:ea typeface="Courier New" pitchFamily="34" charset="-122"/>
-                <a:cs typeface="Courier New" pitchFamily="34" charset="-120"/>
-              </a:rPr>
-              <a:t># wheels new also drops into the project:</a:t>
-            </a:r>
             <a:endParaRPr lang="en-US" sz="1100" dirty="0"/>
           </a:p>
           <a:p>
@@ -12451,24 +13164,13 @@
             <a:r>
               <a:rPr lang="en-US" sz="1100" dirty="0">
                 <a:solidFill>
-                  <a:srgbClr val="E6EDF3"/>
-                </a:solidFill>
-                <a:latin typeface="Courier New" pitchFamily="34" charset="0"/>
-                <a:ea typeface="Courier New" pitchFamily="34" charset="-122"/>
-                <a:cs typeface="Courier New" pitchFamily="34" charset="-120"/>
-              </a:rPr>
-              <a:t>  CLAUDE.md     </a:t>
-            </a:r>
-            <a:r>
-              <a:rPr lang="en-US" sz="1100" dirty="0">
-                <a:solidFill>
                   <a:srgbClr val="9AA7B4"/>
                 </a:solidFill>
                 <a:latin typeface="Courier New" pitchFamily="34" charset="0"/>
                 <a:ea typeface="Courier New" pitchFamily="34" charset="-122"/>
                 <a:cs typeface="Courier New" pitchFamily="34" charset="-120"/>
               </a:rPr>
-              <a:t>← conventions, for Claude Code</a:t>
+              <a:t># .mcp.json for Claude Code / Cursor:</a:t>
             </a:r>
             <a:endParaRPr lang="en-US" sz="1100" dirty="0"/>
           </a:p>
@@ -12488,18 +13190,51 @@
                 <a:ea typeface="Courier New" pitchFamily="34" charset="-122"/>
                 <a:cs typeface="Courier New" pitchFamily="34" charset="-120"/>
               </a:rPr>
-              <a:t>  AGENTS.md     </a:t>
+              <a:t>{ </a:t>
             </a:r>
             <a:r>
               <a:rPr lang="en-US" sz="1100" dirty="0">
                 <a:solidFill>
-                  <a:srgbClr val="9AA7B4"/>
-                </a:solidFill>
-                <a:latin typeface="Courier New" pitchFamily="34" charset="0"/>
-                <a:ea typeface="Courier New" pitchFamily="34" charset="-122"/>
-                <a:cs typeface="Courier New" pitchFamily="34" charset="-120"/>
-              </a:rPr>
-              <a:t>← same, for Cursor / Codex</a:t>
+                  <a:srgbClr val="3DDC84"/>
+                </a:solidFill>
+                <a:latin typeface="Courier New" pitchFamily="34" charset="0"/>
+                <a:ea typeface="Courier New" pitchFamily="34" charset="-122"/>
+                <a:cs typeface="Courier New" pitchFamily="34" charset="-120"/>
+              </a:rPr>
+              <a:t>"mcpServers"</a:t>
+            </a:r>
+            <a:r>
+              <a:rPr lang="en-US" sz="1100" dirty="0">
+                <a:solidFill>
+                  <a:srgbClr val="E6EDF3"/>
+                </a:solidFill>
+                <a:latin typeface="Courier New" pitchFamily="34" charset="0"/>
+                <a:ea typeface="Courier New" pitchFamily="34" charset="-122"/>
+                <a:cs typeface="Courier New" pitchFamily="34" charset="-120"/>
+              </a:rPr>
+              <a:t>: { </a:t>
+            </a:r>
+            <a:r>
+              <a:rPr lang="en-US" sz="1100" dirty="0">
+                <a:solidFill>
+                  <a:srgbClr val="3DDC84"/>
+                </a:solidFill>
+                <a:latin typeface="Courier New" pitchFamily="34" charset="0"/>
+                <a:ea typeface="Courier New" pitchFamily="34" charset="-122"/>
+                <a:cs typeface="Courier New" pitchFamily="34" charset="-120"/>
+              </a:rPr>
+              <a:t>"wheels"</a:t>
+            </a:r>
+            <a:r>
+              <a:rPr lang="en-US" sz="1100" dirty="0">
+                <a:solidFill>
+                  <a:srgbClr val="E6EDF3"/>
+                </a:solidFill>
+                <a:latin typeface="Courier New" pitchFamily="34" charset="0"/>
+                <a:ea typeface="Courier New" pitchFamily="34" charset="-122"/>
+                <a:cs typeface="Courier New" pitchFamily="34" charset="-120"/>
+              </a:rPr>
+              <a:t>: {</a:t>
             </a:r>
             <a:endParaRPr lang="en-US" sz="1100" dirty="0"/>
           </a:p>
@@ -12510,6 +13245,61 @@
               </a:lnSpc>
               <a:buNone/>
             </a:pPr>
+            <a:r>
+              <a:rPr lang="en-US" sz="1100" dirty="0">
+                <a:solidFill>
+                  <a:srgbClr val="E6EDF3"/>
+                </a:solidFill>
+                <a:latin typeface="Courier New" pitchFamily="34" charset="0"/>
+                <a:ea typeface="Courier New" pitchFamily="34" charset="-122"/>
+                <a:cs typeface="Courier New" pitchFamily="34" charset="-120"/>
+              </a:rPr>
+              <a:t>    </a:t>
+            </a:r>
+            <a:r>
+              <a:rPr lang="en-US" sz="1100" dirty="0">
+                <a:solidFill>
+                  <a:srgbClr val="3DDC84"/>
+                </a:solidFill>
+                <a:latin typeface="Courier New" pitchFamily="34" charset="0"/>
+                <a:ea typeface="Courier New" pitchFamily="34" charset="-122"/>
+                <a:cs typeface="Courier New" pitchFamily="34" charset="-120"/>
+              </a:rPr>
+              <a:t>"command"</a:t>
+            </a:r>
+            <a:r>
+              <a:rPr lang="en-US" sz="1100" dirty="0">
+                <a:solidFill>
+                  <a:srgbClr val="E6EDF3"/>
+                </a:solidFill>
+                <a:latin typeface="Courier New" pitchFamily="34" charset="0"/>
+                <a:ea typeface="Courier New" pitchFamily="34" charset="-122"/>
+                <a:cs typeface="Courier New" pitchFamily="34" charset="-120"/>
+              </a:rPr>
+              <a:t>: </a:t>
+            </a:r>
+            <a:r>
+              <a:rPr lang="en-US" sz="1100" dirty="0">
+                <a:solidFill>
+                  <a:srgbClr val="3DDC84"/>
+                </a:solidFill>
+                <a:latin typeface="Courier New" pitchFamily="34" charset="0"/>
+                <a:ea typeface="Courier New" pitchFamily="34" charset="-122"/>
+                <a:cs typeface="Courier New" pitchFamily="34" charset="-120"/>
+              </a:rPr>
+              <a:t>"wheels"</a:t>
+            </a:r>
+            <a:r>
+              <a:rPr lang="en-US" sz="1100" dirty="0">
+                <a:solidFill>
+                  <a:srgbClr val="E6EDF3"/>
+                </a:solidFill>
+                <a:latin typeface="Courier New" pitchFamily="34" charset="0"/>
+                <a:ea typeface="Courier New" pitchFamily="34" charset="-122"/>
+                <a:cs typeface="Courier New" pitchFamily="34" charset="-120"/>
+              </a:rPr>
+              <a:t>,</a:t>
+            </a:r>
             <a:endParaRPr lang="en-US" sz="1100" dirty="0"/>
           </a:p>
           <a:p>
@@ -12522,13 +13312,79 @@
             <a:r>
               <a:rPr lang="en-US" sz="1100" dirty="0">
                 <a:solidFill>
-                  <a:srgbClr val="9AA7B4"/>
-                </a:solidFill>
-                <a:latin typeface="Courier New" pitchFamily="34" charset="0"/>
-                <a:ea typeface="Courier New" pitchFamily="34" charset="-122"/>
-                <a:cs typeface="Courier New" pitchFamily="34" charset="-120"/>
-              </a:rPr>
-              <a:t># so an agent can, against YOUR app:</a:t>
+                  <a:srgbClr val="E6EDF3"/>
+                </a:solidFill>
+                <a:latin typeface="Courier New" pitchFamily="34" charset="0"/>
+                <a:ea typeface="Courier New" pitchFamily="34" charset="-122"/>
+                <a:cs typeface="Courier New" pitchFamily="34" charset="-120"/>
+              </a:rPr>
+              <a:t>    </a:t>
+            </a:r>
+            <a:r>
+              <a:rPr lang="en-US" sz="1100" dirty="0">
+                <a:solidFill>
+                  <a:srgbClr val="3DDC84"/>
+                </a:solidFill>
+                <a:latin typeface="Courier New" pitchFamily="34" charset="0"/>
+                <a:ea typeface="Courier New" pitchFamily="34" charset="-122"/>
+                <a:cs typeface="Courier New" pitchFamily="34" charset="-120"/>
+              </a:rPr>
+              <a:t>"args"</a:t>
+            </a:r>
+            <a:r>
+              <a:rPr lang="en-US" sz="1100" dirty="0">
+                <a:solidFill>
+                  <a:srgbClr val="E6EDF3"/>
+                </a:solidFill>
+                <a:latin typeface="Courier New" pitchFamily="34" charset="0"/>
+                <a:ea typeface="Courier New" pitchFamily="34" charset="-122"/>
+                <a:cs typeface="Courier New" pitchFamily="34" charset="-120"/>
+              </a:rPr>
+              <a:t>: [</a:t>
+            </a:r>
+            <a:r>
+              <a:rPr lang="en-US" sz="1100" dirty="0">
+                <a:solidFill>
+                  <a:srgbClr val="3DDC84"/>
+                </a:solidFill>
+                <a:latin typeface="Courier New" pitchFamily="34" charset="0"/>
+                <a:ea typeface="Courier New" pitchFamily="34" charset="-122"/>
+                <a:cs typeface="Courier New" pitchFamily="34" charset="-120"/>
+              </a:rPr>
+              <a:t>"mcp"</a:t>
+            </a:r>
+            <a:r>
+              <a:rPr lang="en-US" sz="1100" dirty="0">
+                <a:solidFill>
+                  <a:srgbClr val="E6EDF3"/>
+                </a:solidFill>
+                <a:latin typeface="Courier New" pitchFamily="34" charset="0"/>
+                <a:ea typeface="Courier New" pitchFamily="34" charset="-122"/>
+                <a:cs typeface="Courier New" pitchFamily="34" charset="-120"/>
+              </a:rPr>
+              <a:t>, </a:t>
+            </a:r>
+            <a:r>
+              <a:rPr lang="en-US" sz="1100" dirty="0">
+                <a:solidFill>
+                  <a:srgbClr val="3DDC84"/>
+                </a:solidFill>
+                <a:latin typeface="Courier New" pitchFamily="34" charset="0"/>
+                <a:ea typeface="Courier New" pitchFamily="34" charset="-122"/>
+                <a:cs typeface="Courier New" pitchFamily="34" charset="-120"/>
+              </a:rPr>
+              <a:t>"wheels"</a:t>
+            </a:r>
+            <a:r>
+              <a:rPr lang="en-US" sz="1100" dirty="0">
+                <a:solidFill>
+                  <a:srgbClr val="E6EDF3"/>
+                </a:solidFill>
+                <a:latin typeface="Courier New" pitchFamily="34" charset="0"/>
+                <a:ea typeface="Courier New" pitchFamily="34" charset="-122"/>
+                <a:cs typeface="Courier New" pitchFamily="34" charset="-120"/>
+              </a:rPr>
+              <a:t>] } } }</a:t>
             </a:r>
             <a:endParaRPr lang="en-US" sz="1100" dirty="0"/>
           </a:p>
@@ -12539,16 +13395,45 @@
               </a:lnSpc>
               <a:buNone/>
             </a:pPr>
+            <a:endParaRPr lang="en-US" sz="1100" dirty="0"/>
+          </a:p>
+          <a:p>
+            <a:pPr marL="0" indent="0">
+              <a:lnSpc>
+                <a:spcPct val="115000"/>
+              </a:lnSpc>
+              <a:buNone/>
+            </a:pPr>
             <a:r>
               <a:rPr lang="en-US" sz="1100" dirty="0">
                 <a:solidFill>
-                  <a:srgbClr val="E6EDF3"/>
-                </a:solidFill>
-                <a:latin typeface="Courier New" pitchFamily="34" charset="0"/>
-                <a:ea typeface="Courier New" pitchFamily="34" charset="-122"/>
-                <a:cs typeface="Courier New" pitchFamily="34" charset="-120"/>
-              </a:rPr>
-              <a:t>  scaffold · migrate · run tests · read routes</a:t>
+                  <a:srgbClr val="9AA7B4"/>
+                </a:solidFill>
+                <a:latin typeface="Courier New" pitchFamily="34" charset="0"/>
+                <a:ea typeface="Courier New" pitchFamily="34" charset="-122"/>
+                <a:cs typeface="Courier New" pitchFamily="34" charset="-120"/>
+              </a:rPr>
+              <a:t># wheels new also drops CLAUDE.md + AGENTS.md</a:t>
+            </a:r>
+            <a:endParaRPr lang="en-US" sz="1100" dirty="0"/>
+          </a:p>
+          <a:p>
+            <a:pPr marL="0" indent="0">
+              <a:lnSpc>
+                <a:spcPct val="115000"/>
+              </a:lnSpc>
+              <a:buNone/>
+            </a:pPr>
+            <a:r>
+              <a:rPr lang="en-US" sz="1100" dirty="0">
+                <a:solidFill>
+                  <a:srgbClr val="9AA7B4"/>
+                </a:solidFill>
+                <a:latin typeface="Courier New" pitchFamily="34" charset="0"/>
+                <a:ea typeface="Courier New" pitchFamily="34" charset="-122"/>
+                <a:cs typeface="Courier New" pitchFamily="34" charset="-120"/>
+              </a:rPr>
+              <a:t># dev error page: Copy → JSON exception for your agent</a:t>
             </a:r>
             <a:endParaRPr lang="en-US" sz="1100" dirty="0"/>
           </a:p>
@@ -12587,7 +13472,7 @@
                 <a:ea typeface="Calibri" pitchFamily="34" charset="-122"/>
                 <a:cs typeface="Calibri" pitchFamily="34" charset="-120"/>
               </a:rPr>
-              <a:t>“Point Claude or Cursor at your Wheels app and it can scaffold, migrate and run the suite against your actual project — not its memory of a framework it half-read on the internet.”</a:t>
+              <a:t>“Point Claude or Cursor at your Wheels app and it can scaffold a resource, run the migration, seed it and run the suite against your actual project — not its memory of a framework it half-read on the internet.”</a:t>
             </a:r>
             <a:endParaRPr lang="en-US" sz="1400" dirty="0"/>
           </a:p>
@@ -13372,7 +14257,7 @@
                 <a:ea typeface="Calibri" pitchFamily="34" charset="-122"/>
                 <a:cs typeface="Calibri" pitchFamily="34" charset="-120"/>
               </a:rPr>
-              <a:t>PBKDF2 passwords, sessions, registration</a:t>
+              <a:t>bcrypt passwords, sessions, registration</a:t>
             </a:r>
             <a:endParaRPr lang="en-US" sz="1200" dirty="0"/>
           </a:p>
@@ -13738,7 +14623,7 @@
                 <a:ea typeface="Calibri" pitchFamily="34" charset="-122"/>
                 <a:cs typeface="Calibri" pitchFamily="34" charset="-120"/>
               </a:rPr>
-              <a:t>TestBox specs, red → green</a:t>
+              <a:t>WheelsTest specs, red → green</a:t>
             </a:r>
             <a:endParaRPr lang="en-US" sz="1200" dirty="0"/>
           </a:p>
@@ -14918,7 +15803,7 @@
                 <a:ea typeface="Calibri" pitchFamily="34" charset="-122"/>
                 <a:cs typeface="Calibri" pitchFamily="34" charset="-120"/>
               </a:rPr>
-              <a:t>i18n · caching · email</a:t>
+              <a:t>Dev tooling</a:t>
             </a:r>
             <a:endParaRPr lang="en-US" sz="1350" dirty="0"/>
           </a:p>
@@ -14957,7 +15842,7 @@
                 <a:ea typeface="Calibri" pitchFamily="34" charset="-122"/>
                 <a:cs typeface="Calibri" pitchFamily="34" charset="-120"/>
               </a:rPr>
-              <a:t>the usual suspects, first-party</a:t>
+              <a:t>debug bar with code complexity, wheels coverage CRAP report, migrate diff</a:t>
             </a:r>
             <a:endParaRPr lang="en-US" sz="1050" dirty="0"/>
           </a:p>
@@ -15956,7 +16841,7 @@
                 <a:ea typeface="Calibri" pitchFamily="34" charset="-122"/>
                 <a:cs typeface="Calibri" pitchFamily="34" charset="-120"/>
               </a:rPr>
-              <a:t>Lucee, Adobe or BoxLang — the app and its password hashes move with you.</a:t>
+              <a:t>Lucee, Adobe, BoxLang or RustCFML — the app and its password hashes move with you.</a:t>
             </a:r>
             <a:endParaRPr lang="en-US" sz="1150" dirty="0"/>
           </a:p>
@@ -16403,7 +17288,7 @@
                 <a:ea typeface="Courier New" pitchFamily="34" charset="-122"/>
                 <a:cs typeface="Courier New" pitchFamily="34" charset="-120"/>
               </a:rPr>
-              <a:t># Windows: choco install wheels  (or scoop)</a:t>
+              <a:t># Windows: scoop install wheels</a:t>
             </a:r>
             <a:endParaRPr lang="en-US" sz="1150" dirty="0"/>
           </a:p>
@@ -17412,7 +18297,7 @@
                 <a:ea typeface="Calibri" pitchFamily="34" charset="-122"/>
                 <a:cs typeface="Calibri" pitchFamily="34" charset="-120"/>
               </a:rPr>
-              <a:t>wheels.dev  ·  youtube.com/@cfml</a:t>
+              <a:t>wheels.dev  ·  github.com/wheels-dev/wheels</a:t>
             </a:r>
             <a:endParaRPr lang="en-US" sz="900" dirty="0"/>
           </a:p>
@@ -17923,7 +18808,7 @@
                 <a:ea typeface="Calibri" pitchFamily="34" charset="-122"/>
                 <a:cs typeface="Calibri" pitchFamily="34" charset="-120"/>
               </a:rPr>
-              <a:t>If you bounced off it years ago, tonight is the update. A lot changed in 3.0 and 4.0.</a:t>
+              <a:t>If you bounced off it years ago, tonight is the update. A lot changed in 3.0, 4.0 and 4.1.</a:t>
             </a:r>
             <a:endParaRPr lang="en-US" sz="1300" dirty="0"/>
           </a:p>
@@ -19092,7 +19977,7 @@
                 <a:ea typeface="Calibri" pitchFamily="34" charset="-122"/>
                 <a:cs typeface="Calibri" pitchFamily="34" charset="-120"/>
               </a:rPr>
-              <a:t>From Rails to Wheels</a:t>
+              <a:t>Twenty years of Wheels</a:t>
             </a:r>
             <a:endParaRPr lang="en-US" sz="3000" dirty="0"/>
           </a:p>
@@ -19223,8 +20108,8 @@
         </p:nvSpPr>
         <p:spPr>
           <a:xfrm>
-            <a:off x="868680" y="2011680"/>
-            <a:ext cx="6583680" cy="0"/>
+            <a:off x="960120" y="1965960"/>
+            <a:ext cx="7461504" cy="0"/>
           </a:xfrm>
           <a:prstGeom prst="line">
             <a:avLst/>
@@ -19253,8 +20138,8 @@
         </p:nvSpPr>
         <p:spPr>
           <a:xfrm>
-            <a:off x="731520" y="1874520"/>
-            <a:ext cx="274320" cy="274320"/>
+            <a:off x="841248" y="1847088"/>
+            <a:ext cx="237744" cy="237744"/>
           </a:xfrm>
           <a:prstGeom prst="ellipse">
             <a:avLst/>
@@ -19285,8 +20170,8 @@
         </p:nvSpPr>
         <p:spPr>
           <a:xfrm>
-            <a:off x="365760" y="1371600"/>
-            <a:ext cx="1005840" cy="365760"/>
+            <a:off x="411480" y="1371600"/>
+            <a:ext cx="1097280" cy="365760"/>
           </a:xfrm>
           <a:prstGeom prst="rect">
             <a:avLst/>
@@ -19302,7 +20187,7 @@
               <a:buNone/>
             </a:pPr>
             <a:r>
-              <a:rPr lang="en-US" sz="1600" b="1" dirty="0">
+              <a:rPr lang="en-US" sz="1500" b="1" dirty="0">
                 <a:solidFill>
                   <a:srgbClr val="1A2430"/>
                 </a:solidFill>
@@ -19312,7 +20197,7 @@
               </a:rPr>
               <a:t>2005</a:t>
             </a:r>
-            <a:endParaRPr lang="en-US" sz="1600" dirty="0"/>
+            <a:endParaRPr lang="en-US" sz="1500" dirty="0"/>
           </a:p>
         </p:txBody>
       </p:sp>
@@ -19324,7 +20209,7 @@
         </p:nvSpPr>
         <p:spPr>
           <a:xfrm>
-            <a:off x="274320" y="2286000"/>
+            <a:off x="365760" y="2212848"/>
             <a:ext cx="1188720" cy="320040"/>
           </a:xfrm>
           <a:prstGeom prst="rect">
@@ -19341,7 +20226,7 @@
               <a:buNone/>
             </a:pPr>
             <a:r>
-              <a:rPr lang="en-US" sz="1400" b="1" dirty="0">
+              <a:rPr lang="en-US" sz="1250" b="1" dirty="0">
                 <a:solidFill>
                   <a:srgbClr val="1A2430"/>
                 </a:solidFill>
@@ -19351,7 +20236,7 @@
               </a:rPr>
               <a:t>Rails 1.0</a:t>
             </a:r>
-            <a:endParaRPr lang="en-US" sz="1400" dirty="0"/>
+            <a:endParaRPr lang="en-US" sz="1250" dirty="0"/>
           </a:p>
         </p:txBody>
       </p:sp>
@@ -19363,8 +20248,8 @@
         </p:nvSpPr>
         <p:spPr>
           <a:xfrm>
-            <a:off x="228600" y="2651760"/>
-            <a:ext cx="1280160" cy="1463040"/>
+            <a:off x="393192" y="2560320"/>
+            <a:ext cx="1133856" cy="1645920"/>
           </a:xfrm>
           <a:prstGeom prst="rect">
             <a:avLst/>
@@ -19380,7 +20265,7 @@
               <a:buNone/>
             </a:pPr>
             <a:r>
-              <a:rPr lang="en-US" sz="1050" dirty="0">
+              <a:rPr lang="en-US" sz="950" dirty="0">
                 <a:solidFill>
                   <a:srgbClr val="6B7785"/>
                 </a:solidFill>
@@ -19390,7 +20275,7 @@
               </a:rPr>
               <a:t>DHH's 15-minute blog video. Convention over configuration, DRY, generators.</a:t>
             </a:r>
-            <a:endParaRPr lang="en-US" sz="1050" dirty="0"/>
+            <a:endParaRPr lang="en-US" sz="950" dirty="0"/>
           </a:p>
         </p:txBody>
       </p:sp>
@@ -19402,8 +20287,8 @@
         </p:nvSpPr>
         <p:spPr>
           <a:xfrm>
-            <a:off x="2377440" y="1874520"/>
-            <a:ext cx="274320" cy="274320"/>
+            <a:off x="2084832" y="1847088"/>
+            <a:ext cx="237744" cy="237744"/>
           </a:xfrm>
           <a:prstGeom prst="ellipse">
             <a:avLst/>
@@ -19434,8 +20319,8 @@
         </p:nvSpPr>
         <p:spPr>
           <a:xfrm>
-            <a:off x="2011680" y="1371600"/>
-            <a:ext cx="1005840" cy="365760"/>
+            <a:off x="1655064" y="1371600"/>
+            <a:ext cx="1097280" cy="365760"/>
           </a:xfrm>
           <a:prstGeom prst="rect">
             <a:avLst/>
@@ -19451,7 +20336,7 @@
               <a:buNone/>
             </a:pPr>
             <a:r>
-              <a:rPr lang="en-US" sz="1600" b="1" dirty="0">
+              <a:rPr lang="en-US" sz="1500" b="1" dirty="0">
                 <a:solidFill>
                   <a:srgbClr val="1A2430"/>
                 </a:solidFill>
@@ -19459,9 +20344,9 @@
                 <a:ea typeface="Calibri" pitchFamily="34" charset="-122"/>
                 <a:cs typeface="Calibri" pitchFamily="34" charset="-120"/>
               </a:rPr>
-              <a:t>2009</a:t>
-            </a:r>
-            <a:endParaRPr lang="en-US" sz="1600" dirty="0"/>
+              <a:t>2005–06</a:t>
+            </a:r>
+            <a:endParaRPr lang="en-US" sz="1500" dirty="0"/>
           </a:p>
         </p:txBody>
       </p:sp>
@@ -19473,7 +20358,7 @@
         </p:nvSpPr>
         <p:spPr>
           <a:xfrm>
-            <a:off x="1920240" y="2286000"/>
+            <a:off x="1609344" y="2212848"/>
             <a:ext cx="1188720" cy="320040"/>
           </a:xfrm>
           <a:prstGeom prst="rect">
@@ -19490,7 +20375,7 @@
               <a:buNone/>
             </a:pPr>
             <a:r>
-              <a:rPr lang="en-US" sz="1400" b="1" dirty="0">
+              <a:rPr lang="en-US" sz="1250" b="1" dirty="0">
                 <a:solidFill>
                   <a:srgbClr val="1A2430"/>
                 </a:solidFill>
@@ -19498,9 +20383,9 @@
                 <a:ea typeface="Calibri" pitchFamily="34" charset="-122"/>
                 <a:cs typeface="Calibri" pitchFamily="34" charset="-120"/>
               </a:rPr>
-              <a:t>CFWheels 1.0</a:t>
-            </a:r>
-            <a:endParaRPr lang="en-US" sz="1400" dirty="0"/>
+              <a:t>CFWheels begins</a:t>
+            </a:r>
+            <a:endParaRPr lang="en-US" sz="1250" dirty="0"/>
           </a:p>
         </p:txBody>
       </p:sp>
@@ -19512,8 +20397,8 @@
         </p:nvSpPr>
         <p:spPr>
           <a:xfrm>
-            <a:off x="1874520" y="2651760"/>
-            <a:ext cx="1280160" cy="1463040"/>
+            <a:off x="1636776" y="2560320"/>
+            <a:ext cx="1133856" cy="1645920"/>
           </a:xfrm>
           <a:prstGeom prst="rect">
             <a:avLst/>
@@ -19529,7 +20414,7 @@
               <a:buNone/>
             </a:pPr>
             <a:r>
-              <a:rPr lang="en-US" sz="1050" dirty="0">
+              <a:rPr lang="en-US" sz="950" dirty="0">
                 <a:solidFill>
                   <a:srgbClr val="6B7785"/>
                 </a:solidFill>
@@ -19537,9 +20422,9 @@
                 <a:ea typeface="Calibri" pitchFamily="34" charset="-122"/>
                 <a:cs typeface="Calibri" pitchFamily="34" charset="-120"/>
               </a:rPr>
-              <a:t>Rails conventions in CFML. Long ramp-up — many of you looked, then moved on.</a:t>
-            </a:r>
-            <a:endParaRPr lang="en-US" sz="1050" dirty="0"/>
+              <a:t>Rob Cameron's Rails-inspired beta: controllers and views first, then a model layer and basic ORM.</a:t>
+            </a:r>
+            <a:endParaRPr lang="en-US" sz="950" dirty="0"/>
           </a:p>
         </p:txBody>
       </p:sp>
@@ -19551,8 +20436,8 @@
         </p:nvSpPr>
         <p:spPr>
           <a:xfrm>
-            <a:off x="4023360" y="1874520"/>
-            <a:ext cx="274320" cy="274320"/>
+            <a:off x="3328416" y="1847088"/>
+            <a:ext cx="237744" cy="237744"/>
           </a:xfrm>
           <a:prstGeom prst="ellipse">
             <a:avLst/>
@@ -19583,8 +20468,8 @@
         </p:nvSpPr>
         <p:spPr>
           <a:xfrm>
-            <a:off x="3657600" y="1371600"/>
-            <a:ext cx="1005840" cy="365760"/>
+            <a:off x="2898648" y="1371600"/>
+            <a:ext cx="1097280" cy="365760"/>
           </a:xfrm>
           <a:prstGeom prst="rect">
             <a:avLst/>
@@ -19600,7 +20485,7 @@
               <a:buNone/>
             </a:pPr>
             <a:r>
-              <a:rPr lang="en-US" sz="1600" b="1" dirty="0">
+              <a:rPr lang="en-US" sz="1500" b="1" dirty="0">
                 <a:solidFill>
                   <a:srgbClr val="1A2430"/>
                 </a:solidFill>
@@ -19608,9 +20493,9 @@
                 <a:ea typeface="Calibri" pitchFamily="34" charset="-122"/>
                 <a:cs typeface="Calibri" pitchFamily="34" charset="-120"/>
               </a:rPr>
-              <a:t>2018</a:t>
-            </a:r>
-            <a:endParaRPr lang="en-US" sz="1600" dirty="0"/>
+              <a:t>2008</a:t>
+            </a:r>
+            <a:endParaRPr lang="en-US" sz="1500" dirty="0"/>
           </a:p>
         </p:txBody>
       </p:sp>
@@ -19622,7 +20507,7 @@
         </p:nvSpPr>
         <p:spPr>
           <a:xfrm>
-            <a:off x="3566160" y="2286000"/>
+            <a:off x="2852928" y="2212848"/>
             <a:ext cx="1188720" cy="320040"/>
           </a:xfrm>
           <a:prstGeom prst="rect">
@@ -19639,7 +20524,7 @@
               <a:buNone/>
             </a:pPr>
             <a:r>
-              <a:rPr lang="en-US" sz="1400" b="1" dirty="0">
+              <a:rPr lang="en-US" sz="1250" b="1" dirty="0">
                 <a:solidFill>
                   <a:srgbClr val="1A2430"/>
                 </a:solidFill>
@@ -19647,9 +20532,9 @@
                 <a:ea typeface="Calibri" pitchFamily="34" charset="-122"/>
                 <a:cs typeface="Calibri" pitchFamily="34" charset="-120"/>
               </a:rPr>
-              <a:t>CFWheels 2.0</a:t>
-            </a:r>
-            <a:endParaRPr lang="en-US" sz="1400" dirty="0"/>
+              <a:t>1.0</a:t>
+            </a:r>
+            <a:endParaRPr lang="en-US" sz="1250" dirty="0"/>
           </a:p>
         </p:txBody>
       </p:sp>
@@ -19661,8 +20546,8 @@
         </p:nvSpPr>
         <p:spPr>
           <a:xfrm>
-            <a:off x="3520440" y="2651760"/>
-            <a:ext cx="1280160" cy="1463040"/>
+            <a:off x="2880360" y="2560320"/>
+            <a:ext cx="1133856" cy="1645920"/>
           </a:xfrm>
           <a:prstGeom prst="rect">
             <a:avLst/>
@@ -19678,7 +20563,7 @@
               <a:buNone/>
             </a:pPr>
             <a:r>
-              <a:rPr lang="en-US" sz="1050" dirty="0">
+              <a:rPr lang="en-US" sz="950" dirty="0">
                 <a:solidFill>
                   <a:srgbClr val="6B7785"/>
                 </a:solidFill>
@@ -19686,9 +20571,9 @@
                 <a:ea typeface="Calibri" pitchFamily="34" charset="-122"/>
                 <a:cs typeface="Calibri" pitchFamily="34" charset="-120"/>
               </a:rPr>
-              <a:t>Modern routing, CLI via CommandBox, TestBox. Solid, but quiet.</a:t>
-            </a:r>
-            <a:endParaRPr lang="en-US" sz="1050" dirty="0"/>
+              <a:t>Cleaned up and organized. "Up and running in an hour." Railo support. Per Djurner leads.</a:t>
+            </a:r>
+            <a:endParaRPr lang="en-US" sz="950" dirty="0"/>
           </a:p>
         </p:txBody>
       </p:sp>
@@ -19700,8 +20585,8 @@
         </p:nvSpPr>
         <p:spPr>
           <a:xfrm>
-            <a:off x="5669280" y="1874520"/>
-            <a:ext cx="274320" cy="274320"/>
+            <a:off x="4572000" y="1847088"/>
+            <a:ext cx="237744" cy="237744"/>
           </a:xfrm>
           <a:prstGeom prst="ellipse">
             <a:avLst/>
@@ -19732,8 +20617,8 @@
         </p:nvSpPr>
         <p:spPr>
           <a:xfrm>
-            <a:off x="5303520" y="1371600"/>
-            <a:ext cx="1005840" cy="365760"/>
+            <a:off x="4142232" y="1371600"/>
+            <a:ext cx="1097280" cy="365760"/>
           </a:xfrm>
           <a:prstGeom prst="rect">
             <a:avLst/>
@@ -19749,7 +20634,7 @@
               <a:buNone/>
             </a:pPr>
             <a:r>
-              <a:rPr lang="en-US" sz="1600" b="1" dirty="0">
+              <a:rPr lang="en-US" sz="1500" b="1" dirty="0">
                 <a:solidFill>
                   <a:srgbClr val="1A2430"/>
                 </a:solidFill>
@@ -19757,9 +20642,9 @@
                 <a:ea typeface="Calibri" pitchFamily="34" charset="-122"/>
                 <a:cs typeface="Calibri" pitchFamily="34" charset="-120"/>
               </a:rPr>
-              <a:t>Jan 2026</a:t>
-            </a:r>
-            <a:endParaRPr lang="en-US" sz="1600" dirty="0"/>
+              <a:t>2010</a:t>
+            </a:r>
+            <a:endParaRPr lang="en-US" sz="1500" dirty="0"/>
           </a:p>
         </p:txBody>
       </p:sp>
@@ -19771,7 +20656,7 @@
         </p:nvSpPr>
         <p:spPr>
           <a:xfrm>
-            <a:off x="5212080" y="2286000"/>
+            <a:off x="4096512" y="2212848"/>
             <a:ext cx="1188720" cy="320040"/>
           </a:xfrm>
           <a:prstGeom prst="rect">
@@ -19788,7 +20673,7 @@
               <a:buNone/>
             </a:pPr>
             <a:r>
-              <a:rPr lang="en-US" sz="1400" b="1" dirty="0">
+              <a:rPr lang="en-US" sz="1250" b="1" dirty="0">
                 <a:solidFill>
                   <a:srgbClr val="1A2430"/>
                 </a:solidFill>
@@ -19796,9 +20681,9 @@
                 <a:ea typeface="Calibri" pitchFamily="34" charset="-122"/>
                 <a:cs typeface="Calibri" pitchFamily="34" charset="-120"/>
               </a:rPr>
-              <a:t>Wheels 3.0</a:t>
-            </a:r>
-            <a:endParaRPr lang="en-US" sz="1400" dirty="0"/>
+              <a:t>1.1</a:t>
+            </a:r>
+            <a:endParaRPr lang="en-US" sz="1250" dirty="0"/>
           </a:p>
         </p:txBody>
       </p:sp>
@@ -19810,8 +20695,8 @@
         </p:nvSpPr>
         <p:spPr>
           <a:xfrm>
-            <a:off x="5166360" y="2651760"/>
-            <a:ext cx="1280160" cy="1463040"/>
+            <a:off x="4123944" y="2560320"/>
+            <a:ext cx="1133856" cy="1645920"/>
           </a:xfrm>
           <a:prstGeom prst="rect">
             <a:avLst/>
@@ -19827,7 +20712,7 @@
               <a:buNone/>
             </a:pPr>
             <a:r>
-              <a:rPr lang="en-US" sz="1050" dirty="0">
+              <a:rPr lang="en-US" sz="950" dirty="0">
                 <a:solidFill>
                   <a:srgbClr val="6B7785"/>
                 </a:solidFill>
@@ -19835,9 +20720,9 @@
                 <a:ea typeface="Calibri" pitchFamily="34" charset="-122"/>
                 <a:cs typeface="Calibri" pitchFamily="34" charset="-120"/>
               </a:rPr>
-              <a:t>Rebrand to wheels.dev. Core moves to vendor/. SQLite, Oracle, BoxLang, CockroachDB.</a:t>
-            </a:r>
-            <a:endParaRPr lang="en-US" sz="1050" dirty="0"/>
+              <a:t>RocketUnit tests, major ORM work, controllers respond with XML, JSON, CSV, PDF, XLS.</a:t>
+            </a:r>
+            <a:endParaRPr lang="en-US" sz="950" dirty="0"/>
           </a:p>
         </p:txBody>
       </p:sp>
@@ -19849,8 +20734,317 @@
         </p:nvSpPr>
         <p:spPr>
           <a:xfrm>
-            <a:off x="7315200" y="1874520"/>
-            <a:ext cx="274320" cy="274320"/>
+            <a:off x="5815584" y="1847088"/>
+            <a:ext cx="237744" cy="237744"/>
+          </a:xfrm>
+          <a:prstGeom prst="ellipse">
+            <a:avLst/>
+          </a:prstGeom>
+          <a:solidFill>
+            <a:srgbClr val="0C1620"/>
+          </a:solidFill>
+          <a:ln w="12700">
+            <a:solidFill>
+              <a:srgbClr val="0C1620"/>
+            </a:solidFill>
+            <a:prstDash val="solid"/>
+          </a:ln>
+        </p:spPr>
+        <p:txBody>
+          <a:bodyPr/>
+          <a:lstStyle/>
+          <a:p>
+            <a:endParaRPr lang="en-US"/>
+          </a:p>
+        </p:txBody>
+      </p:sp>
+      <p:sp>
+        <p:nvSpPr>
+          <p:cNvPr id="25" name="Text 22"/>
+          <p:cNvSpPr txBox="1"/>
+          <p:nvPr/>
+        </p:nvSpPr>
+        <p:spPr>
+          <a:xfrm>
+            <a:off x="5385816" y="1371600"/>
+            <a:ext cx="1097280" cy="365760"/>
+          </a:xfrm>
+          <a:prstGeom prst="rect">
+            <a:avLst/>
+          </a:prstGeom>
+          <a:noFill/>
+          <a:ln/>
+        </p:spPr>
+        <p:txBody>
+          <a:bodyPr wrap="square" lIns="0" tIns="0" rIns="0" bIns="0" rtlCol="0" anchor="ctr"/>
+          <a:lstStyle/>
+          <a:p>
+            <a:pPr marL="0" indent="0" algn="ctr">
+              <a:buNone/>
+            </a:pPr>
+            <a:r>
+              <a:rPr lang="en-US" sz="1500" b="1" dirty="0">
+                <a:solidFill>
+                  <a:srgbClr val="1A2430"/>
+                </a:solidFill>
+                <a:latin typeface="Calibri" pitchFamily="34" charset="0"/>
+                <a:ea typeface="Calibri" pitchFamily="34" charset="-122"/>
+                <a:cs typeface="Calibri" pitchFamily="34" charset="-120"/>
+              </a:rPr>
+              <a:t>2014</a:t>
+            </a:r>
+            <a:endParaRPr lang="en-US" sz="1500" dirty="0"/>
+          </a:p>
+        </p:txBody>
+      </p:sp>
+      <p:sp>
+        <p:nvSpPr>
+          <p:cNvPr id="26" name="Text 23"/>
+          <p:cNvSpPr txBox="1"/>
+          <p:nvPr/>
+        </p:nvSpPr>
+        <p:spPr>
+          <a:xfrm>
+            <a:off x="5340096" y="2212848"/>
+            <a:ext cx="1188720" cy="320040"/>
+          </a:xfrm>
+          <a:prstGeom prst="rect">
+            <a:avLst/>
+          </a:prstGeom>
+          <a:noFill/>
+          <a:ln/>
+        </p:spPr>
+        <p:txBody>
+          <a:bodyPr wrap="square" lIns="0" tIns="0" rIns="0" bIns="0" rtlCol="0" anchor="ctr"/>
+          <a:lstStyle/>
+          <a:p>
+            <a:pPr marL="0" indent="0" algn="ctr">
+              <a:buNone/>
+            </a:pPr>
+            <a:r>
+              <a:rPr lang="en-US" sz="1250" b="1" dirty="0">
+                <a:solidFill>
+                  <a:srgbClr val="1A2430"/>
+                </a:solidFill>
+                <a:latin typeface="Calibri" pitchFamily="34" charset="0"/>
+                <a:ea typeface="Calibri" pitchFamily="34" charset="-122"/>
+                <a:cs typeface="Calibri" pitchFamily="34" charset="-120"/>
+              </a:rPr>
+              <a:t>1.3 · 1.4</a:t>
+            </a:r>
+            <a:endParaRPr lang="en-US" sz="1250" dirty="0"/>
+          </a:p>
+        </p:txBody>
+      </p:sp>
+      <p:sp>
+        <p:nvSpPr>
+          <p:cNvPr id="27" name="Text 24"/>
+          <p:cNvSpPr txBox="1"/>
+          <p:nvPr/>
+        </p:nvSpPr>
+        <p:spPr>
+          <a:xfrm>
+            <a:off x="5367528" y="2560320"/>
+            <a:ext cx="1133856" cy="1645920"/>
+          </a:xfrm>
+          <a:prstGeom prst="rect">
+            <a:avLst/>
+          </a:prstGeom>
+          <a:noFill/>
+          <a:ln/>
+        </p:spPr>
+        <p:txBody>
+          <a:bodyPr wrap="square" lIns="0" tIns="0" rIns="0" bIns="0" rtlCol="0" anchor="t"/>
+          <a:lstStyle/>
+          <a:p>
+            <a:pPr marL="0" indent="0" algn="ctr">
+              <a:buNone/>
+            </a:pPr>
+            <a:r>
+              <a:rPr lang="en-US" sz="950" dirty="0">
+                <a:solidFill>
+                  <a:srgbClr val="6B7785"/>
+                </a:solidFill>
+                <a:latin typeface="Calibri" pitchFamily="34" charset="0"/>
+                <a:ea typeface="Calibri" pitchFamily="34" charset="-122"/>
+                <a:cs typeface="Calibri" pitchFamily="34" charset="-120"/>
+              </a:rPr>
+              <a:t>Tableless models, HTML5, Lucee support. (1.2 changed hands a lot — nobody counts it.)</a:t>
+            </a:r>
+            <a:endParaRPr lang="en-US" sz="950" dirty="0"/>
+          </a:p>
+        </p:txBody>
+      </p:sp>
+      <p:sp>
+        <p:nvSpPr>
+          <p:cNvPr id="28" name="Shape 25"/>
+          <p:cNvSpPr/>
+          <p:nvPr/>
+        </p:nvSpPr>
+        <p:spPr>
+          <a:xfrm>
+            <a:off x="7059168" y="1847088"/>
+            <a:ext cx="237744" cy="237744"/>
+          </a:xfrm>
+          <a:prstGeom prst="ellipse">
+            <a:avLst/>
+          </a:prstGeom>
+          <a:solidFill>
+            <a:srgbClr val="0C1620"/>
+          </a:solidFill>
+          <a:ln w="12700">
+            <a:solidFill>
+              <a:srgbClr val="0C1620"/>
+            </a:solidFill>
+            <a:prstDash val="solid"/>
+          </a:ln>
+        </p:spPr>
+        <p:txBody>
+          <a:bodyPr/>
+          <a:lstStyle/>
+          <a:p>
+            <a:endParaRPr lang="en-US"/>
+          </a:p>
+        </p:txBody>
+      </p:sp>
+      <p:sp>
+        <p:nvSpPr>
+          <p:cNvPr id="29" name="Text 26"/>
+          <p:cNvSpPr txBox="1"/>
+          <p:nvPr/>
+        </p:nvSpPr>
+        <p:spPr>
+          <a:xfrm>
+            <a:off x="6629400" y="1371600"/>
+            <a:ext cx="1097280" cy="365760"/>
+          </a:xfrm>
+          <a:prstGeom prst="rect">
+            <a:avLst/>
+          </a:prstGeom>
+          <a:noFill/>
+          <a:ln/>
+        </p:spPr>
+        <p:txBody>
+          <a:bodyPr wrap="square" lIns="0" tIns="0" rIns="0" bIns="0" rtlCol="0" anchor="ctr"/>
+          <a:lstStyle/>
+          <a:p>
+            <a:pPr marL="0" indent="0" algn="ctr">
+              <a:buNone/>
+            </a:pPr>
+            <a:r>
+              <a:rPr lang="en-US" sz="1500" b="1" dirty="0">
+                <a:solidFill>
+                  <a:srgbClr val="1A2430"/>
+                </a:solidFill>
+                <a:latin typeface="Calibri" pitchFamily="34" charset="0"/>
+                <a:ea typeface="Calibri" pitchFamily="34" charset="-122"/>
+                <a:cs typeface="Calibri" pitchFamily="34" charset="-120"/>
+              </a:rPr>
+              <a:t>2017</a:t>
+            </a:r>
+            <a:endParaRPr lang="en-US" sz="1500" dirty="0"/>
+          </a:p>
+        </p:txBody>
+      </p:sp>
+      <p:sp>
+        <p:nvSpPr>
+          <p:cNvPr id="30" name="Text 27"/>
+          <p:cNvSpPr txBox="1"/>
+          <p:nvPr/>
+        </p:nvSpPr>
+        <p:spPr>
+          <a:xfrm>
+            <a:off x="6583680" y="2212848"/>
+            <a:ext cx="1188720" cy="320040"/>
+          </a:xfrm>
+          <a:prstGeom prst="rect">
+            <a:avLst/>
+          </a:prstGeom>
+          <a:noFill/>
+          <a:ln/>
+        </p:spPr>
+        <p:txBody>
+          <a:bodyPr wrap="square" lIns="0" tIns="0" rIns="0" bIns="0" rtlCol="0" anchor="ctr"/>
+          <a:lstStyle/>
+          <a:p>
+            <a:pPr marL="0" indent="0" algn="ctr">
+              <a:buNone/>
+            </a:pPr>
+            <a:r>
+              <a:rPr lang="en-US" sz="1250" b="1" dirty="0">
+                <a:solidFill>
+                  <a:srgbClr val="1A2430"/>
+                </a:solidFill>
+                <a:latin typeface="Calibri" pitchFamily="34" charset="0"/>
+                <a:ea typeface="Calibri" pitchFamily="34" charset="-122"/>
+                <a:cs typeface="Calibri" pitchFamily="34" charset="-120"/>
+              </a:rPr>
+              <a:t>2.0</a:t>
+            </a:r>
+            <a:endParaRPr lang="en-US" sz="1250" dirty="0"/>
+          </a:p>
+        </p:txBody>
+      </p:sp>
+      <p:sp>
+        <p:nvSpPr>
+          <p:cNvPr id="31" name="Text 28"/>
+          <p:cNvSpPr txBox="1"/>
+          <p:nvPr/>
+        </p:nvSpPr>
+        <p:spPr>
+          <a:xfrm>
+            <a:off x="6611112" y="2560320"/>
+            <a:ext cx="1133856" cy="1645920"/>
+          </a:xfrm>
+          <a:prstGeom prst="rect">
+            <a:avLst/>
+          </a:prstGeom>
+          <a:noFill/>
+          <a:ln/>
+        </p:spPr>
+        <p:txBody>
+          <a:bodyPr wrap="square" lIns="0" tIns="0" rIns="0" bIns="0" rtlCol="0" anchor="t"/>
+          <a:lstStyle/>
+          <a:p>
+            <a:pPr marL="0" indent="0" algn="ctr">
+              <a:buNone/>
+            </a:pPr>
+            <a:r>
+              <a:rPr lang="en-US" sz="950" dirty="0">
+                <a:solidFill>
+                  <a:srgbClr val="6B7785"/>
+                </a:solidFill>
+                <a:latin typeface="Calibri" pitchFamily="34" charset="0"/>
+                <a:ea typeface="Calibri" pitchFamily="34" charset="-122"/>
+                <a:cs typeface="Calibri" pitchFamily="34" charset="-120"/>
+              </a:rPr>
+              <a:t>All-cfscript core, migrations and routing in core, CSRF, plugins on </a:t>
+            </a:r>
+            <a:r>
+              <a:rPr lang="en-US" sz="950">
+                <a:solidFill>
+                  <a:srgbClr val="6B7785"/>
+                </a:solidFill>
+                <a:latin typeface="Calibri" pitchFamily="34" charset="0"/>
+                <a:ea typeface="Calibri" pitchFamily="34" charset="-122"/>
+                <a:cs typeface="Calibri" pitchFamily="34" charset="-120"/>
+              </a:rPr>
+              <a:t>ForgeBox. Tom King leads.</a:t>
+            </a:r>
+            <a:endParaRPr lang="en-US" sz="950" dirty="0"/>
+          </a:p>
+        </p:txBody>
+      </p:sp>
+      <p:sp>
+        <p:nvSpPr>
+          <p:cNvPr id="32" name="Shape 29"/>
+          <p:cNvSpPr/>
+          <p:nvPr/>
+        </p:nvSpPr>
+        <p:spPr>
+          <a:xfrm>
+            <a:off x="8302752" y="1847088"/>
+            <a:ext cx="237744" cy="237744"/>
           </a:xfrm>
           <a:prstGeom prst="ellipse">
             <a:avLst/>
@@ -19875,14 +21069,14 @@
       </p:sp>
       <p:sp>
         <p:nvSpPr>
-          <p:cNvPr id="25" name="Text 22"/>
-          <p:cNvSpPr txBox="1"/>
-          <p:nvPr/>
-        </p:nvSpPr>
-        <p:spPr>
-          <a:xfrm>
-            <a:off x="6949440" y="1371600"/>
-            <a:ext cx="1005840" cy="365760"/>
+          <p:cNvPr id="33" name="Text 30"/>
+          <p:cNvSpPr txBox="1"/>
+          <p:nvPr/>
+        </p:nvSpPr>
+        <p:spPr>
+          <a:xfrm>
+            <a:off x="7872984" y="1371600"/>
+            <a:ext cx="1097280" cy="365760"/>
           </a:xfrm>
           <a:prstGeom prst="rect">
             <a:avLst/>
@@ -19898,7 +21092,7 @@
               <a:buNone/>
             </a:pPr>
             <a:r>
-              <a:rPr lang="en-US" sz="1600" b="1" dirty="0">
+              <a:rPr lang="en-US" sz="1500" b="1" dirty="0">
                 <a:solidFill>
                   <a:srgbClr val="EF3B2D"/>
                 </a:solidFill>
@@ -19908,19 +21102,19 @@
               </a:rPr>
               <a:t>2026</a:t>
             </a:r>
-            <a:endParaRPr lang="en-US" sz="1600" dirty="0"/>
-          </a:p>
-        </p:txBody>
-      </p:sp>
-      <p:sp>
-        <p:nvSpPr>
-          <p:cNvPr id="26" name="Text 23"/>
-          <p:cNvSpPr txBox="1"/>
-          <p:nvPr/>
-        </p:nvSpPr>
-        <p:spPr>
-          <a:xfrm>
-            <a:off x="6858000" y="2286000"/>
+            <a:endParaRPr lang="en-US" sz="1500" dirty="0"/>
+          </a:p>
+        </p:txBody>
+      </p:sp>
+      <p:sp>
+        <p:nvSpPr>
+          <p:cNvPr id="34" name="Text 31"/>
+          <p:cNvSpPr txBox="1"/>
+          <p:nvPr/>
+        </p:nvSpPr>
+        <p:spPr>
+          <a:xfrm>
+            <a:off x="7827264" y="2212848"/>
             <a:ext cx="1188720" cy="320040"/>
           </a:xfrm>
           <a:prstGeom prst="rect">
@@ -19937,7 +21131,7 @@
               <a:buNone/>
             </a:pPr>
             <a:r>
-              <a:rPr lang="en-US" sz="1400" b="1" dirty="0">
+              <a:rPr lang="en-US" sz="1250" b="1" dirty="0">
                 <a:solidFill>
                   <a:srgbClr val="1A2430"/>
                 </a:solidFill>
@@ -19945,22 +21139,22 @@
                 <a:ea typeface="Calibri" pitchFamily="34" charset="-122"/>
                 <a:cs typeface="Calibri" pitchFamily="34" charset="-120"/>
               </a:rPr>
-              <a:t>Wheels 4.x</a:t>
-            </a:r>
-            <a:endParaRPr lang="en-US" sz="1400" dirty="0"/>
-          </a:p>
-        </p:txBody>
-      </p:sp>
-      <p:sp>
-        <p:nvSpPr>
-          <p:cNvPr id="27" name="Text 24"/>
-          <p:cNvSpPr txBox="1"/>
-          <p:nvPr/>
-        </p:nvSpPr>
-        <p:spPr>
-          <a:xfrm>
-            <a:off x="6812280" y="2651760"/>
-            <a:ext cx="1280160" cy="1463040"/>
+              <a:t>3.0 → 4.1</a:t>
+            </a:r>
+            <a:endParaRPr lang="en-US" sz="1250" dirty="0"/>
+          </a:p>
+        </p:txBody>
+      </p:sp>
+      <p:sp>
+        <p:nvSpPr>
+          <p:cNvPr id="35" name="Text 32"/>
+          <p:cNvSpPr txBox="1"/>
+          <p:nvPr/>
+        </p:nvSpPr>
+        <p:spPr>
+          <a:xfrm>
+            <a:off x="7854696" y="2560320"/>
+            <a:ext cx="1133856" cy="1645920"/>
           </a:xfrm>
           <a:prstGeom prst="rect">
             <a:avLst/>
@@ -19976,7 +21170,7 @@
               <a:buNone/>
             </a:pPr>
             <a:r>
-              <a:rPr lang="en-US" sz="1050" dirty="0">
+              <a:rPr lang="en-US" sz="950" dirty="0">
                 <a:solidFill>
                   <a:srgbClr val="6B7785"/>
                 </a:solidFill>
@@ -19984,15 +21178,15 @@
                 <a:ea typeface="Calibri" pitchFamily="34" charset="-122"/>
                 <a:cs typeface="Calibri" pitchFamily="34" charset="-120"/>
               </a:rPr>
-              <a:t>Standalone CLI (no CommandBox), auth &amp; policy generators, storage, MCP, agent-driven CI.</a:t>
-            </a:r>
-            <a:endParaRPr lang="en-US" sz="1050" dirty="0"/>
-          </a:p>
-        </p:txBody>
-      </p:sp>
-      <p:sp>
-        <p:nvSpPr>
-          <p:cNvPr id="28" name="Text 25"/>
+              <a:t>Rebrand to wheels.dev, core in vendor/, standalone CLI, auth &amp; policies, MCP, agent-driven CI. 4.1 shipped Sept 10.</a:t>
+            </a:r>
+            <a:endParaRPr lang="en-US" sz="950" dirty="0"/>
+          </a:p>
+        </p:txBody>
+      </p:sp>
+      <p:sp>
+        <p:nvSpPr>
+          <p:cNvPr id="36" name="Text 33"/>
           <p:cNvSpPr txBox="1"/>
           <p:nvPr/>
         </p:nvSpPr>
@@ -20023,51 +21217,7 @@
                 <a:ea typeface="Calibri" pitchFamily="34" charset="-122"/>
                 <a:cs typeface="Calibri" pitchFamily="34" charset="-120"/>
               </a:rPr>
-              <a:t>Runs today on Adobe ColdFusion 2018–2025, Lucee 5/6/7, </a:t>
-            </a:r>
-            <a:r>
-              <a:rPr lang="en-US" sz="1300" b="1" dirty="0" err="1">
-                <a:solidFill>
-                  <a:srgbClr val="1A2430"/>
-                </a:solidFill>
-                <a:latin typeface="Calibri" pitchFamily="34" charset="0"/>
-                <a:ea typeface="Calibri" pitchFamily="34" charset="-122"/>
-                <a:cs typeface="Calibri" pitchFamily="34" charset="-120"/>
-              </a:rPr>
-              <a:t>BoxLang</a:t>
-            </a:r>
-            <a:r>
-              <a:rPr lang="en-US" sz="1300" b="1" dirty="0">
-                <a:solidFill>
-                  <a:srgbClr val="1A2430"/>
-                </a:solidFill>
-                <a:latin typeface="Calibri" pitchFamily="34" charset="0"/>
-                <a:ea typeface="Calibri" pitchFamily="34" charset="-122"/>
-                <a:cs typeface="Calibri" pitchFamily="34" charset="-120"/>
-              </a:rPr>
-              <a:t> 1.x, and </a:t>
-            </a:r>
-            <a:r>
-              <a:rPr lang="en-US" sz="1300" b="1" dirty="0" err="1">
-                <a:solidFill>
-                  <a:srgbClr val="1A2430"/>
-                </a:solidFill>
-                <a:latin typeface="Calibri" pitchFamily="34" charset="0"/>
-                <a:ea typeface="Calibri" pitchFamily="34" charset="-122"/>
-                <a:cs typeface="Calibri" pitchFamily="34" charset="-120"/>
-              </a:rPr>
-              <a:t>RustCFML</a:t>
-            </a:r>
-            <a:r>
-              <a:rPr lang="en-US" sz="1300" b="1" dirty="0">
-                <a:solidFill>
-                  <a:srgbClr val="1A2430"/>
-                </a:solidFill>
-                <a:latin typeface="Calibri" pitchFamily="34" charset="0"/>
-                <a:ea typeface="Calibri" pitchFamily="34" charset="-122"/>
-                <a:cs typeface="Calibri" pitchFamily="34" charset="-120"/>
-              </a:rPr>
-              <a:t>.</a:t>
+              <a:t>Older than jQuery. Runs on Adobe ColdFusion 2018–2025, Lucee 5/6/7, BoxLang 1.x — and JVM-free RustCFML.</a:t>
             </a:r>
             <a:endParaRPr lang="en-US" sz="1300" dirty="0"/>
           </a:p>
@@ -20434,9 +21584,64 @@
                 <a:ea typeface="Calibri" pitchFamily="34" charset="-122"/>
                 <a:cs typeface="Calibri" pitchFamily="34" charset="-120"/>
               </a:rPr>
-              <a:t>Adobe ColdFusion 2018 · 2021 · 2023 · 2025</a:t>
-            </a:r>
-            <a:endParaRPr lang="en-US" sz="1250" dirty="0"/>
+              <a:t>Adobe </a:t>
+            </a:r>
+            <a:r>
+              <a:rPr lang="en-US" sz="1250">
+                <a:solidFill>
+                  <a:srgbClr val="6B7785"/>
+                </a:solidFill>
+                <a:latin typeface="Calibri" pitchFamily="34" charset="0"/>
+                <a:ea typeface="Calibri" pitchFamily="34" charset="-122"/>
+                <a:cs typeface="Calibri" pitchFamily="34" charset="-120"/>
+              </a:rPr>
+              <a:t>ColdFusion </a:t>
+            </a:r>
+            <a:r>
+              <a:rPr lang="en-US" sz="1250" b="1">
+                <a:solidFill>
+                  <a:srgbClr val="6B7785"/>
+                </a:solidFill>
+                <a:latin typeface="Calibri" pitchFamily="34" charset="0"/>
+                <a:ea typeface="Calibri" pitchFamily="34" charset="-122"/>
+                <a:cs typeface="Calibri" pitchFamily="34" charset="-120"/>
+              </a:rPr>
+              <a:t>2023</a:t>
+            </a:r>
+            <a:r>
+              <a:rPr lang="en-US" sz="1250">
+                <a:solidFill>
+                  <a:srgbClr val="6B7785"/>
+                </a:solidFill>
+                <a:latin typeface="Calibri" pitchFamily="34" charset="0"/>
+                <a:ea typeface="Calibri" pitchFamily="34" charset="-122"/>
+                <a:cs typeface="Calibri" pitchFamily="34" charset="-120"/>
+              </a:rPr>
+              <a:t> </a:t>
+            </a:r>
+            <a:r>
+              <a:rPr lang="en-US" sz="1250" dirty="0">
+                <a:solidFill>
+                  <a:srgbClr val="6B7785"/>
+                </a:solidFill>
+                <a:latin typeface="Calibri" pitchFamily="34" charset="0"/>
+                <a:ea typeface="Calibri" pitchFamily="34" charset="-122"/>
+                <a:cs typeface="Calibri" pitchFamily="34" charset="-120"/>
+              </a:rPr>
+              <a:t>· </a:t>
+            </a:r>
+            <a:r>
+              <a:rPr lang="en-US" sz="1250" b="1" dirty="0">
+                <a:solidFill>
+                  <a:srgbClr val="6B7785"/>
+                </a:solidFill>
+                <a:latin typeface="Calibri" pitchFamily="34" charset="0"/>
+                <a:ea typeface="Calibri" pitchFamily="34" charset="-122"/>
+                <a:cs typeface="Calibri" pitchFamily="34" charset="-120"/>
+              </a:rPr>
+              <a:t>2025</a:t>
+            </a:r>
+            <a:endParaRPr lang="en-US" sz="1250" b="1" dirty="0"/>
           </a:p>
           <a:p>
             <a:pPr marL="0" indent="0">
@@ -20446,6 +21651,39 @@
               <a:buNone/>
             </a:pPr>
             <a:r>
+              <a:rPr lang="en-US" sz="1250">
+                <a:solidFill>
+                  <a:srgbClr val="6B7785"/>
+                </a:solidFill>
+                <a:latin typeface="Calibri" pitchFamily="34" charset="0"/>
+                <a:ea typeface="Calibri" pitchFamily="34" charset="-122"/>
+                <a:cs typeface="Calibri" pitchFamily="34" charset="-120"/>
+              </a:rPr>
+              <a:t>Lucee </a:t>
+            </a:r>
+            <a:r>
+              <a:rPr lang="en-US" sz="1250" b="1">
+                <a:solidFill>
+                  <a:srgbClr val="6B7785"/>
+                </a:solidFill>
+                <a:latin typeface="Calibri" pitchFamily="34" charset="0"/>
+                <a:ea typeface="Calibri" pitchFamily="34" charset="-122"/>
+                <a:cs typeface="Calibri" pitchFamily="34" charset="-120"/>
+              </a:rPr>
+              <a:t>6</a:t>
+            </a:r>
+            <a:r>
+              <a:rPr lang="en-US" sz="1250">
+                <a:solidFill>
+                  <a:srgbClr val="6B7785"/>
+                </a:solidFill>
+                <a:latin typeface="Calibri" pitchFamily="34" charset="0"/>
+                <a:ea typeface="Calibri" pitchFamily="34" charset="-122"/>
+                <a:cs typeface="Calibri" pitchFamily="34" charset="-120"/>
+              </a:rPr>
+              <a:t> </a:t>
+            </a:r>
+            <a:r>
               <a:rPr lang="en-US" sz="1250" dirty="0">
                 <a:solidFill>
                   <a:srgbClr val="6B7785"/>
@@ -20454,9 +21692,20 @@
                 <a:ea typeface="Calibri" pitchFamily="34" charset="-122"/>
                 <a:cs typeface="Calibri" pitchFamily="34" charset="-120"/>
               </a:rPr>
-              <a:t>Lucee 5 · 6 · 7</a:t>
-            </a:r>
-            <a:endParaRPr lang="en-US" sz="1250" dirty="0"/>
+              <a:t>· </a:t>
+            </a:r>
+            <a:r>
+              <a:rPr lang="en-US" sz="1250" b="1" dirty="0">
+                <a:solidFill>
+                  <a:srgbClr val="6B7785"/>
+                </a:solidFill>
+                <a:latin typeface="Calibri" pitchFamily="34" charset="0"/>
+                <a:ea typeface="Calibri" pitchFamily="34" charset="-122"/>
+                <a:cs typeface="Calibri" pitchFamily="34" charset="-120"/>
+              </a:rPr>
+              <a:t>7</a:t>
+            </a:r>
+            <a:endParaRPr lang="en-US" sz="1250" b="1" dirty="0"/>
           </a:p>
           <a:p>
             <a:pPr marL="0" indent="0">
@@ -20476,6 +21725,7 @@
               </a:rPr>
               <a:t>BoxLang 1.x</a:t>
             </a:r>
+            <a:endParaRPr lang="en-US" sz="1250" dirty="0"/>
           </a:p>
           <a:p>
             <a:pPr marL="0" indent="0">
@@ -20485,14 +21735,26 @@
               <a:buNone/>
             </a:pPr>
             <a:r>
-              <a:rPr lang="en-US" sz="1250" dirty="0" err="1">
+              <a:rPr lang="en-US" sz="1250" b="1" dirty="0">
                 <a:solidFill>
                   <a:srgbClr val="6B7785"/>
                 </a:solidFill>
                 <a:latin typeface="Calibri" pitchFamily="34" charset="0"/>
+                <a:ea typeface="Calibri" pitchFamily="34" charset="-122"/>
                 <a:cs typeface="Calibri" pitchFamily="34" charset="-120"/>
               </a:rPr>
               <a:t>RustCFML</a:t>
+            </a:r>
+            <a:r>
+              <a:rPr lang="en-US" sz="1250" dirty="0">
+                <a:solidFill>
+                  <a:srgbClr val="6B7785"/>
+                </a:solidFill>
+                <a:latin typeface="Calibri" pitchFamily="34" charset="0"/>
+                <a:ea typeface="Calibri" pitchFamily="34" charset="-122"/>
+                <a:cs typeface="Calibri" pitchFamily="34" charset="-120"/>
+              </a:rPr>
+              <a:t> — JVM-free, written in Rust</a:t>
             </a:r>
             <a:endParaRPr lang="en-US" sz="1250" dirty="0"/>
           </a:p>
@@ -20794,7 +22056,7 @@
               <a:buNone/>
             </a:pPr>
             <a:r>
-              <a:rPr lang="en-US" sz="1250" dirty="0" err="1">
+              <a:rPr lang="en-US" sz="1250" dirty="0">
                 <a:solidFill>
                   <a:srgbClr val="C9D3DD"/>
                 </a:solidFill>
@@ -20802,59 +22064,7 @@
                 <a:ea typeface="Calibri" pitchFamily="34" charset="-122"/>
                 <a:cs typeface="Calibri" pitchFamily="34" charset="-120"/>
               </a:rPr>
-              <a:t>WheelsTest</a:t>
-            </a:r>
-            <a:r>
-              <a:rPr lang="en-US" sz="1250" dirty="0">
-                <a:solidFill>
-                  <a:srgbClr val="C9D3DD"/>
-                </a:solidFill>
-                <a:latin typeface="Calibri" pitchFamily="34" charset="0"/>
-                <a:ea typeface="Calibri" pitchFamily="34" charset="-122"/>
-                <a:cs typeface="Calibri" pitchFamily="34" charset="-120"/>
-              </a:rPr>
-              <a:t> (</a:t>
-            </a:r>
-            <a:r>
-              <a:rPr lang="en-US" sz="1250" dirty="0" err="1">
-                <a:solidFill>
-                  <a:srgbClr val="C9D3DD"/>
-                </a:solidFill>
-                <a:latin typeface="Calibri" pitchFamily="34" charset="0"/>
-                <a:ea typeface="Calibri" pitchFamily="34" charset="-122"/>
-                <a:cs typeface="Calibri" pitchFamily="34" charset="-120"/>
-              </a:rPr>
-              <a:t>TestBox</a:t>
-            </a:r>
-            <a:r>
-              <a:rPr lang="en-US" sz="1250" dirty="0">
-                <a:solidFill>
-                  <a:srgbClr val="C9D3DD"/>
-                </a:solidFill>
-                <a:latin typeface="Calibri" pitchFamily="34" charset="0"/>
-                <a:ea typeface="Calibri" pitchFamily="34" charset="-122"/>
-                <a:cs typeface="Calibri" pitchFamily="34" charset="-120"/>
-              </a:rPr>
-              <a:t>) specs  </a:t>
-            </a:r>
-          </a:p>
-          <a:p>
-            <a:pPr marL="0" indent="0">
-              <a:spcAft>
-                <a:spcPts val="800"/>
-              </a:spcAft>
-              <a:buNone/>
-            </a:pPr>
-            <a:r>
-              <a:rPr lang="en-US" sz="1250" dirty="0">
-                <a:solidFill>
-                  <a:srgbClr val="C9D3DD"/>
-                </a:solidFill>
-                <a:latin typeface="Calibri" pitchFamily="34" charset="0"/>
-                <a:ea typeface="Calibri" pitchFamily="34" charset="-122"/>
-                <a:cs typeface="Calibri" pitchFamily="34" charset="-120"/>
-              </a:rPr>
-              <a:t>CLI · MCP server</a:t>
+              <a:t>WheelsTest specs · CLI · MCP server</a:t>
             </a:r>
             <a:endParaRPr lang="en-US" sz="1250" dirty="0"/>
           </a:p>
@@ -20893,7 +22103,7 @@
                 <a:ea typeface="Calibri" pitchFamily="34" charset="-122"/>
                 <a:cs typeface="Calibri" pitchFamily="34" charset="-120"/>
               </a:rPr>
-              <a:t>Apache 2.0 licensed · github.com/wheels-dev/wheels · ForgeBox: wheels-base-template -&gt; wheels-core</a:t>
+              <a:t>Apache 2.0 licensed · github.com/wheels-dev/wheels · ForgeBox: wheels-core</a:t>
             </a:r>
             <a:endParaRPr lang="en-US" sz="1200" dirty="0"/>
           </a:p>
@@ -21978,7 +23188,7 @@
                 <a:ea typeface="Courier New" pitchFamily="34" charset="-122"/>
                 <a:cs typeface="Courier New" pitchFamily="34" charset="-120"/>
               </a:rPr>
-              <a:t>postsPath()</a:t>
+              <a:t>editPost</a:t>
             </a:r>
             <a:endParaRPr lang="en-US" sz="1700" dirty="0"/>
           </a:p>
@@ -22017,7 +23227,7 @@
                 <a:ea typeface="Calibri" pitchFamily="34" charset="-122"/>
                 <a:cs typeface="Calibri" pitchFamily="34" charset="-120"/>
               </a:rPr>
-              <a:t>route helpers</a:t>
+              <a:t>named routes</a:t>
             </a:r>
             <a:endParaRPr lang="en-US" sz="1100" dirty="0"/>
           </a:p>
@@ -22056,7 +23266,7 @@
                 <a:ea typeface="Courier New" pitchFamily="34" charset="-122"/>
                 <a:cs typeface="Courier New" pitchFamily="34" charset="-120"/>
               </a:rPr>
-              <a:t>.resources("posts")</a:t>
+              <a:t>linkTo(route=…)</a:t>
             </a:r>
             <a:endParaRPr lang="en-US" sz="950" dirty="0"/>
           </a:p>
@@ -22687,8 +23897,8 @@
         </p:nvSpPr>
         <p:spPr>
           <a:xfrm>
-            <a:off x="548640" y="1874520"/>
-            <a:ext cx="1325880" cy="1691640"/>
+            <a:off x="548640" y="2103120"/>
+            <a:ext cx="1325880" cy="1463040"/>
           </a:xfrm>
           <a:prstGeom prst="rect">
             <a:avLst/>
@@ -22766,6 +23976,234 @@
         <p:spPr>
           <a:xfrm>
             <a:off x="2148840" y="1280160"/>
+            <a:ext cx="1508760" cy="2377440"/>
+          </a:xfrm>
+          <a:prstGeom prst="roundRect">
+            <a:avLst>
+              <a:gd name="adj" fmla="val 4848"/>
+            </a:avLst>
+          </a:prstGeom>
+          <a:solidFill>
+            <a:srgbClr val="0C1620"/>
+          </a:solidFill>
+          <a:ln w="12700">
+            <a:solidFill>
+              <a:srgbClr val="0C1620"/>
+            </a:solidFill>
+            <a:prstDash val="solid"/>
+          </a:ln>
+        </p:spPr>
+        <p:txBody>
+          <a:bodyPr/>
+          <a:lstStyle/>
+          <a:p>
+            <a:endParaRPr lang="en-US"/>
+          </a:p>
+        </p:txBody>
+      </p:sp>
+      <p:sp>
+        <p:nvSpPr>
+          <p:cNvPr id="12" name="Text 9"/>
+          <p:cNvSpPr txBox="1"/>
+          <p:nvPr/>
+        </p:nvSpPr>
+        <p:spPr>
+          <a:xfrm>
+            <a:off x="2240280" y="1417320"/>
+            <a:ext cx="1325880" cy="365760"/>
+          </a:xfrm>
+          <a:prstGeom prst="rect">
+            <a:avLst/>
+          </a:prstGeom>
+          <a:noFill/>
+          <a:ln/>
+        </p:spPr>
+        <p:txBody>
+          <a:bodyPr wrap="square" lIns="0" tIns="0" rIns="0" bIns="0" rtlCol="0" anchor="ctr"/>
+          <a:lstStyle/>
+          <a:p>
+            <a:pPr marL="0" indent="0" algn="ctr">
+              <a:buNone/>
+            </a:pPr>
+            <a:r>
+              <a:rPr lang="en-US" sz="1600" b="1" dirty="0">
+                <a:solidFill>
+                  <a:srgbClr val="FFFFFF"/>
+                </a:solidFill>
+                <a:latin typeface="Calibri" pitchFamily="34" charset="0"/>
+                <a:ea typeface="Calibri" pitchFamily="34" charset="-122"/>
+                <a:cs typeface="Calibri" pitchFamily="34" charset="-120"/>
+              </a:rPr>
+              <a:t>Router</a:t>
+            </a:r>
+            <a:endParaRPr lang="en-US" sz="1600" dirty="0"/>
+          </a:p>
+        </p:txBody>
+      </p:sp>
+      <p:sp>
+        <p:nvSpPr>
+          <p:cNvPr id="13" name="Text 10"/>
+          <p:cNvSpPr txBox="1"/>
+          <p:nvPr/>
+        </p:nvSpPr>
+        <p:spPr>
+          <a:xfrm>
+            <a:off x="2240280" y="1783080"/>
+            <a:ext cx="1325880" cy="228600"/>
+          </a:xfrm>
+          <a:prstGeom prst="rect">
+            <a:avLst/>
+          </a:prstGeom>
+          <a:noFill/>
+          <a:ln/>
+        </p:spPr>
+        <p:txBody>
+          <a:bodyPr wrap="square" lIns="0" tIns="0" rIns="0" bIns="0" rtlCol="0" anchor="ctr"/>
+          <a:lstStyle/>
+          <a:p>
+            <a:pPr marL="0" indent="0" algn="ctr">
+              <a:buNone/>
+            </a:pPr>
+            <a:r>
+              <a:rPr lang="en-US" sz="850" b="1" kern="0" spc="150" dirty="0">
+                <a:solidFill>
+                  <a:srgbClr val="EF3B2D"/>
+                </a:solidFill>
+                <a:latin typeface="Calibri" pitchFamily="34" charset="0"/>
+                <a:ea typeface="Calibri" pitchFamily="34" charset="-122"/>
+                <a:cs typeface="Calibri" pitchFamily="34" charset="-120"/>
+              </a:rPr>
+              <a:t>YOU WRITE</a:t>
+            </a:r>
+            <a:endParaRPr lang="en-US" sz="850" dirty="0"/>
+          </a:p>
+        </p:txBody>
+      </p:sp>
+      <p:sp>
+        <p:nvSpPr>
+          <p:cNvPr id="14" name="Text 11"/>
+          <p:cNvSpPr txBox="1"/>
+          <p:nvPr/>
+        </p:nvSpPr>
+        <p:spPr>
+          <a:xfrm>
+            <a:off x="2240280" y="2103120"/>
+            <a:ext cx="1325880" cy="1463040"/>
+          </a:xfrm>
+          <a:prstGeom prst="rect">
+            <a:avLst/>
+          </a:prstGeom>
+          <a:noFill/>
+          <a:ln/>
+        </p:spPr>
+        <p:txBody>
+          <a:bodyPr wrap="square" lIns="0" tIns="0" rIns="0" bIns="0" rtlCol="0" anchor="t"/>
+          <a:lstStyle/>
+          <a:p>
+            <a:pPr marL="0" indent="0" algn="ctr">
+              <a:buNone/>
+            </a:pPr>
+            <a:r>
+              <a:rPr lang="en-US" sz="950" dirty="0">
+                <a:solidFill>
+                  <a:srgbClr val="C9D3DD"/>
+                </a:solidFill>
+                <a:latin typeface="Courier New" pitchFamily="34" charset="0"/>
+                <a:ea typeface="Courier New" pitchFamily="34" charset="-122"/>
+                <a:cs typeface="Courier New" pitchFamily="34" charset="-120"/>
+              </a:rPr>
+              <a:t>config/routes</a:t>
+            </a:r>
+            <a:r>
+              <a:rPr lang="en-US" sz="950">
+                <a:solidFill>
+                  <a:srgbClr val="C9D3DD"/>
+                </a:solidFill>
+                <a:latin typeface="Courier New" pitchFamily="34" charset="0"/>
+                <a:ea typeface="Courier New" pitchFamily="34" charset="-122"/>
+                <a:cs typeface="Courier New" pitchFamily="34" charset="-120"/>
+              </a:rPr>
+              <a:t>.cfm</a:t>
+            </a:r>
+            <a:br>
+              <a:rPr lang="en-US" sz="950">
+                <a:solidFill>
+                  <a:srgbClr val="C9D3DD"/>
+                </a:solidFill>
+                <a:latin typeface="Courier New" pitchFamily="34" charset="0"/>
+                <a:ea typeface="Courier New" pitchFamily="34" charset="-122"/>
+                <a:cs typeface="Courier New" pitchFamily="34" charset="-120"/>
+              </a:rPr>
+            </a:br>
+            <a:endParaRPr lang="en-US" sz="950" dirty="0"/>
+          </a:p>
+          <a:p>
+            <a:pPr marL="0" indent="0" algn="ctr">
+              <a:buNone/>
+            </a:pPr>
+            <a:r>
+              <a:rPr lang="en-US" sz="950" dirty="0">
+                <a:solidFill>
+                  <a:srgbClr val="C9D3DD"/>
+                </a:solidFill>
+                <a:latin typeface="Courier New" pitchFamily="34" charset="0"/>
+                <a:ea typeface="Courier New" pitchFamily="34" charset="-122"/>
+                <a:cs typeface="Courier New" pitchFamily="34" charset="-120"/>
+              </a:rPr>
+              <a:t>.resources("posts") → Posts.show</a:t>
+            </a:r>
+            <a:endParaRPr lang="en-US" sz="950" dirty="0"/>
+          </a:p>
+        </p:txBody>
+      </p:sp>
+      <p:sp>
+        <p:nvSpPr>
+          <p:cNvPr id="15" name="Text 12"/>
+          <p:cNvSpPr txBox="1"/>
+          <p:nvPr/>
+        </p:nvSpPr>
+        <p:spPr>
+          <a:xfrm>
+            <a:off x="3611880" y="2240280"/>
+            <a:ext cx="274320" cy="365760"/>
+          </a:xfrm>
+          <a:prstGeom prst="rect">
+            <a:avLst/>
+          </a:prstGeom>
+          <a:noFill/>
+          <a:ln/>
+        </p:spPr>
+        <p:txBody>
+          <a:bodyPr wrap="square" lIns="0" tIns="0" rIns="0" bIns="0" rtlCol="0" anchor="ctr"/>
+          <a:lstStyle/>
+          <a:p>
+            <a:pPr marL="0" indent="0" algn="ctr">
+              <a:buNone/>
+            </a:pPr>
+            <a:r>
+              <a:rPr lang="en-US" sz="2400" dirty="0">
+                <a:solidFill>
+                  <a:srgbClr val="EF3B2D"/>
+                </a:solidFill>
+                <a:latin typeface="Calibri" pitchFamily="34" charset="0"/>
+                <a:ea typeface="Calibri" pitchFamily="34" charset="-122"/>
+                <a:cs typeface="Calibri" pitchFamily="34" charset="-120"/>
+              </a:rPr>
+              <a:t>›</a:t>
+            </a:r>
+            <a:endParaRPr lang="en-US" sz="2400" dirty="0"/>
+          </a:p>
+        </p:txBody>
+      </p:sp>
+      <p:sp>
+        <p:nvSpPr>
+          <p:cNvPr id="16" name="Shape 13"/>
+          <p:cNvSpPr/>
+          <p:nvPr/>
+        </p:nvSpPr>
+        <p:spPr>
+          <a:xfrm>
+            <a:off x="3840480" y="1280160"/>
             <a:ext cx="1508760" cy="2377440"/>
           </a:xfrm>
           <a:prstGeom prst="roundRect">
@@ -22793,13 +24231,13 @@
       </p:sp>
       <p:sp>
         <p:nvSpPr>
-          <p:cNvPr id="12" name="Text 9"/>
-          <p:cNvSpPr txBox="1"/>
-          <p:nvPr/>
-        </p:nvSpPr>
-        <p:spPr>
-          <a:xfrm>
-            <a:off x="2240280" y="1417320"/>
+          <p:cNvPr id="17" name="Text 14"/>
+          <p:cNvSpPr txBox="1"/>
+          <p:nvPr/>
+        </p:nvSpPr>
+        <p:spPr>
+          <a:xfrm>
+            <a:off x="3931920" y="1417320"/>
             <a:ext cx="1325880" cy="365760"/>
           </a:xfrm>
           <a:prstGeom prst="rect">
@@ -22824,7 +24262,7 @@
                 <a:ea typeface="Calibri" pitchFamily="34" charset="-122"/>
                 <a:cs typeface="Calibri" pitchFamily="34" charset="-120"/>
               </a:rPr>
-              <a:t>Router</a:t>
+              <a:t>Controller</a:t>
             </a:r>
             <a:endParaRPr lang="en-US" sz="1600" dirty="0"/>
           </a:p>
@@ -22832,14 +24270,53 @@
       </p:sp>
       <p:sp>
         <p:nvSpPr>
-          <p:cNvPr id="13" name="Text 10"/>
-          <p:cNvSpPr txBox="1"/>
-          <p:nvPr/>
-        </p:nvSpPr>
-        <p:spPr>
-          <a:xfrm>
-            <a:off x="2240280" y="1874520"/>
-            <a:ext cx="1325880" cy="1691640"/>
+          <p:cNvPr id="18" name="Text 15"/>
+          <p:cNvSpPr txBox="1"/>
+          <p:nvPr/>
+        </p:nvSpPr>
+        <p:spPr>
+          <a:xfrm>
+            <a:off x="3931920" y="1783080"/>
+            <a:ext cx="1325880" cy="228600"/>
+          </a:xfrm>
+          <a:prstGeom prst="rect">
+            <a:avLst/>
+          </a:prstGeom>
+          <a:noFill/>
+          <a:ln/>
+        </p:spPr>
+        <p:txBody>
+          <a:bodyPr wrap="square" lIns="0" tIns="0" rIns="0" bIns="0" rtlCol="0" anchor="ctr"/>
+          <a:lstStyle/>
+          <a:p>
+            <a:pPr marL="0" indent="0" algn="ctr">
+              <a:buNone/>
+            </a:pPr>
+            <a:r>
+              <a:rPr lang="en-US" sz="850" b="1" kern="0" spc="150" dirty="0">
+                <a:solidFill>
+                  <a:srgbClr val="6B7785"/>
+                </a:solidFill>
+                <a:latin typeface="Calibri" pitchFamily="34" charset="0"/>
+                <a:ea typeface="Calibri" pitchFamily="34" charset="-122"/>
+                <a:cs typeface="Calibri" pitchFamily="34" charset="-120"/>
+              </a:rPr>
+              <a:t>OPTIONAL</a:t>
+            </a:r>
+            <a:endParaRPr lang="en-US" sz="850" dirty="0"/>
+          </a:p>
+        </p:txBody>
+      </p:sp>
+      <p:sp>
+        <p:nvSpPr>
+          <p:cNvPr id="19" name="Text 16"/>
+          <p:cNvSpPr txBox="1"/>
+          <p:nvPr/>
+        </p:nvSpPr>
+        <p:spPr>
+          <a:xfrm>
+            <a:off x="3931920" y="2103120"/>
+            <a:ext cx="1325880" cy="1463040"/>
           </a:xfrm>
           <a:prstGeom prst="rect">
             <a:avLst/>
@@ -22863,15 +24340,247 @@
                 <a:ea typeface="Courier New" pitchFamily="34" charset="-122"/>
                 <a:cs typeface="Courier New" pitchFamily="34" charset="-120"/>
               </a:rPr>
-              <a:t>config/routes.cfm</a:t>
+              <a:t>app/</a:t>
+            </a:r>
+            <a:r>
+              <a:rPr lang="en-US" sz="950">
+                <a:solidFill>
+                  <a:srgbClr val="6B7785"/>
+                </a:solidFill>
+                <a:latin typeface="Courier New" pitchFamily="34" charset="0"/>
+                <a:ea typeface="Courier New" pitchFamily="34" charset="-122"/>
+                <a:cs typeface="Courier New" pitchFamily="34" charset="-120"/>
+              </a:rPr>
+              <a:t>controllers/</a:t>
+            </a:r>
+            <a:br>
+              <a:rPr lang="en-US" sz="950">
+                <a:solidFill>
+                  <a:srgbClr val="6B7785"/>
+                </a:solidFill>
+                <a:latin typeface="Courier New" pitchFamily="34" charset="0"/>
+                <a:ea typeface="Courier New" pitchFamily="34" charset="-122"/>
+                <a:cs typeface="Courier New" pitchFamily="34" charset="-120"/>
+              </a:rPr>
+            </a:br>
+            <a:r>
+              <a:rPr lang="en-US" sz="950">
+                <a:solidFill>
+                  <a:srgbClr val="6B7785"/>
+                </a:solidFill>
+                <a:latin typeface="Courier New" pitchFamily="34" charset="0"/>
+                <a:ea typeface="Courier New" pitchFamily="34" charset="-122"/>
+                <a:cs typeface="Courier New" pitchFamily="34" charset="-120"/>
+              </a:rPr>
+              <a:t>Posts.cfc</a:t>
+            </a:r>
+            <a:br>
+              <a:rPr lang="en-US" sz="1000">
+                <a:solidFill>
+                  <a:srgbClr val="6B7785"/>
+                </a:solidFill>
+                <a:latin typeface="Courier New" pitchFamily="34" charset="0"/>
+                <a:ea typeface="Courier New" pitchFamily="34" charset="-122"/>
+                <a:cs typeface="Courier New" pitchFamily="34" charset="-120"/>
+              </a:rPr>
+            </a:br>
+            <a:endParaRPr lang="en-US" sz="1000" dirty="0"/>
+          </a:p>
+          <a:p>
+            <a:pPr marL="0" indent="0" algn="ctr">
+              <a:buNone/>
+            </a:pPr>
+            <a:r>
+              <a:rPr lang="en-US" sz="950" dirty="0">
+                <a:solidFill>
+                  <a:srgbClr val="6B7785"/>
+                </a:solidFill>
+                <a:latin typeface="Courier New" pitchFamily="34" charset="0"/>
+                <a:ea typeface="Courier New" pitchFamily="34" charset="-122"/>
+                <a:cs typeface="Courier New" pitchFamily="34" charset="-120"/>
+              </a:rPr>
+              <a:t>post = model("Post").findByKey(params.key)</a:t>
             </a:r>
             <a:endParaRPr lang="en-US" sz="950" dirty="0"/>
           </a:p>
+        </p:txBody>
+      </p:sp>
+      <p:sp>
+        <p:nvSpPr>
+          <p:cNvPr id="20" name="Text 17"/>
+          <p:cNvSpPr txBox="1"/>
+          <p:nvPr/>
+        </p:nvSpPr>
+        <p:spPr>
+          <a:xfrm>
+            <a:off x="5303520" y="2240280"/>
+            <a:ext cx="274320" cy="365760"/>
+          </a:xfrm>
+          <a:prstGeom prst="rect">
+            <a:avLst/>
+          </a:prstGeom>
+          <a:noFill/>
+          <a:ln/>
+        </p:spPr>
+        <p:txBody>
+          <a:bodyPr wrap="square" lIns="0" tIns="0" rIns="0" bIns="0" rtlCol="0" anchor="ctr"/>
+          <a:lstStyle/>
           <a:p>
             <a:pPr marL="0" indent="0" algn="ctr">
               <a:buNone/>
             </a:pPr>
             <a:r>
+              <a:rPr lang="en-US" sz="2400" dirty="0">
+                <a:solidFill>
+                  <a:srgbClr val="EF3B2D"/>
+                </a:solidFill>
+                <a:latin typeface="Calibri" pitchFamily="34" charset="0"/>
+                <a:ea typeface="Calibri" pitchFamily="34" charset="-122"/>
+                <a:cs typeface="Calibri" pitchFamily="34" charset="-120"/>
+              </a:rPr>
+              <a:t>›</a:t>
+            </a:r>
+            <a:endParaRPr lang="en-US" sz="2400" dirty="0"/>
+          </a:p>
+        </p:txBody>
+      </p:sp>
+      <p:sp>
+        <p:nvSpPr>
+          <p:cNvPr id="21" name="Shape 18"/>
+          <p:cNvSpPr/>
+          <p:nvPr/>
+        </p:nvSpPr>
+        <p:spPr>
+          <a:xfrm>
+            <a:off x="5532120" y="1280160"/>
+            <a:ext cx="1508760" cy="2377440"/>
+          </a:xfrm>
+          <a:prstGeom prst="roundRect">
+            <a:avLst>
+              <a:gd name="adj" fmla="val 4848"/>
+            </a:avLst>
+          </a:prstGeom>
+          <a:solidFill>
+            <a:srgbClr val="F3F5F7"/>
+          </a:solidFill>
+          <a:ln w="12700">
+            <a:solidFill>
+              <a:srgbClr val="F3F5F7"/>
+            </a:solidFill>
+            <a:prstDash val="solid"/>
+          </a:ln>
+        </p:spPr>
+        <p:txBody>
+          <a:bodyPr/>
+          <a:lstStyle/>
+          <a:p>
+            <a:endParaRPr lang="en-US"/>
+          </a:p>
+        </p:txBody>
+      </p:sp>
+      <p:sp>
+        <p:nvSpPr>
+          <p:cNvPr id="22" name="Text 19"/>
+          <p:cNvSpPr txBox="1"/>
+          <p:nvPr/>
+        </p:nvSpPr>
+        <p:spPr>
+          <a:xfrm>
+            <a:off x="5623560" y="1417320"/>
+            <a:ext cx="1325880" cy="365760"/>
+          </a:xfrm>
+          <a:prstGeom prst="rect">
+            <a:avLst/>
+          </a:prstGeom>
+          <a:noFill/>
+          <a:ln/>
+        </p:spPr>
+        <p:txBody>
+          <a:bodyPr wrap="square" lIns="0" tIns="0" rIns="0" bIns="0" rtlCol="0" anchor="ctr"/>
+          <a:lstStyle/>
+          <a:p>
+            <a:pPr marL="0" indent="0" algn="ctr">
+              <a:buNone/>
+            </a:pPr>
+            <a:r>
+              <a:rPr lang="en-US" sz="1600" b="1" dirty="0">
+                <a:solidFill>
+                  <a:srgbClr val="1A2430"/>
+                </a:solidFill>
+                <a:latin typeface="Calibri" pitchFamily="34" charset="0"/>
+                <a:ea typeface="Calibri" pitchFamily="34" charset="-122"/>
+                <a:cs typeface="Calibri" pitchFamily="34" charset="-120"/>
+              </a:rPr>
+              <a:t>Model</a:t>
+            </a:r>
+            <a:endParaRPr lang="en-US" sz="1600" dirty="0"/>
+          </a:p>
+        </p:txBody>
+      </p:sp>
+      <p:sp>
+        <p:nvSpPr>
+          <p:cNvPr id="23" name="Text 20"/>
+          <p:cNvSpPr txBox="1"/>
+          <p:nvPr/>
+        </p:nvSpPr>
+        <p:spPr>
+          <a:xfrm>
+            <a:off x="5623560" y="1783080"/>
+            <a:ext cx="1325880" cy="228600"/>
+          </a:xfrm>
+          <a:prstGeom prst="rect">
+            <a:avLst/>
+          </a:prstGeom>
+          <a:noFill/>
+          <a:ln/>
+        </p:spPr>
+        <p:txBody>
+          <a:bodyPr wrap="square" lIns="0" tIns="0" rIns="0" bIns="0" rtlCol="0" anchor="ctr"/>
+          <a:lstStyle/>
+          <a:p>
+            <a:pPr marL="0" indent="0" algn="ctr">
+              <a:buNone/>
+            </a:pPr>
+            <a:r>
+              <a:rPr lang="en-US" sz="850" b="1" kern="0" spc="150" dirty="0">
+                <a:solidFill>
+                  <a:srgbClr val="6B7785"/>
+                </a:solidFill>
+                <a:latin typeface="Calibri" pitchFamily="34" charset="0"/>
+                <a:ea typeface="Calibri" pitchFamily="34" charset="-122"/>
+                <a:cs typeface="Calibri" pitchFamily="34" charset="-120"/>
+              </a:rPr>
+              <a:t>OPTIONAL</a:t>
+            </a:r>
+            <a:endParaRPr lang="en-US" sz="850" dirty="0"/>
+          </a:p>
+        </p:txBody>
+      </p:sp>
+      <p:sp>
+        <p:nvSpPr>
+          <p:cNvPr id="24" name="Text 21"/>
+          <p:cNvSpPr txBox="1"/>
+          <p:nvPr/>
+        </p:nvSpPr>
+        <p:spPr>
+          <a:xfrm>
+            <a:off x="5623560" y="2103120"/>
+            <a:ext cx="1325880" cy="1463040"/>
+          </a:xfrm>
+          <a:prstGeom prst="rect">
+            <a:avLst/>
+          </a:prstGeom>
+          <a:noFill/>
+          <a:ln/>
+        </p:spPr>
+        <p:txBody>
+          <a:bodyPr wrap="square" lIns="0" tIns="0" rIns="0" bIns="0" rtlCol="0" anchor="t"/>
+          <a:lstStyle/>
+          <a:p>
+            <a:pPr marL="0" indent="0" algn="ctr">
+              <a:buNone/>
+            </a:pPr>
+            <a:r>
               <a:rPr lang="en-US" sz="950" dirty="0">
                 <a:solidFill>
                   <a:srgbClr val="6B7785"/>
@@ -22880,21 +24589,80 @@
                 <a:ea typeface="Courier New" pitchFamily="34" charset="-122"/>
                 <a:cs typeface="Courier New" pitchFamily="34" charset="-120"/>
               </a:rPr>
-              <a:t>.resources("posts") → Posts.show</a:t>
-            </a:r>
+              <a:t>app/</a:t>
+            </a:r>
+            <a:r>
+              <a:rPr lang="en-US" sz="950">
+                <a:solidFill>
+                  <a:srgbClr val="6B7785"/>
+                </a:solidFill>
+                <a:latin typeface="Courier New" pitchFamily="34" charset="0"/>
+                <a:ea typeface="Courier New" pitchFamily="34" charset="-122"/>
+                <a:cs typeface="Courier New" pitchFamily="34" charset="-120"/>
+              </a:rPr>
+              <a:t>models/</a:t>
+            </a:r>
+            <a:br>
+              <a:rPr lang="en-US" sz="950">
+                <a:solidFill>
+                  <a:srgbClr val="6B7785"/>
+                </a:solidFill>
+                <a:latin typeface="Courier New" pitchFamily="34" charset="0"/>
+                <a:ea typeface="Courier New" pitchFamily="34" charset="-122"/>
+                <a:cs typeface="Courier New" pitchFamily="34" charset="-120"/>
+              </a:rPr>
+            </a:br>
+            <a:r>
+              <a:rPr lang="en-US" sz="950">
+                <a:solidFill>
+                  <a:srgbClr val="6B7785"/>
+                </a:solidFill>
+                <a:latin typeface="Courier New" pitchFamily="34" charset="0"/>
+                <a:ea typeface="Courier New" pitchFamily="34" charset="-122"/>
+                <a:cs typeface="Courier New" pitchFamily="34" charset="-120"/>
+              </a:rPr>
+              <a:t>Post.cfc</a:t>
+            </a:r>
+            <a:br>
+              <a:rPr lang="en-US" sz="950">
+                <a:solidFill>
+                  <a:srgbClr val="6B7785"/>
+                </a:solidFill>
+                <a:latin typeface="Courier New" pitchFamily="34" charset="0"/>
+                <a:ea typeface="Courier New" pitchFamily="34" charset="-122"/>
+                <a:cs typeface="Courier New" pitchFamily="34" charset="-120"/>
+              </a:rPr>
+            </a:br>
             <a:endParaRPr lang="en-US" sz="950" dirty="0"/>
           </a:p>
-        </p:txBody>
-      </p:sp>
-      <p:sp>
-        <p:nvSpPr>
-          <p:cNvPr id="14" name="Text 11"/>
-          <p:cNvSpPr txBox="1"/>
-          <p:nvPr/>
-        </p:nvSpPr>
-        <p:spPr>
-          <a:xfrm>
-            <a:off x="3611880" y="2240280"/>
+          <a:p>
+            <a:pPr marL="0" indent="0" algn="ctr">
+              <a:buNone/>
+            </a:pPr>
+            <a:r>
+              <a:rPr lang="en-US" sz="950" dirty="0">
+                <a:solidFill>
+                  <a:srgbClr val="6B7785"/>
+                </a:solidFill>
+                <a:latin typeface="Courier New" pitchFamily="34" charset="0"/>
+                <a:ea typeface="Courier New" pitchFamily="34" charset="-122"/>
+                <a:cs typeface="Courier New" pitchFamily="34" charset="-120"/>
+              </a:rPr>
+              <a:t>SQL generated, every value a cfqueryparam</a:t>
+            </a:r>
+            <a:endParaRPr lang="en-US" sz="950" dirty="0"/>
+          </a:p>
+        </p:txBody>
+      </p:sp>
+      <p:sp>
+        <p:nvSpPr>
+          <p:cNvPr id="25" name="Text 22"/>
+          <p:cNvSpPr txBox="1"/>
+          <p:nvPr/>
+        </p:nvSpPr>
+        <p:spPr>
+          <a:xfrm>
+            <a:off x="6995160" y="2240280"/>
             <a:ext cx="274320" cy="365760"/>
           </a:xfrm>
           <a:prstGeom prst="rect">
@@ -22927,13 +24695,13 @@
       </p:sp>
       <p:sp>
         <p:nvSpPr>
-          <p:cNvPr id="15" name="Shape 12"/>
+          <p:cNvPr id="26" name="Shape 23"/>
           <p:cNvSpPr/>
           <p:nvPr/>
         </p:nvSpPr>
         <p:spPr>
           <a:xfrm>
-            <a:off x="3840480" y="1280160"/>
+            <a:off x="7223760" y="1280160"/>
             <a:ext cx="1508760" cy="2377440"/>
           </a:xfrm>
           <a:prstGeom prst="roundRect">
@@ -22961,343 +24729,7 @@
       </p:sp>
       <p:sp>
         <p:nvSpPr>
-          <p:cNvPr id="16" name="Text 13"/>
-          <p:cNvSpPr txBox="1"/>
-          <p:nvPr/>
-        </p:nvSpPr>
-        <p:spPr>
-          <a:xfrm>
-            <a:off x="3931920" y="1417320"/>
-            <a:ext cx="1325880" cy="365760"/>
-          </a:xfrm>
-          <a:prstGeom prst="rect">
-            <a:avLst/>
-          </a:prstGeom>
-          <a:noFill/>
-          <a:ln/>
-        </p:spPr>
-        <p:txBody>
-          <a:bodyPr wrap="square" lIns="0" tIns="0" rIns="0" bIns="0" rtlCol="0" anchor="ctr"/>
-          <a:lstStyle/>
-          <a:p>
-            <a:pPr marL="0" indent="0" algn="ctr">
-              <a:buNone/>
-            </a:pPr>
-            <a:r>
-              <a:rPr lang="en-US" sz="1600" b="1" dirty="0">
-                <a:solidFill>
-                  <a:srgbClr val="FFFFFF"/>
-                </a:solidFill>
-                <a:latin typeface="Calibri" pitchFamily="34" charset="0"/>
-                <a:ea typeface="Calibri" pitchFamily="34" charset="-122"/>
-                <a:cs typeface="Calibri" pitchFamily="34" charset="-120"/>
-              </a:rPr>
-              <a:t>Controller</a:t>
-            </a:r>
-            <a:endParaRPr lang="en-US" sz="1600" dirty="0"/>
-          </a:p>
-        </p:txBody>
-      </p:sp>
-      <p:sp>
-        <p:nvSpPr>
-          <p:cNvPr id="17" name="Text 14"/>
-          <p:cNvSpPr txBox="1"/>
-          <p:nvPr/>
-        </p:nvSpPr>
-        <p:spPr>
-          <a:xfrm>
-            <a:off x="3931920" y="1874520"/>
-            <a:ext cx="1325880" cy="1691640"/>
-          </a:xfrm>
-          <a:prstGeom prst="rect">
-            <a:avLst/>
-          </a:prstGeom>
-          <a:noFill/>
-          <a:ln/>
-        </p:spPr>
-        <p:txBody>
-          <a:bodyPr wrap="square" lIns="0" tIns="0" rIns="0" bIns="0" rtlCol="0" anchor="t"/>
-          <a:lstStyle/>
-          <a:p>
-            <a:pPr marL="0" indent="0" algn="ctr">
-              <a:buNone/>
-            </a:pPr>
-            <a:r>
-              <a:rPr lang="en-US" sz="950" dirty="0">
-                <a:solidFill>
-                  <a:srgbClr val="C9D3DD"/>
-                </a:solidFill>
-                <a:latin typeface="Courier New" pitchFamily="34" charset="0"/>
-                <a:ea typeface="Courier New" pitchFamily="34" charset="-122"/>
-                <a:cs typeface="Courier New" pitchFamily="34" charset="-120"/>
-              </a:rPr>
-              <a:t>app/controllers/Posts.cfc</a:t>
-            </a:r>
-            <a:endParaRPr lang="en-US" sz="950" dirty="0"/>
-          </a:p>
-          <a:p>
-            <a:pPr marL="0" indent="0" algn="ctr">
-              <a:buNone/>
-            </a:pPr>
-            <a:r>
-              <a:rPr lang="en-US" sz="950" dirty="0">
-                <a:solidFill>
-                  <a:srgbClr val="C9D3DD"/>
-                </a:solidFill>
-                <a:latin typeface="Courier New" pitchFamily="34" charset="0"/>
-                <a:ea typeface="Courier New" pitchFamily="34" charset="-122"/>
-                <a:cs typeface="Courier New" pitchFamily="34" charset="-120"/>
-              </a:rPr>
-              <a:t>post = model("Post").findByKey(params.key)</a:t>
-            </a:r>
-            <a:endParaRPr lang="en-US" sz="950" dirty="0"/>
-          </a:p>
-        </p:txBody>
-      </p:sp>
-      <p:sp>
-        <p:nvSpPr>
-          <p:cNvPr id="18" name="Text 15"/>
-          <p:cNvSpPr txBox="1"/>
-          <p:nvPr/>
-        </p:nvSpPr>
-        <p:spPr>
-          <a:xfrm>
-            <a:off x="5303520" y="2240280"/>
-            <a:ext cx="274320" cy="365760"/>
-          </a:xfrm>
-          <a:prstGeom prst="rect">
-            <a:avLst/>
-          </a:prstGeom>
-          <a:noFill/>
-          <a:ln/>
-        </p:spPr>
-        <p:txBody>
-          <a:bodyPr wrap="square" lIns="0" tIns="0" rIns="0" bIns="0" rtlCol="0" anchor="ctr"/>
-          <a:lstStyle/>
-          <a:p>
-            <a:pPr marL="0" indent="0" algn="ctr">
-              <a:buNone/>
-            </a:pPr>
-            <a:r>
-              <a:rPr lang="en-US" sz="2400" dirty="0">
-                <a:solidFill>
-                  <a:srgbClr val="EF3B2D"/>
-                </a:solidFill>
-                <a:latin typeface="Calibri" pitchFamily="34" charset="0"/>
-                <a:ea typeface="Calibri" pitchFamily="34" charset="-122"/>
-                <a:cs typeface="Calibri" pitchFamily="34" charset="-120"/>
-              </a:rPr>
-              <a:t>›</a:t>
-            </a:r>
-            <a:endParaRPr lang="en-US" sz="2400" dirty="0"/>
-          </a:p>
-        </p:txBody>
-      </p:sp>
-      <p:sp>
-        <p:nvSpPr>
-          <p:cNvPr id="19" name="Shape 16"/>
-          <p:cNvSpPr/>
-          <p:nvPr/>
-        </p:nvSpPr>
-        <p:spPr>
-          <a:xfrm>
-            <a:off x="5532120" y="1280160"/>
-            <a:ext cx="1508760" cy="2377440"/>
-          </a:xfrm>
-          <a:prstGeom prst="roundRect">
-            <a:avLst>
-              <a:gd name="adj" fmla="val 4848"/>
-            </a:avLst>
-          </a:prstGeom>
-          <a:solidFill>
-            <a:srgbClr val="0C1620"/>
-          </a:solidFill>
-          <a:ln w="12700">
-            <a:solidFill>
-              <a:srgbClr val="0C1620"/>
-            </a:solidFill>
-            <a:prstDash val="solid"/>
-          </a:ln>
-        </p:spPr>
-        <p:txBody>
-          <a:bodyPr/>
-          <a:lstStyle/>
-          <a:p>
-            <a:endParaRPr lang="en-US"/>
-          </a:p>
-        </p:txBody>
-      </p:sp>
-      <p:sp>
-        <p:nvSpPr>
-          <p:cNvPr id="20" name="Text 17"/>
-          <p:cNvSpPr txBox="1"/>
-          <p:nvPr/>
-        </p:nvSpPr>
-        <p:spPr>
-          <a:xfrm>
-            <a:off x="5623560" y="1417320"/>
-            <a:ext cx="1325880" cy="365760"/>
-          </a:xfrm>
-          <a:prstGeom prst="rect">
-            <a:avLst/>
-          </a:prstGeom>
-          <a:noFill/>
-          <a:ln/>
-        </p:spPr>
-        <p:txBody>
-          <a:bodyPr wrap="square" lIns="0" tIns="0" rIns="0" bIns="0" rtlCol="0" anchor="ctr"/>
-          <a:lstStyle/>
-          <a:p>
-            <a:pPr marL="0" indent="0" algn="ctr">
-              <a:buNone/>
-            </a:pPr>
-            <a:r>
-              <a:rPr lang="en-US" sz="1600" b="1" dirty="0">
-                <a:solidFill>
-                  <a:srgbClr val="FFFFFF"/>
-                </a:solidFill>
-                <a:latin typeface="Calibri" pitchFamily="34" charset="0"/>
-                <a:ea typeface="Calibri" pitchFamily="34" charset="-122"/>
-                <a:cs typeface="Calibri" pitchFamily="34" charset="-120"/>
-              </a:rPr>
-              <a:t>Model</a:t>
-            </a:r>
-            <a:endParaRPr lang="en-US" sz="1600" dirty="0"/>
-          </a:p>
-        </p:txBody>
-      </p:sp>
-      <p:sp>
-        <p:nvSpPr>
-          <p:cNvPr id="21" name="Text 18"/>
-          <p:cNvSpPr txBox="1"/>
-          <p:nvPr/>
-        </p:nvSpPr>
-        <p:spPr>
-          <a:xfrm>
-            <a:off x="5623560" y="1874520"/>
-            <a:ext cx="1325880" cy="1691640"/>
-          </a:xfrm>
-          <a:prstGeom prst="rect">
-            <a:avLst/>
-          </a:prstGeom>
-          <a:noFill/>
-          <a:ln/>
-        </p:spPr>
-        <p:txBody>
-          <a:bodyPr wrap="square" lIns="0" tIns="0" rIns="0" bIns="0" rtlCol="0" anchor="t"/>
-          <a:lstStyle/>
-          <a:p>
-            <a:pPr marL="0" indent="0" algn="ctr">
-              <a:buNone/>
-            </a:pPr>
-            <a:r>
-              <a:rPr lang="en-US" sz="950" dirty="0">
-                <a:solidFill>
-                  <a:srgbClr val="C9D3DD"/>
-                </a:solidFill>
-                <a:latin typeface="Courier New" pitchFamily="34" charset="0"/>
-                <a:ea typeface="Courier New" pitchFamily="34" charset="-122"/>
-                <a:cs typeface="Courier New" pitchFamily="34" charset="-120"/>
-              </a:rPr>
-              <a:t>app/models/Post.cfc</a:t>
-            </a:r>
-            <a:endParaRPr lang="en-US" sz="950" dirty="0"/>
-          </a:p>
-          <a:p>
-            <a:pPr marL="0" indent="0" algn="ctr">
-              <a:buNone/>
-            </a:pPr>
-            <a:r>
-              <a:rPr lang="en-US" sz="950" dirty="0">
-                <a:solidFill>
-                  <a:srgbClr val="C9D3DD"/>
-                </a:solidFill>
-                <a:latin typeface="Courier New" pitchFamily="34" charset="0"/>
-                <a:ea typeface="Courier New" pitchFamily="34" charset="-122"/>
-                <a:cs typeface="Courier New" pitchFamily="34" charset="-120"/>
-              </a:rPr>
-              <a:t>SQL generated, every value a cfqueryparam</a:t>
-            </a:r>
-            <a:endParaRPr lang="en-US" sz="950" dirty="0"/>
-          </a:p>
-        </p:txBody>
-      </p:sp>
-      <p:sp>
-        <p:nvSpPr>
-          <p:cNvPr id="22" name="Text 19"/>
-          <p:cNvSpPr txBox="1"/>
-          <p:nvPr/>
-        </p:nvSpPr>
-        <p:spPr>
-          <a:xfrm>
-            <a:off x="6995160" y="2240280"/>
-            <a:ext cx="274320" cy="365760"/>
-          </a:xfrm>
-          <a:prstGeom prst="rect">
-            <a:avLst/>
-          </a:prstGeom>
-          <a:noFill/>
-          <a:ln/>
-        </p:spPr>
-        <p:txBody>
-          <a:bodyPr wrap="square" lIns="0" tIns="0" rIns="0" bIns="0" rtlCol="0" anchor="ctr"/>
-          <a:lstStyle/>
-          <a:p>
-            <a:pPr marL="0" indent="0" algn="ctr">
-              <a:buNone/>
-            </a:pPr>
-            <a:r>
-              <a:rPr lang="en-US" sz="2400" dirty="0">
-                <a:solidFill>
-                  <a:srgbClr val="EF3B2D"/>
-                </a:solidFill>
-                <a:latin typeface="Calibri" pitchFamily="34" charset="0"/>
-                <a:ea typeface="Calibri" pitchFamily="34" charset="-122"/>
-                <a:cs typeface="Calibri" pitchFamily="34" charset="-120"/>
-              </a:rPr>
-              <a:t>›</a:t>
-            </a:r>
-            <a:endParaRPr lang="en-US" sz="2400" dirty="0"/>
-          </a:p>
-        </p:txBody>
-      </p:sp>
-      <p:sp>
-        <p:nvSpPr>
-          <p:cNvPr id="23" name="Shape 20"/>
-          <p:cNvSpPr/>
-          <p:nvPr/>
-        </p:nvSpPr>
-        <p:spPr>
-          <a:xfrm>
-            <a:off x="7223760" y="1280160"/>
-            <a:ext cx="1508760" cy="2377440"/>
-          </a:xfrm>
-          <a:prstGeom prst="roundRect">
-            <a:avLst>
-              <a:gd name="adj" fmla="val 4848"/>
-            </a:avLst>
-          </a:prstGeom>
-          <a:solidFill>
-            <a:srgbClr val="F3F5F7"/>
-          </a:solidFill>
-          <a:ln w="12700">
-            <a:solidFill>
-              <a:srgbClr val="F3F5F7"/>
-            </a:solidFill>
-            <a:prstDash val="solid"/>
-          </a:ln>
-        </p:spPr>
-        <p:txBody>
-          <a:bodyPr/>
-          <a:lstStyle/>
-          <a:p>
-            <a:endParaRPr lang="en-US"/>
-          </a:p>
-        </p:txBody>
-      </p:sp>
-      <p:sp>
-        <p:nvSpPr>
-          <p:cNvPr id="24" name="Text 21"/>
+          <p:cNvPr id="27" name="Text 24"/>
           <p:cNvSpPr txBox="1"/>
           <p:nvPr/>
         </p:nvSpPr>
@@ -23322,7 +24754,7 @@
             <a:r>
               <a:rPr lang="en-US" sz="1600" b="1" dirty="0">
                 <a:solidFill>
-                  <a:srgbClr val="1A2430"/>
+                  <a:srgbClr val="FFFFFF"/>
                 </a:solidFill>
                 <a:latin typeface="Calibri" pitchFamily="34" charset="0"/>
                 <a:ea typeface="Calibri" pitchFamily="34" charset="-122"/>
@@ -23336,14 +24768,53 @@
       </p:sp>
       <p:sp>
         <p:nvSpPr>
-          <p:cNvPr id="25" name="Text 22"/>
-          <p:cNvSpPr txBox="1"/>
-          <p:nvPr/>
-        </p:nvSpPr>
-        <p:spPr>
-          <a:xfrm>
-            <a:off x="7315200" y="1874520"/>
-            <a:ext cx="1325880" cy="1691640"/>
+          <p:cNvPr id="28" name="Text 25"/>
+          <p:cNvSpPr txBox="1"/>
+          <p:nvPr/>
+        </p:nvSpPr>
+        <p:spPr>
+          <a:xfrm>
+            <a:off x="7315200" y="1783080"/>
+            <a:ext cx="1325880" cy="228600"/>
+          </a:xfrm>
+          <a:prstGeom prst="rect">
+            <a:avLst/>
+          </a:prstGeom>
+          <a:noFill/>
+          <a:ln/>
+        </p:spPr>
+        <p:txBody>
+          <a:bodyPr wrap="square" lIns="0" tIns="0" rIns="0" bIns="0" rtlCol="0" anchor="ctr"/>
+          <a:lstStyle/>
+          <a:p>
+            <a:pPr marL="0" indent="0" algn="ctr">
+              <a:buNone/>
+            </a:pPr>
+            <a:r>
+              <a:rPr lang="en-US" sz="850" b="1" kern="0" spc="150" dirty="0">
+                <a:solidFill>
+                  <a:srgbClr val="EF3B2D"/>
+                </a:solidFill>
+                <a:latin typeface="Calibri" pitchFamily="34" charset="0"/>
+                <a:ea typeface="Calibri" pitchFamily="34" charset="-122"/>
+                <a:cs typeface="Calibri" pitchFamily="34" charset="-120"/>
+              </a:rPr>
+              <a:t>YOU WRITE</a:t>
+            </a:r>
+            <a:endParaRPr lang="en-US" sz="850" dirty="0"/>
+          </a:p>
+        </p:txBody>
+      </p:sp>
+      <p:sp>
+        <p:nvSpPr>
+          <p:cNvPr id="29" name="Text 26"/>
+          <p:cNvSpPr txBox="1"/>
+          <p:nvPr/>
+        </p:nvSpPr>
+        <p:spPr>
+          <a:xfrm>
+            <a:off x="7315200" y="2103120"/>
+            <a:ext cx="1325880" cy="1463040"/>
           </a:xfrm>
           <a:prstGeom prst="rect">
             <a:avLst/>
@@ -23361,13 +24832,56 @@
             <a:r>
               <a:rPr lang="en-US" sz="950" dirty="0">
                 <a:solidFill>
-                  <a:srgbClr val="6B7785"/>
-                </a:solidFill>
-                <a:latin typeface="Courier New" pitchFamily="34" charset="0"/>
-                <a:ea typeface="Courier New" pitchFamily="34" charset="-122"/>
-                <a:cs typeface="Courier New" pitchFamily="34" charset="-120"/>
-              </a:rPr>
-              <a:t>app/views/posts/show.cfm</a:t>
+                  <a:srgbClr val="C9D3DD"/>
+                </a:solidFill>
+                <a:latin typeface="Courier New" pitchFamily="34" charset="0"/>
+                <a:ea typeface="Courier New" pitchFamily="34" charset="-122"/>
+                <a:cs typeface="Courier New" pitchFamily="34" charset="-120"/>
+              </a:rPr>
+              <a:t>app/views/</a:t>
+            </a:r>
+            <a:r>
+              <a:rPr lang="en-US" sz="950">
+                <a:solidFill>
+                  <a:srgbClr val="C9D3DD"/>
+                </a:solidFill>
+                <a:latin typeface="Courier New" pitchFamily="34" charset="0"/>
+                <a:ea typeface="Courier New" pitchFamily="34" charset="-122"/>
+                <a:cs typeface="Courier New" pitchFamily="34" charset="-120"/>
+              </a:rPr>
+              <a:t>posts/</a:t>
+            </a:r>
+            <a:br>
+              <a:rPr lang="en-US" sz="950">
+                <a:solidFill>
+                  <a:srgbClr val="C9D3DD"/>
+                </a:solidFill>
+                <a:latin typeface="Courier New" pitchFamily="34" charset="0"/>
+                <a:ea typeface="Courier New" pitchFamily="34" charset="-122"/>
+                <a:cs typeface="Courier New" pitchFamily="34" charset="-120"/>
+              </a:rPr>
+            </a:br>
+            <a:r>
+              <a:rPr lang="en-US" sz="950">
+                <a:solidFill>
+                  <a:srgbClr val="C9D3DD"/>
+                </a:solidFill>
+                <a:latin typeface="Courier New" pitchFamily="34" charset="0"/>
+                <a:ea typeface="Courier New" pitchFamily="34" charset="-122"/>
+                <a:cs typeface="Courier New" pitchFamily="34" charset="-120"/>
+              </a:rPr>
+              <a:t>show</a:t>
+            </a:r>
+            <a:r>
+              <a:rPr lang="en-US" sz="950" dirty="0">
+                <a:solidFill>
+                  <a:srgbClr val="C9D3DD"/>
+                </a:solidFill>
+                <a:latin typeface="Courier New" pitchFamily="34" charset="0"/>
+                <a:ea typeface="Courier New" pitchFamily="34" charset="-122"/>
+                <a:cs typeface="Courier New" pitchFamily="34" charset="-120"/>
+              </a:rPr>
+              <a:t>.cfm</a:t>
             </a:r>
             <a:endParaRPr lang="en-US" sz="950" dirty="0"/>
           </a:p>
@@ -23378,7 +24892,7 @@
             <a:r>
               <a:rPr lang="en-US" sz="950" dirty="0">
                 <a:solidFill>
-                  <a:srgbClr val="6B7785"/>
+                  <a:srgbClr val="C9D3DD"/>
                 </a:solidFill>
                 <a:latin typeface="Courier New" pitchFamily="34" charset="0"/>
                 <a:ea typeface="Courier New" pitchFamily="34" charset="-122"/>
@@ -23392,7 +24906,7 @@
       </p:sp>
       <p:sp>
         <p:nvSpPr>
-          <p:cNvPr id="26" name="Text 23"/>
+          <p:cNvPr id="30" name="Text 27"/>
           <p:cNvSpPr txBox="1"/>
           <p:nvPr/>
         </p:nvSpPr>
@@ -23427,7 +24941,7 @@
                 <a:ea typeface="Calibri" pitchFamily="34" charset="-122"/>
                 <a:cs typeface="Calibri" pitchFamily="34" charset="-120"/>
               </a:rPr>
-              <a:t>You write the two dark boxes. The router, the SQL, the layout, the error pages, the CSRF token and the flash messages are the framework's job.</a:t>
+              <a:t>A route and a view are a complete page. No controller file? Wheels supplies a default one. No model? The view just renders. Controllers and models appear when you have logic or data to put in them.</a:t>
             </a:r>
             <a:endParaRPr lang="en-US" sz="1250" dirty="0"/>
           </a:p>
@@ -23448,7 +24962,7 @@
                 <a:ea typeface="Calibri" pitchFamily="34" charset="-122"/>
                 <a:cs typeface="Calibri" pitchFamily="34" charset="-120"/>
               </a:rPr>
-              <a:t>Same controller can answer HTML, JSON or XML via renderWith() — the API story is the same story.</a:t>
+              <a:t>Everything else — URL parsing, the SQL, the layout, error pages, CSRF tokens, flash messages — is the framework's job. Same controller answers HTML, JSON or XML via renderWith().</a:t>
             </a:r>
             <a:endParaRPr lang="en-US" sz="1250" dirty="0"/>
           </a:p>
@@ -24090,7 +25604,29 @@
                 <a:ea typeface="Courier New" pitchFamily="34" charset="-122"/>
                 <a:cs typeface="Courier New" pitchFamily="34" charset="-120"/>
               </a:rPr>
-              <a:t>├── public/          </a:t>
+              <a:t>├── </a:t>
+            </a:r>
+            <a:r>
+              <a:rPr lang="en-US" sz="1150" b="1" dirty="0">
+                <a:solidFill>
+                  <a:srgbClr val="E6EDF3"/>
+                </a:solidFill>
+                <a:latin typeface="Courier New" pitchFamily="34" charset="0"/>
+                <a:ea typeface="Courier New" pitchFamily="34" charset="-122"/>
+                <a:cs typeface="Courier New" pitchFamily="34" charset="-120"/>
+              </a:rPr>
+              <a:t>public/</a:t>
+            </a:r>
+            <a:r>
+              <a:rPr lang="en-US" sz="1150" dirty="0">
+                <a:solidFill>
+                  <a:srgbClr val="E6EDF3"/>
+                </a:solidFill>
+                <a:latin typeface="Courier New" pitchFamily="34" charset="0"/>
+                <a:ea typeface="Courier New" pitchFamily="34" charset="-122"/>
+                <a:cs typeface="Courier New" pitchFamily="34" charset="-120"/>
+              </a:rPr>
+              <a:t>          </a:t>
             </a:r>
             <a:r>
               <a:rPr lang="en-US" sz="1150" dirty="0">
@@ -24132,18 +25668,7 @@
                 <a:ea typeface="Courier New" pitchFamily="34" charset="-122"/>
                 <a:cs typeface="Courier New" pitchFamily="34" charset="-120"/>
               </a:rPr>
-              <a:t>← </a:t>
-            </a:r>
-            <a:r>
-              <a:rPr lang="en-US" sz="1150" dirty="0" err="1">
-                <a:solidFill>
-                  <a:srgbClr val="9AA7B4"/>
-                </a:solidFill>
-                <a:latin typeface="Courier New" pitchFamily="34" charset="0"/>
-                <a:ea typeface="Courier New" pitchFamily="34" charset="-122"/>
-                <a:cs typeface="Courier New" pitchFamily="34" charset="-120"/>
-              </a:rPr>
-              <a:t>WheelsTest</a:t>
+              <a:t>← WheelsTest</a:t>
             </a:r>
             <a:endParaRPr lang="en-US" sz="1150" dirty="0"/>
           </a:p>
